--- a/Model MBR August.pptx
+++ b/Model MBR August.pptx
@@ -5,11 +5,10 @@
     <p:sldMasterId id="2147483661" r:id="rId1"/>
   </p:sldMasterIdLst>
   <p:notesMasterIdLst>
-    <p:notesMasterId r:id="rId4"/>
+    <p:notesMasterId r:id="rId3"/>
   </p:notesMasterIdLst>
   <p:sldIdLst>
-    <p:sldId id="2701" r:id="rId2"/>
-    <p:sldId id="269" r:id="rId3"/>
+    <p:sldId id="269" r:id="rId2"/>
   </p:sldIdLst>
   <p:sldSz cx="12192000" cy="6858000"/>
   <p:notesSz cx="6858000" cy="9144000"/>
@@ -113,7 +112,6 @@
       <p14:sectionLst xmlns:p14="http://schemas.microsoft.com/office/powerpoint/2010/main">
         <p14:section name="模型基本盘及汇总" id="{C6715D47-869E-44D0-B78F-B43D1D3129E5}">
           <p14:sldIdLst>
-            <p14:sldId id="2701"/>
             <p14:sldId id="269"/>
           </p14:sldIdLst>
         </p14:section>
@@ -227,7 +225,7 @@
           <a:p>
             <a:fld id="{B8987E84-919A-4E68-92C1-3D5B3E32CEA5}" type="datetimeFigureOut">
               <a:rPr lang="zh-CN" altLang="en-US" smtClean="0"/>
-              <a:t>2026/8/27</a:t>
+              <a:t>2026/8/30</a:t>
             </a:fld>
             <a:endParaRPr lang="zh-CN" altLang="en-US"/>
           </a:p>
@@ -1496,7 +1494,7 @@
             <a:fld id="{4B68A51D-33DD-5B4A-A86B-549782FCD6DF}" type="datetimeFigureOut">
               <a:rPr kumimoji="1" lang="zh-CN" altLang="en-US" smtClean="0"/>
               <a:pPr/>
-              <a:t>2026/8/27</a:t>
+              <a:t>2026/8/30</a:t>
             </a:fld>
             <a:endParaRPr kumimoji="1" lang="zh-CN" altLang="en-US"/>
           </a:p>
@@ -1900,36 +1898,6 @@
           <a:chExt cx="0" cy="0"/>
         </a:xfrm>
       </p:grpSpPr>
-    </p:spTree>
-    <p:extLst>
-      <p:ext uri="{BB962C8B-B14F-4D97-AF65-F5344CB8AC3E}">
-        <p14:creationId xmlns:p14="http://schemas.microsoft.com/office/powerpoint/2010/main" val="1260655165"/>
-      </p:ext>
-    </p:extLst>
-  </p:cSld>
-  <p:clrMapOvr>
-    <a:masterClrMapping/>
-  </p:clrMapOvr>
-</p:sld>
-</file>
-
-<file path=ppt/slides/slide2.xml><?xml version="1.0" encoding="utf-8"?>
-<p:sld xmlns:a="http://schemas.openxmlformats.org/drawingml/2006/main" xmlns:r="http://schemas.openxmlformats.org/officeDocument/2006/relationships" xmlns:p="http://schemas.openxmlformats.org/presentationml/2006/main">
-  <p:cSld>
-    <p:spTree>
-      <p:nvGrpSpPr>
-        <p:cNvPr id="1" name=""/>
-        <p:cNvGrpSpPr/>
-        <p:nvPr/>
-      </p:nvGrpSpPr>
-      <p:grpSpPr>
-        <a:xfrm>
-          <a:off x="0" y="0"/>
-          <a:ext cx="0" cy="0"/>
-          <a:chOff x="0" y="0"/>
-          <a:chExt cx="0" cy="0"/>
-        </a:xfrm>
-      </p:grpSpPr>
       <p:sp>
         <p:nvSpPr>
           <p:cNvPr id="2" name="title">
@@ -1959,40 +1927,2383 @@
           <a:bodyPr wrap="none" lIns="0" tIns="0" rIns="0" bIns="0" rtlCol="0" anchor="ctr"/>
           <a:lstStyle/>
           <a:p>
-            <a:pPr marL="0" marR="0" lvl="0" indent="0" algn="l" defTabSz="914400" rtl="0" eaLnBrk="1" fontAlgn="auto" latinLnBrk="0" hangingPunct="1">
+            <a:pPr algn="l">
               <a:lnSpc>
                 <a:spcPct val="130000"/>
               </a:lnSpc>
-              <a:spcBef>
-                <a:spcPts val="0"/>
-              </a:spcBef>
               <a:spcAft>
                 <a:spcPts val="0"/>
               </a:spcAft>
-              <a:buClrTx/>
-              <a:buSzTx/>
-              <a:buFontTx/>
-              <a:buNone/>
-              <a:tabLst/>
-              <a:defRPr/>
             </a:pPr>
             <a:r>
-              <a:rPr lang="zh-CN" altLang="en-US" sz="2000" b="1" noProof="1">
+              <a:rPr lang="zh-CN" altLang="en-US" sz="2000" b="1" dirty="0">
                 <a:solidFill>
                   <a:srgbClr val="0A0A0A"/>
                 </a:solidFill>
                 <a:latin typeface="微软雅黑"/>
                 <a:ea typeface="微软雅黑"/>
               </a:rPr>
-              <a:t>业务模型基本盘情况</a:t>
-            </a:r>
-            <a:endParaRPr lang="en-US" altLang="zh-CN" sz="2000" b="1" noProof="1">
+              <a:t>体系规划</a:t>
+            </a:r>
+            <a:r>
+              <a:rPr lang="en-US" altLang="zh-CN" sz="2000" b="1" dirty="0">
+                <a:solidFill>
+                  <a:srgbClr val="0A0A0A"/>
+                </a:solidFill>
+                <a:latin typeface="微软雅黑"/>
+                <a:ea typeface="微软雅黑"/>
+              </a:rPr>
+              <a:t>:</a:t>
+            </a:r>
+            <a:r>
+              <a:rPr lang="zh-CN" altLang="en-US" sz="2000" b="1" dirty="0">
+                <a:solidFill>
+                  <a:srgbClr val="0A0A0A"/>
+                </a:solidFill>
+                <a:latin typeface="微软雅黑"/>
+                <a:ea typeface="微软雅黑"/>
+              </a:rPr>
+              <a:t>四项目标</a:t>
+            </a:r>
+            <a:r>
+              <a:rPr lang="en-US" altLang="zh-CN" sz="2000" b="1" dirty="0">
+                <a:solidFill>
+                  <a:srgbClr val="0A0A0A"/>
+                </a:solidFill>
+                <a:latin typeface="微软雅黑"/>
+                <a:ea typeface="微软雅黑"/>
+              </a:rPr>
+              <a:t>,</a:t>
+            </a:r>
+            <a:r>
+              <a:rPr lang="zh-CN" altLang="en-US" sz="2000" b="1" dirty="0">
+                <a:solidFill>
+                  <a:srgbClr val="0A0A0A"/>
+                </a:solidFill>
+                <a:latin typeface="微软雅黑"/>
+                <a:ea typeface="微软雅黑"/>
+              </a:rPr>
+              <a:t>一个底座</a:t>
+            </a:r>
+            <a:r>
+              <a:rPr lang="en-US" altLang="zh-CN" sz="2000" b="1" dirty="0">
+                <a:solidFill>
+                  <a:srgbClr val="0A0A0A"/>
+                </a:solidFill>
+                <a:latin typeface="微软雅黑"/>
+                <a:ea typeface="微软雅黑"/>
+              </a:rPr>
+              <a:t>,</a:t>
+            </a:r>
+            <a:r>
+              <a:rPr lang="zh-CN" altLang="en-US" sz="2000" b="1" dirty="0">
+                <a:solidFill>
+                  <a:srgbClr val="0A0A0A"/>
+                </a:solidFill>
+                <a:latin typeface="微软雅黑"/>
+                <a:ea typeface="微软雅黑"/>
+              </a:rPr>
+              <a:t>三大领域</a:t>
+            </a:r>
+          </a:p>
+        </p:txBody>
+      </p:sp>
+      <p:sp>
+        <p:nvSpPr>
+          <p:cNvPr id="3" name="TextBox 1">
+            <a:extLst>
+              <a:ext uri="{FF2B5EF4-FFF2-40B4-BE49-F238E27FC236}">
+                <a16:creationId xmlns:a16="http://schemas.microsoft.com/office/drawing/2014/main" id="{2096798B-B135-4C44-B77C-94985B52657C}"/>
+              </a:ext>
+            </a:extLst>
+          </p:cNvPr>
+          <p:cNvSpPr txBox="1"/>
+          <p:nvPr/>
+        </p:nvSpPr>
+        <p:spPr>
+          <a:xfrm>
+            <a:off x="603504" y="210312"/>
+            <a:ext cx="8887968" cy="365760"/>
+          </a:xfrm>
+          <a:prstGeom prst="rect">
+            <a:avLst/>
+          </a:prstGeom>
+          <a:noFill/>
+        </p:spPr>
+        <p:txBody>
+          <a:bodyPr wrap="square" lIns="0" tIns="0" rIns="0" bIns="0" anchor="t"/>
+          <a:lstStyle/>
+          <a:p>
+            <a:pPr algn="l">
+              <a:lnSpc>
+                <a:spcPct val="130000"/>
+              </a:lnSpc>
+              <a:spcAft>
+                <a:spcPts val="0"/>
+              </a:spcAft>
+            </a:pPr>
+            <a:r>
+              <a:rPr sz="2000" b="1" dirty="0" err="1">
+                <a:solidFill>
+                  <a:srgbClr val="0A0A0A"/>
+                </a:solidFill>
+                <a:latin typeface="微软雅黑"/>
+                <a:ea typeface="微软雅黑"/>
+              </a:rPr>
+              <a:t>体系规划:四项目标,一个底座,三大领域</a:t>
+            </a:r>
+            <a:endParaRPr sz="2000" b="1" dirty="0">
               <a:solidFill>
                 <a:srgbClr val="0A0A0A"/>
               </a:solidFill>
               <a:latin typeface="微软雅黑"/>
               <a:ea typeface="微软雅黑"/>
             </a:endParaRPr>
+          </a:p>
+        </p:txBody>
+      </p:sp>
+      <p:sp>
+        <p:nvSpPr>
+          <p:cNvPr id="4" name="TextBox 2">
+            <a:extLst>
+              <a:ext uri="{FF2B5EF4-FFF2-40B4-BE49-F238E27FC236}">
+                <a16:creationId xmlns:a16="http://schemas.microsoft.com/office/drawing/2014/main" id="{319678CB-8E7F-488B-A3CD-4463BC189998}"/>
+              </a:ext>
+            </a:extLst>
+          </p:cNvPr>
+          <p:cNvSpPr txBox="1"/>
+          <p:nvPr/>
+        </p:nvSpPr>
+        <p:spPr>
+          <a:xfrm>
+            <a:off x="512064" y="585216"/>
+            <a:ext cx="10899648" cy="438912"/>
+          </a:xfrm>
+          <a:prstGeom prst="rect">
+            <a:avLst/>
+          </a:prstGeom>
+          <a:noFill/>
+        </p:spPr>
+        <p:txBody>
+          <a:bodyPr wrap="square" lIns="0" tIns="0" rIns="0" bIns="0" anchor="t"/>
+          <a:lstStyle/>
+          <a:p>
+            <a:pPr algn="l">
+              <a:lnSpc>
+                <a:spcPct val="140000"/>
+              </a:lnSpc>
+              <a:spcAft>
+                <a:spcPts val="0"/>
+              </a:spcAft>
+            </a:pPr>
+            <a:r>
+              <a:rPr sz="1800" b="0" dirty="0" err="1">
+                <a:solidFill>
+                  <a:srgbClr val="606060"/>
+                </a:solidFill>
+                <a:latin typeface="微软雅黑"/>
+                <a:ea typeface="微软雅黑"/>
+              </a:rPr>
+              <a:t>规模、结构、质量、效率四项目标并重;数据基建打底,投放、运营、风险三大领域共享同一分层体系</a:t>
+            </a:r>
+            <a:r>
+              <a:rPr sz="1800" b="0" dirty="0">
+                <a:solidFill>
+                  <a:srgbClr val="606060"/>
+                </a:solidFill>
+                <a:latin typeface="微软雅黑"/>
+                <a:ea typeface="微软雅黑"/>
+              </a:rPr>
+              <a:t>。</a:t>
+            </a:r>
+          </a:p>
+        </p:txBody>
+      </p:sp>
+      <p:sp>
+        <p:nvSpPr>
+          <p:cNvPr id="5" name="Rectangle 3">
+            <a:extLst>
+              <a:ext uri="{FF2B5EF4-FFF2-40B4-BE49-F238E27FC236}">
+                <a16:creationId xmlns:a16="http://schemas.microsoft.com/office/drawing/2014/main" id="{95250454-BFCA-4E1B-992D-3B2D8D9C2FF2}"/>
+              </a:ext>
+            </a:extLst>
+          </p:cNvPr>
+          <p:cNvSpPr/>
+          <p:nvPr/>
+        </p:nvSpPr>
+        <p:spPr>
+          <a:xfrm>
+            <a:off x="512064" y="1042415"/>
+            <a:ext cx="10899648" cy="10972"/>
+          </a:xfrm>
+          <a:prstGeom prst="rect">
+            <a:avLst/>
+          </a:prstGeom>
+          <a:solidFill>
+            <a:srgbClr val="D6D6D6"/>
+          </a:solidFill>
+          <a:ln>
+            <a:noFill/>
+          </a:ln>
+          <a:effectLst/>
+        </p:spPr>
+        <p:style>
+          <a:lnRef idx="1">
+            <a:schemeClr val="accent1"/>
+          </a:lnRef>
+          <a:fillRef idx="3">
+            <a:schemeClr val="accent1"/>
+          </a:fillRef>
+          <a:effectRef idx="2">
+            <a:schemeClr val="accent1"/>
+          </a:effectRef>
+          <a:fontRef idx="minor">
+            <a:schemeClr val="lt1"/>
+          </a:fontRef>
+        </p:style>
+        <p:txBody>
+          <a:bodyPr rtlCol="0" anchor="ctr"/>
+          <a:lstStyle/>
+          <a:p>
+            <a:pPr algn="ctr"/>
+            <a:endParaRPr/>
+          </a:p>
+        </p:txBody>
+      </p:sp>
+      <p:sp>
+        <p:nvSpPr>
+          <p:cNvPr id="6" name="Rectangle 4">
+            <a:extLst>
+              <a:ext uri="{FF2B5EF4-FFF2-40B4-BE49-F238E27FC236}">
+                <a16:creationId xmlns:a16="http://schemas.microsoft.com/office/drawing/2014/main" id="{EC5B08CD-1287-4235-B316-50C5D13F7410}"/>
+              </a:ext>
+            </a:extLst>
+          </p:cNvPr>
+          <p:cNvSpPr/>
+          <p:nvPr/>
+        </p:nvSpPr>
+        <p:spPr>
+          <a:xfrm>
+            <a:off x="512064" y="1188720"/>
+            <a:ext cx="64008" cy="201168"/>
+          </a:xfrm>
+          <a:prstGeom prst="rect">
+            <a:avLst/>
+          </a:prstGeom>
+          <a:solidFill>
+            <a:srgbClr val="D6A000"/>
+          </a:solidFill>
+          <a:ln>
+            <a:noFill/>
+          </a:ln>
+          <a:effectLst/>
+        </p:spPr>
+        <p:style>
+          <a:lnRef idx="1">
+            <a:schemeClr val="accent1"/>
+          </a:lnRef>
+          <a:fillRef idx="3">
+            <a:schemeClr val="accent1"/>
+          </a:fillRef>
+          <a:effectRef idx="2">
+            <a:schemeClr val="accent1"/>
+          </a:effectRef>
+          <a:fontRef idx="minor">
+            <a:schemeClr val="lt1"/>
+          </a:fontRef>
+        </p:style>
+        <p:txBody>
+          <a:bodyPr rtlCol="0" anchor="ctr"/>
+          <a:lstStyle/>
+          <a:p>
+            <a:pPr algn="ctr"/>
+            <a:endParaRPr/>
+          </a:p>
+        </p:txBody>
+      </p:sp>
+      <p:sp>
+        <p:nvSpPr>
+          <p:cNvPr id="7" name="TextBox 5">
+            <a:extLst>
+              <a:ext uri="{FF2B5EF4-FFF2-40B4-BE49-F238E27FC236}">
+                <a16:creationId xmlns:a16="http://schemas.microsoft.com/office/drawing/2014/main" id="{392BE699-6C38-498C-9C9A-CE38B718C728}"/>
+              </a:ext>
+            </a:extLst>
+          </p:cNvPr>
+          <p:cNvSpPr txBox="1"/>
+          <p:nvPr/>
+        </p:nvSpPr>
+        <p:spPr>
+          <a:xfrm>
+            <a:off x="640080" y="1170432"/>
+            <a:ext cx="8229600" cy="274320"/>
+          </a:xfrm>
+          <a:prstGeom prst="rect">
+            <a:avLst/>
+          </a:prstGeom>
+          <a:noFill/>
+        </p:spPr>
+        <p:txBody>
+          <a:bodyPr wrap="square" lIns="0" tIns="0" rIns="0" bIns="0" anchor="t"/>
+          <a:lstStyle/>
+          <a:p>
+            <a:pPr algn="l">
+              <a:lnSpc>
+                <a:spcPct val="100000"/>
+              </a:lnSpc>
+              <a:spcAft>
+                <a:spcPts val="0"/>
+              </a:spcAft>
+            </a:pPr>
+            <a:r>
+              <a:rPr sz="1200" b="1">
+                <a:solidFill>
+                  <a:srgbClr val="0A0A0A"/>
+                </a:solidFill>
+                <a:latin typeface="微软雅黑"/>
+                <a:ea typeface="微软雅黑"/>
+              </a:rPr>
+              <a:t>四项目标:规模 · 结构 · 质量 · 效率</a:t>
+            </a:r>
+          </a:p>
+        </p:txBody>
+      </p:sp>
+      <p:sp>
+        <p:nvSpPr>
+          <p:cNvPr id="8" name="Rectangle 6">
+            <a:extLst>
+              <a:ext uri="{FF2B5EF4-FFF2-40B4-BE49-F238E27FC236}">
+                <a16:creationId xmlns:a16="http://schemas.microsoft.com/office/drawing/2014/main" id="{24566B3E-7E2A-45FE-AFD7-C393585CCF0C}"/>
+              </a:ext>
+            </a:extLst>
+          </p:cNvPr>
+          <p:cNvSpPr/>
+          <p:nvPr/>
+        </p:nvSpPr>
+        <p:spPr>
+          <a:xfrm>
+            <a:off x="512064" y="1463040"/>
+            <a:ext cx="2606040" cy="987552"/>
+          </a:xfrm>
+          <a:prstGeom prst="rect">
+            <a:avLst/>
+          </a:prstGeom>
+          <a:solidFill>
+            <a:srgbClr val="E3EBF4"/>
+          </a:solidFill>
+          <a:ln>
+            <a:noFill/>
+          </a:ln>
+          <a:effectLst/>
+        </p:spPr>
+        <p:style>
+          <a:lnRef idx="1">
+            <a:schemeClr val="accent1"/>
+          </a:lnRef>
+          <a:fillRef idx="3">
+            <a:schemeClr val="accent1"/>
+          </a:fillRef>
+          <a:effectRef idx="2">
+            <a:schemeClr val="accent1"/>
+          </a:effectRef>
+          <a:fontRef idx="minor">
+            <a:schemeClr val="lt1"/>
+          </a:fontRef>
+        </p:style>
+        <p:txBody>
+          <a:bodyPr wrap="square" lIns="164592" tIns="146304" rIns="128016" bIns="73152" rtlCol="0" anchor="t"/>
+          <a:lstStyle/>
+          <a:p>
+            <a:pPr algn="l">
+              <a:lnSpc>
+                <a:spcPct val="100000"/>
+              </a:lnSpc>
+              <a:spcAft>
+                <a:spcPts val="400"/>
+              </a:spcAft>
+            </a:pPr>
+            <a:r>
+              <a:rPr sz="1050" b="1">
+                <a:solidFill>
+                  <a:srgbClr val="0A0A0A"/>
+                </a:solidFill>
+                <a:latin typeface="微软雅黑"/>
+                <a:ea typeface="微软雅黑"/>
+              </a:rPr>
+              <a:t>规模</a:t>
+            </a:r>
+          </a:p>
+          <a:p>
+            <a:pPr algn="l">
+              <a:lnSpc>
+                <a:spcPct val="100000"/>
+              </a:lnSpc>
+              <a:spcAft>
+                <a:spcPts val="400"/>
+              </a:spcAft>
+            </a:pPr>
+            <a:r>
+              <a:rPr sz="1300" b="1">
+                <a:solidFill>
+                  <a:srgbClr val="1F4E79"/>
+                </a:solidFill>
+                <a:latin typeface="微软雅黑"/>
+                <a:ea typeface="微软雅黑"/>
+              </a:rPr>
+              <a:t>支撑放款增长</a:t>
+            </a:r>
+          </a:p>
+          <a:p>
+            <a:pPr algn="l">
+              <a:lnSpc>
+                <a:spcPct val="100000"/>
+              </a:lnSpc>
+              <a:spcAft>
+                <a:spcPts val="0"/>
+              </a:spcAft>
+            </a:pPr>
+            <a:r>
+              <a:rPr sz="850" b="0">
+                <a:solidFill>
+                  <a:srgbClr val="3D3C3A"/>
+                </a:solidFill>
+                <a:latin typeface="微软雅黑"/>
+                <a:ea typeface="微软雅黑"/>
+              </a:rPr>
+              <a:t>拓展 APP、新渠道与复贷</a:t>
+            </a:r>
+          </a:p>
+        </p:txBody>
+      </p:sp>
+      <p:sp>
+        <p:nvSpPr>
+          <p:cNvPr id="9" name="Rectangle 7">
+            <a:extLst>
+              <a:ext uri="{FF2B5EF4-FFF2-40B4-BE49-F238E27FC236}">
+                <a16:creationId xmlns:a16="http://schemas.microsoft.com/office/drawing/2014/main" id="{31590DBD-B04D-4967-8C2D-D2622818954C}"/>
+              </a:ext>
+            </a:extLst>
+          </p:cNvPr>
+          <p:cNvSpPr/>
+          <p:nvPr/>
+        </p:nvSpPr>
+        <p:spPr>
+          <a:xfrm>
+            <a:off x="512064" y="1463040"/>
+            <a:ext cx="2606040" cy="54864"/>
+          </a:xfrm>
+          <a:prstGeom prst="rect">
+            <a:avLst/>
+          </a:prstGeom>
+          <a:solidFill>
+            <a:srgbClr val="1F4E79"/>
+          </a:solidFill>
+          <a:ln>
+            <a:noFill/>
+          </a:ln>
+          <a:effectLst/>
+        </p:spPr>
+        <p:style>
+          <a:lnRef idx="1">
+            <a:schemeClr val="accent1"/>
+          </a:lnRef>
+          <a:fillRef idx="3">
+            <a:schemeClr val="accent1"/>
+          </a:fillRef>
+          <a:effectRef idx="2">
+            <a:schemeClr val="accent1"/>
+          </a:effectRef>
+          <a:fontRef idx="minor">
+            <a:schemeClr val="lt1"/>
+          </a:fontRef>
+        </p:style>
+        <p:txBody>
+          <a:bodyPr rtlCol="0" anchor="ctr"/>
+          <a:lstStyle/>
+          <a:p>
+            <a:pPr algn="ctr"/>
+            <a:endParaRPr/>
+          </a:p>
+        </p:txBody>
+      </p:sp>
+      <p:sp>
+        <p:nvSpPr>
+          <p:cNvPr id="10" name="Rectangle 8">
+            <a:extLst>
+              <a:ext uri="{FF2B5EF4-FFF2-40B4-BE49-F238E27FC236}">
+                <a16:creationId xmlns:a16="http://schemas.microsoft.com/office/drawing/2014/main" id="{C4AE971E-C2C0-4B49-85EB-BC4D5AFBDE73}"/>
+              </a:ext>
+            </a:extLst>
+          </p:cNvPr>
+          <p:cNvSpPr/>
+          <p:nvPr/>
+        </p:nvSpPr>
+        <p:spPr>
+          <a:xfrm>
+            <a:off x="3291840" y="1463040"/>
+            <a:ext cx="2606040" cy="987552"/>
+          </a:xfrm>
+          <a:prstGeom prst="rect">
+            <a:avLst/>
+          </a:prstGeom>
+          <a:solidFill>
+            <a:srgbClr val="E3EBF4"/>
+          </a:solidFill>
+          <a:ln>
+            <a:noFill/>
+          </a:ln>
+          <a:effectLst/>
+        </p:spPr>
+        <p:style>
+          <a:lnRef idx="1">
+            <a:schemeClr val="accent1"/>
+          </a:lnRef>
+          <a:fillRef idx="3">
+            <a:schemeClr val="accent1"/>
+          </a:fillRef>
+          <a:effectRef idx="2">
+            <a:schemeClr val="accent1"/>
+          </a:effectRef>
+          <a:fontRef idx="minor">
+            <a:schemeClr val="lt1"/>
+          </a:fontRef>
+        </p:style>
+        <p:txBody>
+          <a:bodyPr wrap="square" lIns="164592" tIns="146304" rIns="128016" bIns="73152" rtlCol="0" anchor="t"/>
+          <a:lstStyle/>
+          <a:p>
+            <a:pPr algn="l">
+              <a:lnSpc>
+                <a:spcPct val="100000"/>
+              </a:lnSpc>
+              <a:spcAft>
+                <a:spcPts val="400"/>
+              </a:spcAft>
+            </a:pPr>
+            <a:r>
+              <a:rPr sz="1050" b="1">
+                <a:solidFill>
+                  <a:srgbClr val="0A0A0A"/>
+                </a:solidFill>
+                <a:latin typeface="微软雅黑"/>
+                <a:ea typeface="微软雅黑"/>
+              </a:rPr>
+              <a:t>结构</a:t>
+            </a:r>
+          </a:p>
+          <a:p>
+            <a:pPr algn="l">
+              <a:lnSpc>
+                <a:spcPct val="100000"/>
+              </a:lnSpc>
+              <a:spcAft>
+                <a:spcPts val="400"/>
+              </a:spcAft>
+            </a:pPr>
+            <a:r>
+              <a:rPr sz="1300" b="1">
+                <a:solidFill>
+                  <a:srgbClr val="1F4E79"/>
+                </a:solidFill>
+                <a:latin typeface="微软雅黑"/>
+                <a:ea typeface="微软雅黑"/>
+              </a:rPr>
+              <a:t>NON SAAC ≥ 40%</a:t>
+            </a:r>
+          </a:p>
+          <a:p>
+            <a:pPr algn="l">
+              <a:lnSpc>
+                <a:spcPct val="100000"/>
+              </a:lnSpc>
+              <a:spcAft>
+                <a:spcPts val="0"/>
+              </a:spcAft>
+            </a:pPr>
+            <a:r>
+              <a:rPr sz="850" b="0">
+                <a:solidFill>
+                  <a:srgbClr val="3D3C3A"/>
+                </a:solidFill>
+                <a:latin typeface="微软雅黑"/>
+                <a:ea typeface="微软雅黑"/>
+              </a:rPr>
+              <a:t>非 SACC 产品占比目标</a:t>
+            </a:r>
+          </a:p>
+        </p:txBody>
+      </p:sp>
+      <p:sp>
+        <p:nvSpPr>
+          <p:cNvPr id="11" name="Rectangle 9">
+            <a:extLst>
+              <a:ext uri="{FF2B5EF4-FFF2-40B4-BE49-F238E27FC236}">
+                <a16:creationId xmlns:a16="http://schemas.microsoft.com/office/drawing/2014/main" id="{CDF80DEF-E436-4BF9-8530-4C23C7B3CC3E}"/>
+              </a:ext>
+            </a:extLst>
+          </p:cNvPr>
+          <p:cNvSpPr/>
+          <p:nvPr/>
+        </p:nvSpPr>
+        <p:spPr>
+          <a:xfrm>
+            <a:off x="3291840" y="1463040"/>
+            <a:ext cx="2606040" cy="54864"/>
+          </a:xfrm>
+          <a:prstGeom prst="rect">
+            <a:avLst/>
+          </a:prstGeom>
+          <a:solidFill>
+            <a:srgbClr val="1F4E79"/>
+          </a:solidFill>
+          <a:ln>
+            <a:noFill/>
+          </a:ln>
+          <a:effectLst/>
+        </p:spPr>
+        <p:style>
+          <a:lnRef idx="1">
+            <a:schemeClr val="accent1"/>
+          </a:lnRef>
+          <a:fillRef idx="3">
+            <a:schemeClr val="accent1"/>
+          </a:fillRef>
+          <a:effectRef idx="2">
+            <a:schemeClr val="accent1"/>
+          </a:effectRef>
+          <a:fontRef idx="minor">
+            <a:schemeClr val="lt1"/>
+          </a:fontRef>
+        </p:style>
+        <p:txBody>
+          <a:bodyPr rtlCol="0" anchor="ctr"/>
+          <a:lstStyle/>
+          <a:p>
+            <a:pPr algn="ctr"/>
+            <a:endParaRPr/>
+          </a:p>
+        </p:txBody>
+      </p:sp>
+      <p:sp>
+        <p:nvSpPr>
+          <p:cNvPr id="12" name="Rectangle 10">
+            <a:extLst>
+              <a:ext uri="{FF2B5EF4-FFF2-40B4-BE49-F238E27FC236}">
+                <a16:creationId xmlns:a16="http://schemas.microsoft.com/office/drawing/2014/main" id="{77591C11-2152-45DC-9076-E928E007A992}"/>
+              </a:ext>
+            </a:extLst>
+          </p:cNvPr>
+          <p:cNvSpPr/>
+          <p:nvPr/>
+        </p:nvSpPr>
+        <p:spPr>
+          <a:xfrm>
+            <a:off x="6071616" y="1463040"/>
+            <a:ext cx="2606040" cy="987552"/>
+          </a:xfrm>
+          <a:prstGeom prst="rect">
+            <a:avLst/>
+          </a:prstGeom>
+          <a:solidFill>
+            <a:srgbClr val="E3EBF4"/>
+          </a:solidFill>
+          <a:ln>
+            <a:noFill/>
+          </a:ln>
+          <a:effectLst/>
+        </p:spPr>
+        <p:style>
+          <a:lnRef idx="1">
+            <a:schemeClr val="accent1"/>
+          </a:lnRef>
+          <a:fillRef idx="3">
+            <a:schemeClr val="accent1"/>
+          </a:fillRef>
+          <a:effectRef idx="2">
+            <a:schemeClr val="accent1"/>
+          </a:effectRef>
+          <a:fontRef idx="minor">
+            <a:schemeClr val="lt1"/>
+          </a:fontRef>
+        </p:style>
+        <p:txBody>
+          <a:bodyPr wrap="square" lIns="164592" tIns="146304" rIns="128016" bIns="73152" rtlCol="0" anchor="t"/>
+          <a:lstStyle/>
+          <a:p>
+            <a:pPr algn="l">
+              <a:lnSpc>
+                <a:spcPct val="100000"/>
+              </a:lnSpc>
+              <a:spcAft>
+                <a:spcPts val="400"/>
+              </a:spcAft>
+            </a:pPr>
+            <a:r>
+              <a:rPr sz="1050" b="1">
+                <a:solidFill>
+                  <a:srgbClr val="0A0A0A"/>
+                </a:solidFill>
+                <a:latin typeface="微软雅黑"/>
+                <a:ea typeface="微软雅黑"/>
+              </a:rPr>
+              <a:t>质量</a:t>
+            </a:r>
+          </a:p>
+          <a:p>
+            <a:pPr algn="l">
+              <a:lnSpc>
+                <a:spcPct val="100000"/>
+              </a:lnSpc>
+              <a:spcAft>
+                <a:spcPts val="400"/>
+              </a:spcAft>
+            </a:pPr>
+            <a:r>
+              <a:rPr sz="1300" b="1">
+                <a:solidFill>
+                  <a:srgbClr val="1F4E79"/>
+                </a:solidFill>
+                <a:latin typeface="微软雅黑"/>
+                <a:ea typeface="微软雅黑"/>
+              </a:rPr>
+              <a:t>风险 ≤ 7.1%</a:t>
+            </a:r>
+          </a:p>
+          <a:p>
+            <a:pPr algn="l">
+              <a:lnSpc>
+                <a:spcPct val="100000"/>
+              </a:lnSpc>
+              <a:spcAft>
+                <a:spcPts val="0"/>
+              </a:spcAft>
+            </a:pPr>
+            <a:r>
+              <a:rPr sz="850" b="0">
+                <a:solidFill>
+                  <a:srgbClr val="3D3C3A"/>
+                </a:solidFill>
+                <a:latin typeface="微软雅黑"/>
+                <a:ea typeface="微软雅黑"/>
+              </a:rPr>
+              <a:t>整体风险水平控制</a:t>
+            </a:r>
+          </a:p>
+        </p:txBody>
+      </p:sp>
+      <p:sp>
+        <p:nvSpPr>
+          <p:cNvPr id="13" name="Rectangle 11">
+            <a:extLst>
+              <a:ext uri="{FF2B5EF4-FFF2-40B4-BE49-F238E27FC236}">
+                <a16:creationId xmlns:a16="http://schemas.microsoft.com/office/drawing/2014/main" id="{38097190-FB31-4028-BAA3-2FCC32D25383}"/>
+              </a:ext>
+            </a:extLst>
+          </p:cNvPr>
+          <p:cNvSpPr/>
+          <p:nvPr/>
+        </p:nvSpPr>
+        <p:spPr>
+          <a:xfrm>
+            <a:off x="6071616" y="1463040"/>
+            <a:ext cx="2606040" cy="54864"/>
+          </a:xfrm>
+          <a:prstGeom prst="rect">
+            <a:avLst/>
+          </a:prstGeom>
+          <a:solidFill>
+            <a:srgbClr val="1F4E79"/>
+          </a:solidFill>
+          <a:ln>
+            <a:noFill/>
+          </a:ln>
+          <a:effectLst/>
+        </p:spPr>
+        <p:style>
+          <a:lnRef idx="1">
+            <a:schemeClr val="accent1"/>
+          </a:lnRef>
+          <a:fillRef idx="3">
+            <a:schemeClr val="accent1"/>
+          </a:fillRef>
+          <a:effectRef idx="2">
+            <a:schemeClr val="accent1"/>
+          </a:effectRef>
+          <a:fontRef idx="minor">
+            <a:schemeClr val="lt1"/>
+          </a:fontRef>
+        </p:style>
+        <p:txBody>
+          <a:bodyPr rtlCol="0" anchor="ctr"/>
+          <a:lstStyle/>
+          <a:p>
+            <a:pPr algn="ctr"/>
+            <a:endParaRPr/>
+          </a:p>
+        </p:txBody>
+      </p:sp>
+      <p:sp>
+        <p:nvSpPr>
+          <p:cNvPr id="14" name="Rectangle 12">
+            <a:extLst>
+              <a:ext uri="{FF2B5EF4-FFF2-40B4-BE49-F238E27FC236}">
+                <a16:creationId xmlns:a16="http://schemas.microsoft.com/office/drawing/2014/main" id="{A619135E-B486-4A84-8B9F-FDF63F21247C}"/>
+              </a:ext>
+            </a:extLst>
+          </p:cNvPr>
+          <p:cNvSpPr/>
+          <p:nvPr/>
+        </p:nvSpPr>
+        <p:spPr>
+          <a:xfrm>
+            <a:off x="8851392" y="1463040"/>
+            <a:ext cx="2606040" cy="987552"/>
+          </a:xfrm>
+          <a:prstGeom prst="rect">
+            <a:avLst/>
+          </a:prstGeom>
+          <a:solidFill>
+            <a:srgbClr val="E3EBF4"/>
+          </a:solidFill>
+          <a:ln>
+            <a:noFill/>
+          </a:ln>
+          <a:effectLst/>
+        </p:spPr>
+        <p:style>
+          <a:lnRef idx="1">
+            <a:schemeClr val="accent1"/>
+          </a:lnRef>
+          <a:fillRef idx="3">
+            <a:schemeClr val="accent1"/>
+          </a:fillRef>
+          <a:effectRef idx="2">
+            <a:schemeClr val="accent1"/>
+          </a:effectRef>
+          <a:fontRef idx="minor">
+            <a:schemeClr val="lt1"/>
+          </a:fontRef>
+        </p:style>
+        <p:txBody>
+          <a:bodyPr wrap="square" lIns="164592" tIns="146304" rIns="128016" bIns="73152" rtlCol="0" anchor="t"/>
+          <a:lstStyle/>
+          <a:p>
+            <a:pPr algn="l">
+              <a:lnSpc>
+                <a:spcPct val="100000"/>
+              </a:lnSpc>
+              <a:spcAft>
+                <a:spcPts val="400"/>
+              </a:spcAft>
+            </a:pPr>
+            <a:r>
+              <a:rPr sz="1050" b="1">
+                <a:solidFill>
+                  <a:srgbClr val="0A0A0A"/>
+                </a:solidFill>
+                <a:latin typeface="微软雅黑"/>
+                <a:ea typeface="微软雅黑"/>
+              </a:rPr>
+              <a:t>效率</a:t>
+            </a:r>
+          </a:p>
+          <a:p>
+            <a:pPr algn="l">
+              <a:lnSpc>
+                <a:spcPct val="100000"/>
+              </a:lnSpc>
+              <a:spcAft>
+                <a:spcPts val="400"/>
+              </a:spcAft>
+            </a:pPr>
+            <a:r>
+              <a:rPr sz="1300" b="1">
+                <a:solidFill>
+                  <a:srgbClr val="1F4E79"/>
+                </a:solidFill>
+                <a:latin typeface="微软雅黑"/>
+                <a:ea typeface="微软雅黑"/>
+              </a:rPr>
+              <a:t>LTV 统筹经营</a:t>
+            </a:r>
+          </a:p>
+          <a:p>
+            <a:pPr algn="l">
+              <a:lnSpc>
+                <a:spcPct val="100000"/>
+              </a:lnSpc>
+              <a:spcAft>
+                <a:spcPts val="0"/>
+              </a:spcAft>
+            </a:pPr>
+            <a:r>
+              <a:rPr sz="850" b="0">
+                <a:solidFill>
+                  <a:srgbClr val="3D3C3A"/>
+                </a:solidFill>
+                <a:latin typeface="微软雅黑"/>
+                <a:ea typeface="微软雅黑"/>
+              </a:rPr>
+              <a:t>统筹获客、额度、定价、权益</a:t>
+            </a:r>
+          </a:p>
+        </p:txBody>
+      </p:sp>
+      <p:sp>
+        <p:nvSpPr>
+          <p:cNvPr id="15" name="Rectangle 13">
+            <a:extLst>
+              <a:ext uri="{FF2B5EF4-FFF2-40B4-BE49-F238E27FC236}">
+                <a16:creationId xmlns:a16="http://schemas.microsoft.com/office/drawing/2014/main" id="{CCDD6742-AF3A-4F28-BA32-3966F1BED965}"/>
+              </a:ext>
+            </a:extLst>
+          </p:cNvPr>
+          <p:cNvSpPr/>
+          <p:nvPr/>
+        </p:nvSpPr>
+        <p:spPr>
+          <a:xfrm>
+            <a:off x="8851392" y="1463040"/>
+            <a:ext cx="2606040" cy="54864"/>
+          </a:xfrm>
+          <a:prstGeom prst="rect">
+            <a:avLst/>
+          </a:prstGeom>
+          <a:solidFill>
+            <a:srgbClr val="1F4E79"/>
+          </a:solidFill>
+          <a:ln>
+            <a:noFill/>
+          </a:ln>
+          <a:effectLst/>
+        </p:spPr>
+        <p:style>
+          <a:lnRef idx="1">
+            <a:schemeClr val="accent1"/>
+          </a:lnRef>
+          <a:fillRef idx="3">
+            <a:schemeClr val="accent1"/>
+          </a:fillRef>
+          <a:effectRef idx="2">
+            <a:schemeClr val="accent1"/>
+          </a:effectRef>
+          <a:fontRef idx="minor">
+            <a:schemeClr val="lt1"/>
+          </a:fontRef>
+        </p:style>
+        <p:txBody>
+          <a:bodyPr rtlCol="0" anchor="ctr"/>
+          <a:lstStyle/>
+          <a:p>
+            <a:pPr algn="ctr"/>
+            <a:endParaRPr/>
+          </a:p>
+        </p:txBody>
+      </p:sp>
+      <p:sp>
+        <p:nvSpPr>
+          <p:cNvPr id="16" name="Rectangle 14">
+            <a:extLst>
+              <a:ext uri="{FF2B5EF4-FFF2-40B4-BE49-F238E27FC236}">
+                <a16:creationId xmlns:a16="http://schemas.microsoft.com/office/drawing/2014/main" id="{D9A96881-A0A7-4404-A29C-9F72A7B4B680}"/>
+              </a:ext>
+            </a:extLst>
+          </p:cNvPr>
+          <p:cNvSpPr/>
+          <p:nvPr/>
+        </p:nvSpPr>
+        <p:spPr>
+          <a:xfrm>
+            <a:off x="512064" y="2670048"/>
+            <a:ext cx="10899648" cy="1005840"/>
+          </a:xfrm>
+          <a:prstGeom prst="rect">
+            <a:avLst/>
+          </a:prstGeom>
+          <a:solidFill>
+            <a:srgbClr val="F0F0F0"/>
+          </a:solidFill>
+          <a:ln>
+            <a:noFill/>
+          </a:ln>
+          <a:effectLst/>
+        </p:spPr>
+        <p:style>
+          <a:lnRef idx="1">
+            <a:schemeClr val="accent1"/>
+          </a:lnRef>
+          <a:fillRef idx="3">
+            <a:schemeClr val="accent1"/>
+          </a:fillRef>
+          <a:effectRef idx="2">
+            <a:schemeClr val="accent1"/>
+          </a:effectRef>
+          <a:fontRef idx="minor">
+            <a:schemeClr val="lt1"/>
+          </a:fontRef>
+        </p:style>
+        <p:txBody>
+          <a:bodyPr wrap="square" lIns="201168" tIns="109728" rIns="182880" bIns="54864" rtlCol="0" anchor="t"/>
+          <a:lstStyle/>
+          <a:p>
+            <a:pPr algn="l">
+              <a:lnSpc>
+                <a:spcPct val="100000"/>
+              </a:lnSpc>
+              <a:spcAft>
+                <a:spcPts val="200"/>
+              </a:spcAft>
+            </a:pPr>
+            <a:r>
+              <a:rPr sz="1100" b="1">
+                <a:solidFill>
+                  <a:srgbClr val="1F4E79"/>
+                </a:solidFill>
+                <a:latin typeface="微软雅黑"/>
+                <a:ea typeface="微软雅黑"/>
+              </a:rPr>
+              <a:t>数据基建 · 一个底座</a:t>
+            </a:r>
+            <a:r>
+              <a:rPr sz="950" b="0">
+                <a:solidFill>
+                  <a:srgbClr val="3D3C3A"/>
+                </a:solidFill>
+                <a:latin typeface="微软雅黑"/>
+                <a:ea typeface="微软雅黑"/>
+              </a:rPr>
+              <a:t>  自主流水识别 + 统一数据底座,为模型、策略与归因提供一致口径</a:t>
+            </a:r>
+          </a:p>
+          <a:p>
+            <a:pPr algn="l">
+              <a:lnSpc>
+                <a:spcPct val="105000"/>
+              </a:lnSpc>
+              <a:spcAft>
+                <a:spcPts val="100"/>
+              </a:spcAft>
+            </a:pPr>
+            <a:r>
+              <a:rPr sz="900" b="1">
+                <a:solidFill>
+                  <a:srgbClr val="D6A000"/>
+                </a:solidFill>
+                <a:latin typeface="微软雅黑"/>
+                <a:ea typeface="微软雅黑"/>
+              </a:rPr>
+              <a:t>★ </a:t>
+            </a:r>
+            <a:r>
+              <a:rPr sz="900" b="1">
+                <a:solidFill>
+                  <a:srgbClr val="1F4E79"/>
+                </a:solidFill>
+                <a:latin typeface="微软雅黑"/>
+                <a:ea typeface="微软雅黑"/>
+              </a:rPr>
+              <a:t>BS-CAT 生产化与并行验证</a:t>
+            </a:r>
+          </a:p>
+          <a:p>
+            <a:pPr algn="l">
+              <a:lnSpc>
+                <a:spcPct val="105000"/>
+              </a:lnSpc>
+              <a:spcAft>
+                <a:spcPts val="100"/>
+              </a:spcAft>
+            </a:pPr>
+            <a:r>
+              <a:rPr sz="900" b="1">
+                <a:solidFill>
+                  <a:srgbClr val="D6A000"/>
+                </a:solidFill>
+                <a:latin typeface="微软雅黑"/>
+                <a:ea typeface="微软雅黑"/>
+              </a:rPr>
+              <a:t>★ </a:t>
+            </a:r>
+            <a:r>
+              <a:rPr sz="900" b="1">
+                <a:solidFill>
+                  <a:srgbClr val="1F4E79"/>
+                </a:solidFill>
+                <a:latin typeface="微软雅黑"/>
+                <a:ea typeface="微软雅黑"/>
+              </a:rPr>
+              <a:t>打通 IDP2 全链路:IDA → IDP → BS-CAT → S-CALC → 落库 → 风险决策 → 人工复核</a:t>
+            </a:r>
+          </a:p>
+          <a:p>
+            <a:pPr algn="l">
+              <a:lnSpc>
+                <a:spcPct val="105000"/>
+              </a:lnSpc>
+              <a:spcAft>
+                <a:spcPts val="100"/>
+              </a:spcAft>
+            </a:pPr>
+            <a:r>
+              <a:rPr sz="900" b="1">
+                <a:solidFill>
+                  <a:srgbClr val="D6A000"/>
+                </a:solidFill>
+                <a:latin typeface="微软雅黑"/>
+                <a:ea typeface="微软雅黑"/>
+              </a:rPr>
+              <a:t>★ </a:t>
+            </a:r>
+            <a:r>
+              <a:rPr sz="900" b="1">
+                <a:solidFill>
+                  <a:srgbClr val="1F4E79"/>
+                </a:solidFill>
+                <a:latin typeface="微软雅黑"/>
+                <a:ea typeface="微软雅黑"/>
+              </a:rPr>
+              <a:t>商户 / 类别知识库智能体</a:t>
+            </a:r>
+          </a:p>
+        </p:txBody>
+      </p:sp>
+      <p:sp>
+        <p:nvSpPr>
+          <p:cNvPr id="17" name="Rectangle 15">
+            <a:extLst>
+              <a:ext uri="{FF2B5EF4-FFF2-40B4-BE49-F238E27FC236}">
+                <a16:creationId xmlns:a16="http://schemas.microsoft.com/office/drawing/2014/main" id="{98592C1C-BE2E-42A8-9FC4-3615C1AA0A80}"/>
+              </a:ext>
+            </a:extLst>
+          </p:cNvPr>
+          <p:cNvSpPr/>
+          <p:nvPr/>
+        </p:nvSpPr>
+        <p:spPr>
+          <a:xfrm>
+            <a:off x="512064" y="2670048"/>
+            <a:ext cx="10899648" cy="54864"/>
+          </a:xfrm>
+          <a:prstGeom prst="rect">
+            <a:avLst/>
+          </a:prstGeom>
+          <a:solidFill>
+            <a:srgbClr val="1F4E79"/>
+          </a:solidFill>
+          <a:ln>
+            <a:noFill/>
+          </a:ln>
+          <a:effectLst/>
+        </p:spPr>
+        <p:style>
+          <a:lnRef idx="1">
+            <a:schemeClr val="accent1"/>
+          </a:lnRef>
+          <a:fillRef idx="3">
+            <a:schemeClr val="accent1"/>
+          </a:fillRef>
+          <a:effectRef idx="2">
+            <a:schemeClr val="accent1"/>
+          </a:effectRef>
+          <a:fontRef idx="minor">
+            <a:schemeClr val="lt1"/>
+          </a:fontRef>
+        </p:style>
+        <p:txBody>
+          <a:bodyPr rtlCol="0" anchor="ctr"/>
+          <a:lstStyle/>
+          <a:p>
+            <a:pPr algn="ctr"/>
+            <a:endParaRPr/>
+          </a:p>
+        </p:txBody>
+      </p:sp>
+      <p:sp>
+        <p:nvSpPr>
+          <p:cNvPr id="18" name="Rectangle 16">
+            <a:extLst>
+              <a:ext uri="{FF2B5EF4-FFF2-40B4-BE49-F238E27FC236}">
+                <a16:creationId xmlns:a16="http://schemas.microsoft.com/office/drawing/2014/main" id="{2007C5F1-651D-49E8-ACCB-06E12F18A3D5}"/>
+              </a:ext>
+            </a:extLst>
+          </p:cNvPr>
+          <p:cNvSpPr/>
+          <p:nvPr/>
+        </p:nvSpPr>
+        <p:spPr>
+          <a:xfrm>
+            <a:off x="512064" y="3767327"/>
+            <a:ext cx="64008" cy="201168"/>
+          </a:xfrm>
+          <a:prstGeom prst="rect">
+            <a:avLst/>
+          </a:prstGeom>
+          <a:solidFill>
+            <a:srgbClr val="D6A000"/>
+          </a:solidFill>
+          <a:ln>
+            <a:noFill/>
+          </a:ln>
+          <a:effectLst/>
+        </p:spPr>
+        <p:style>
+          <a:lnRef idx="1">
+            <a:schemeClr val="accent1"/>
+          </a:lnRef>
+          <a:fillRef idx="3">
+            <a:schemeClr val="accent1"/>
+          </a:fillRef>
+          <a:effectRef idx="2">
+            <a:schemeClr val="accent1"/>
+          </a:effectRef>
+          <a:fontRef idx="minor">
+            <a:schemeClr val="lt1"/>
+          </a:fontRef>
+        </p:style>
+        <p:txBody>
+          <a:bodyPr rtlCol="0" anchor="ctr"/>
+          <a:lstStyle/>
+          <a:p>
+            <a:pPr algn="ctr"/>
+            <a:endParaRPr/>
+          </a:p>
+        </p:txBody>
+      </p:sp>
+      <p:sp>
+        <p:nvSpPr>
+          <p:cNvPr id="19" name="TextBox 17">
+            <a:extLst>
+              <a:ext uri="{FF2B5EF4-FFF2-40B4-BE49-F238E27FC236}">
+                <a16:creationId xmlns:a16="http://schemas.microsoft.com/office/drawing/2014/main" id="{5C4EB545-A783-426C-8186-A719EEFFCCC7}"/>
+              </a:ext>
+            </a:extLst>
+          </p:cNvPr>
+          <p:cNvSpPr txBox="1"/>
+          <p:nvPr/>
+        </p:nvSpPr>
+        <p:spPr>
+          <a:xfrm>
+            <a:off x="640080" y="3749039"/>
+            <a:ext cx="8229600" cy="274320"/>
+          </a:xfrm>
+          <a:prstGeom prst="rect">
+            <a:avLst/>
+          </a:prstGeom>
+          <a:noFill/>
+        </p:spPr>
+        <p:txBody>
+          <a:bodyPr wrap="square" lIns="0" tIns="0" rIns="0" bIns="0" anchor="t"/>
+          <a:lstStyle/>
+          <a:p>
+            <a:pPr algn="l">
+              <a:lnSpc>
+                <a:spcPct val="100000"/>
+              </a:lnSpc>
+              <a:spcAft>
+                <a:spcPts val="0"/>
+              </a:spcAft>
+            </a:pPr>
+            <a:r>
+              <a:rPr sz="1200" b="1">
+                <a:solidFill>
+                  <a:srgbClr val="0A0A0A"/>
+                </a:solidFill>
+                <a:latin typeface="微软雅黑"/>
+                <a:ea typeface="微软雅黑"/>
+              </a:rPr>
+              <a:t>三大领域:共享同一分层体系</a:t>
+            </a:r>
+          </a:p>
+        </p:txBody>
+      </p:sp>
+      <p:sp>
+        <p:nvSpPr>
+          <p:cNvPr id="20" name="Rectangle 18">
+            <a:extLst>
+              <a:ext uri="{FF2B5EF4-FFF2-40B4-BE49-F238E27FC236}">
+                <a16:creationId xmlns:a16="http://schemas.microsoft.com/office/drawing/2014/main" id="{1EF1F9D8-8F0B-4EE2-B52B-04BADE8943A2}"/>
+              </a:ext>
+            </a:extLst>
+          </p:cNvPr>
+          <p:cNvSpPr/>
+          <p:nvPr/>
+        </p:nvSpPr>
+        <p:spPr>
+          <a:xfrm>
+            <a:off x="512064" y="4041648"/>
+            <a:ext cx="3538728" cy="2039112"/>
+          </a:xfrm>
+          <a:prstGeom prst="rect">
+            <a:avLst/>
+          </a:prstGeom>
+          <a:solidFill>
+            <a:srgbClr val="FFFFFF"/>
+          </a:solidFill>
+          <a:ln w="19050">
+            <a:solidFill>
+              <a:srgbClr val="D6D6D6"/>
+            </a:solidFill>
+          </a:ln>
+          <a:effectLst/>
+        </p:spPr>
+        <p:style>
+          <a:lnRef idx="1">
+            <a:schemeClr val="accent1"/>
+          </a:lnRef>
+          <a:fillRef idx="3">
+            <a:schemeClr val="accent1"/>
+          </a:fillRef>
+          <a:effectRef idx="2">
+            <a:schemeClr val="accent1"/>
+          </a:effectRef>
+          <a:fontRef idx="minor">
+            <a:schemeClr val="lt1"/>
+          </a:fontRef>
+        </p:style>
+        <p:txBody>
+          <a:bodyPr wrap="square" lIns="256032" tIns="128016" rIns="128016" bIns="91440" rtlCol="0" anchor="t"/>
+          <a:lstStyle/>
+          <a:p>
+            <a:pPr algn="l">
+              <a:lnSpc>
+                <a:spcPct val="100000"/>
+              </a:lnSpc>
+              <a:spcAft>
+                <a:spcPts val="600"/>
+              </a:spcAft>
+            </a:pPr>
+            <a:r>
+              <a:rPr sz="1200" b="1">
+                <a:solidFill>
+                  <a:srgbClr val="0A0A0A"/>
+                </a:solidFill>
+                <a:latin typeface="微软雅黑"/>
+                <a:ea typeface="微软雅黑"/>
+              </a:rPr>
+              <a:t>投放市场</a:t>
+            </a:r>
+          </a:p>
+          <a:p>
+            <a:pPr algn="l">
+              <a:lnSpc>
+                <a:spcPct val="110000"/>
+              </a:lnSpc>
+              <a:spcAft>
+                <a:spcPts val="300"/>
+              </a:spcAft>
+            </a:pPr>
+            <a:r>
+              <a:rPr sz="900" b="0">
+                <a:solidFill>
+                  <a:srgbClr val="3D3C3A"/>
+                </a:solidFill>
+                <a:latin typeface="微软雅黑"/>
+                <a:ea typeface="微软雅黑"/>
+              </a:rPr>
+              <a:t>人群圈选:风险 × 意愿 × 价值分层输出人群包</a:t>
+            </a:r>
+          </a:p>
+          <a:p>
+            <a:pPr algn="l">
+              <a:lnSpc>
+                <a:spcPct val="110000"/>
+              </a:lnSpc>
+              <a:spcAft>
+                <a:spcPts val="300"/>
+              </a:spcAft>
+            </a:pPr>
+            <a:r>
+              <a:rPr sz="900" b="0">
+                <a:solidFill>
+                  <a:srgbClr val="3D3C3A"/>
+                </a:solidFill>
+                <a:latin typeface="微软雅黑"/>
+                <a:ea typeface="微软雅黑"/>
+              </a:rPr>
+              <a:t>Lead Partner 线索评估</a:t>
+            </a:r>
+          </a:p>
+          <a:p>
+            <a:pPr algn="l">
+              <a:lnSpc>
+                <a:spcPct val="110000"/>
+              </a:lnSpc>
+              <a:spcAft>
+                <a:spcPts val="300"/>
+              </a:spcAft>
+            </a:pPr>
+            <a:r>
+              <a:rPr sz="900" b="1">
+                <a:solidFill>
+                  <a:srgbClr val="D6A000"/>
+                </a:solidFill>
+                <a:latin typeface="微软雅黑"/>
+                <a:ea typeface="微软雅黑"/>
+              </a:rPr>
+              <a:t>★ </a:t>
+            </a:r>
+            <a:r>
+              <a:rPr sz="900" b="1">
+                <a:solidFill>
+                  <a:srgbClr val="1F4E79"/>
+                </a:solidFill>
+                <a:latin typeface="微软雅黑"/>
+                <a:ea typeface="微软雅黑"/>
+              </a:rPr>
+              <a:t>投放归因基建</a:t>
+            </a:r>
+          </a:p>
+          <a:p>
+            <a:pPr algn="l">
+              <a:lnSpc>
+                <a:spcPct val="110000"/>
+              </a:lnSpc>
+              <a:spcAft>
+                <a:spcPts val="300"/>
+              </a:spcAft>
+            </a:pPr>
+            <a:r>
+              <a:rPr sz="900" b="1">
+                <a:solidFill>
+                  <a:srgbClr val="D6A000"/>
+                </a:solidFill>
+                <a:latin typeface="微软雅黑"/>
+                <a:ea typeface="微软雅黑"/>
+              </a:rPr>
+              <a:t>★ </a:t>
+            </a:r>
+            <a:r>
+              <a:rPr sz="900" b="1">
+                <a:solidFill>
+                  <a:srgbClr val="1F4E79"/>
+                </a:solidFill>
+                <a:latin typeface="微软雅黑"/>
+                <a:ea typeface="微软雅黑"/>
+              </a:rPr>
+              <a:t>回传监控基建</a:t>
+            </a:r>
+          </a:p>
+          <a:p>
+            <a:pPr algn="l">
+              <a:lnSpc>
+                <a:spcPct val="110000"/>
+              </a:lnSpc>
+              <a:spcAft>
+                <a:spcPts val="300"/>
+              </a:spcAft>
+            </a:pPr>
+            <a:r>
+              <a:rPr sz="900" b="1">
+                <a:solidFill>
+                  <a:srgbClr val="D6A000"/>
+                </a:solidFill>
+                <a:latin typeface="微软雅黑"/>
+                <a:ea typeface="微软雅黑"/>
+              </a:rPr>
+              <a:t>★ </a:t>
+            </a:r>
+            <a:r>
+              <a:rPr sz="900" b="1">
+                <a:solidFill>
+                  <a:srgbClr val="1F4E79"/>
+                </a:solidFill>
+                <a:latin typeface="微软雅黑"/>
+                <a:ea typeface="微软雅黑"/>
+              </a:rPr>
+              <a:t>边际 CPS 与扩量决策</a:t>
+            </a:r>
+          </a:p>
+          <a:p>
+            <a:pPr algn="l">
+              <a:lnSpc>
+                <a:spcPct val="110000"/>
+              </a:lnSpc>
+              <a:spcAft>
+                <a:spcPts val="300"/>
+              </a:spcAft>
+            </a:pPr>
+            <a:r>
+              <a:rPr sz="900" b="1">
+                <a:solidFill>
+                  <a:srgbClr val="D6A000"/>
+                </a:solidFill>
+                <a:latin typeface="微软雅黑"/>
+                <a:ea typeface="微软雅黑"/>
+              </a:rPr>
+              <a:t>★ </a:t>
+            </a:r>
+            <a:r>
+              <a:rPr sz="900" b="1">
+                <a:solidFill>
+                  <a:srgbClr val="1F4E79"/>
+                </a:solidFill>
+                <a:latin typeface="微软雅黑"/>
+                <a:ea typeface="微软雅黑"/>
+              </a:rPr>
+              <a:t>Campaign 早期质量预测</a:t>
+            </a:r>
+          </a:p>
+        </p:txBody>
+      </p:sp>
+      <p:sp>
+        <p:nvSpPr>
+          <p:cNvPr id="21" name="Rectangle 19">
+            <a:extLst>
+              <a:ext uri="{FF2B5EF4-FFF2-40B4-BE49-F238E27FC236}">
+                <a16:creationId xmlns:a16="http://schemas.microsoft.com/office/drawing/2014/main" id="{92B0A974-6BD4-4737-8595-CED5933C53BD}"/>
+              </a:ext>
+            </a:extLst>
+          </p:cNvPr>
+          <p:cNvSpPr/>
+          <p:nvPr/>
+        </p:nvSpPr>
+        <p:spPr>
+          <a:xfrm>
+            <a:off x="512064" y="4041648"/>
+            <a:ext cx="3538728" cy="54864"/>
+          </a:xfrm>
+          <a:prstGeom prst="rect">
+            <a:avLst/>
+          </a:prstGeom>
+          <a:solidFill>
+            <a:srgbClr val="1F4E79"/>
+          </a:solidFill>
+          <a:ln>
+            <a:noFill/>
+          </a:ln>
+          <a:effectLst/>
+        </p:spPr>
+        <p:style>
+          <a:lnRef idx="1">
+            <a:schemeClr val="accent1"/>
+          </a:lnRef>
+          <a:fillRef idx="3">
+            <a:schemeClr val="accent1"/>
+          </a:fillRef>
+          <a:effectRef idx="2">
+            <a:schemeClr val="accent1"/>
+          </a:effectRef>
+          <a:fontRef idx="minor">
+            <a:schemeClr val="lt1"/>
+          </a:fontRef>
+        </p:style>
+        <p:txBody>
+          <a:bodyPr rtlCol="0" anchor="ctr"/>
+          <a:lstStyle/>
+          <a:p>
+            <a:pPr algn="ctr"/>
+            <a:endParaRPr/>
+          </a:p>
+        </p:txBody>
+      </p:sp>
+      <p:sp>
+        <p:nvSpPr>
+          <p:cNvPr id="22" name="Rectangle 20">
+            <a:extLst>
+              <a:ext uri="{FF2B5EF4-FFF2-40B4-BE49-F238E27FC236}">
+                <a16:creationId xmlns:a16="http://schemas.microsoft.com/office/drawing/2014/main" id="{0A2B91B9-D84D-4E60-98BD-9AD6CD657208}"/>
+              </a:ext>
+            </a:extLst>
+          </p:cNvPr>
+          <p:cNvSpPr/>
+          <p:nvPr/>
+        </p:nvSpPr>
+        <p:spPr>
+          <a:xfrm>
+            <a:off x="658368" y="4206240"/>
+            <a:ext cx="54864" cy="182880"/>
+          </a:xfrm>
+          <a:prstGeom prst="rect">
+            <a:avLst/>
+          </a:prstGeom>
+          <a:solidFill>
+            <a:srgbClr val="D6A000"/>
+          </a:solidFill>
+          <a:ln>
+            <a:noFill/>
+          </a:ln>
+          <a:effectLst/>
+        </p:spPr>
+        <p:style>
+          <a:lnRef idx="1">
+            <a:schemeClr val="accent1"/>
+          </a:lnRef>
+          <a:fillRef idx="3">
+            <a:schemeClr val="accent1"/>
+          </a:fillRef>
+          <a:effectRef idx="2">
+            <a:schemeClr val="accent1"/>
+          </a:effectRef>
+          <a:fontRef idx="minor">
+            <a:schemeClr val="lt1"/>
+          </a:fontRef>
+        </p:style>
+        <p:txBody>
+          <a:bodyPr rtlCol="0" anchor="ctr"/>
+          <a:lstStyle/>
+          <a:p>
+            <a:pPr algn="ctr"/>
+            <a:endParaRPr/>
+          </a:p>
+        </p:txBody>
+      </p:sp>
+      <p:sp>
+        <p:nvSpPr>
+          <p:cNvPr id="23" name="Rectangle 21">
+            <a:extLst>
+              <a:ext uri="{FF2B5EF4-FFF2-40B4-BE49-F238E27FC236}">
+                <a16:creationId xmlns:a16="http://schemas.microsoft.com/office/drawing/2014/main" id="{EDDFBB8C-8F9A-45A2-A926-D8FB6CB97D39}"/>
+              </a:ext>
+            </a:extLst>
+          </p:cNvPr>
+          <p:cNvSpPr/>
+          <p:nvPr/>
+        </p:nvSpPr>
+        <p:spPr>
+          <a:xfrm>
+            <a:off x="4197096" y="4041648"/>
+            <a:ext cx="3538728" cy="2039112"/>
+          </a:xfrm>
+          <a:prstGeom prst="rect">
+            <a:avLst/>
+          </a:prstGeom>
+          <a:solidFill>
+            <a:srgbClr val="FFFFFF"/>
+          </a:solidFill>
+          <a:ln w="19050">
+            <a:solidFill>
+              <a:srgbClr val="D6D6D6"/>
+            </a:solidFill>
+          </a:ln>
+          <a:effectLst/>
+        </p:spPr>
+        <p:style>
+          <a:lnRef idx="1">
+            <a:schemeClr val="accent1"/>
+          </a:lnRef>
+          <a:fillRef idx="3">
+            <a:schemeClr val="accent1"/>
+          </a:fillRef>
+          <a:effectRef idx="2">
+            <a:schemeClr val="accent1"/>
+          </a:effectRef>
+          <a:fontRef idx="minor">
+            <a:schemeClr val="lt1"/>
+          </a:fontRef>
+        </p:style>
+        <p:txBody>
+          <a:bodyPr wrap="square" lIns="256032" tIns="128016" rIns="128016" bIns="91440" rtlCol="0" anchor="t"/>
+          <a:lstStyle/>
+          <a:p>
+            <a:pPr algn="l">
+              <a:lnSpc>
+                <a:spcPct val="100000"/>
+              </a:lnSpc>
+              <a:spcAft>
+                <a:spcPts val="600"/>
+              </a:spcAft>
+            </a:pPr>
+            <a:r>
+              <a:rPr sz="1200" b="1">
+                <a:solidFill>
+                  <a:srgbClr val="0A0A0A"/>
+                </a:solidFill>
+                <a:latin typeface="微软雅黑"/>
+                <a:ea typeface="微软雅黑"/>
+              </a:rPr>
+              <a:t>用户运营</a:t>
+            </a:r>
+          </a:p>
+          <a:p>
+            <a:pPr algn="l">
+              <a:lnSpc>
+                <a:spcPct val="110000"/>
+              </a:lnSpc>
+              <a:spcAft>
+                <a:spcPts val="300"/>
+              </a:spcAft>
+            </a:pPr>
+            <a:r>
+              <a:rPr sz="900" b="0">
+                <a:solidFill>
+                  <a:srgbClr val="3D3C3A"/>
+                </a:solidFill>
+                <a:latin typeface="微软雅黑"/>
+                <a:ea typeface="微软雅黑"/>
+              </a:rPr>
+              <a:t>盈利性评估</a:t>
+            </a:r>
+          </a:p>
+          <a:p>
+            <a:pPr algn="l">
+              <a:lnSpc>
+                <a:spcPct val="110000"/>
+              </a:lnSpc>
+              <a:spcAft>
+                <a:spcPts val="300"/>
+              </a:spcAft>
+            </a:pPr>
+            <a:r>
+              <a:rPr sz="900" b="0">
+                <a:solidFill>
+                  <a:srgbClr val="3D3C3A"/>
+                </a:solidFill>
+                <a:latin typeface="微软雅黑"/>
+                <a:ea typeface="微软雅黑"/>
+              </a:rPr>
+              <a:t>自动寻优定价</a:t>
+            </a:r>
+          </a:p>
+          <a:p>
+            <a:pPr algn="l">
+              <a:lnSpc>
+                <a:spcPct val="110000"/>
+              </a:lnSpc>
+              <a:spcAft>
+                <a:spcPts val="300"/>
+              </a:spcAft>
+            </a:pPr>
+            <a:r>
+              <a:rPr sz="900" b="0">
+                <a:solidFill>
+                  <a:srgbClr val="3D3C3A"/>
+                </a:solidFill>
+                <a:latin typeface="微软雅黑"/>
+                <a:ea typeface="微软雅黑"/>
+              </a:rPr>
+              <a:t>Fundo Score</a:t>
+            </a:r>
+          </a:p>
+          <a:p>
+            <a:pPr algn="l">
+              <a:lnSpc>
+                <a:spcPct val="110000"/>
+              </a:lnSpc>
+              <a:spcAft>
+                <a:spcPts val="300"/>
+              </a:spcAft>
+            </a:pPr>
+            <a:r>
+              <a:rPr sz="900" b="1">
+                <a:solidFill>
+                  <a:srgbClr val="D6A000"/>
+                </a:solidFill>
+                <a:latin typeface="微软雅黑"/>
+                <a:ea typeface="微软雅黑"/>
+              </a:rPr>
+              <a:t>★ </a:t>
+            </a:r>
+            <a:r>
+              <a:rPr sz="900" b="1">
+                <a:solidFill>
+                  <a:srgbClr val="1F4E79"/>
+                </a:solidFill>
+                <a:latin typeface="微软雅黑"/>
+                <a:ea typeface="微软雅黑"/>
+              </a:rPr>
+              <a:t>触达归因与效果监控</a:t>
+            </a:r>
+          </a:p>
+          <a:p>
+            <a:pPr algn="l">
+              <a:lnSpc>
+                <a:spcPct val="110000"/>
+              </a:lnSpc>
+              <a:spcAft>
+                <a:spcPts val="300"/>
+              </a:spcAft>
+            </a:pPr>
+            <a:r>
+              <a:rPr sz="900" b="1">
+                <a:solidFill>
+                  <a:srgbClr val="D6A000"/>
+                </a:solidFill>
+                <a:latin typeface="微软雅黑"/>
+                <a:ea typeface="微软雅黑"/>
+              </a:rPr>
+              <a:t>★ </a:t>
+            </a:r>
+            <a:r>
+              <a:rPr sz="900" b="1">
+                <a:solidFill>
+                  <a:srgbClr val="1F4E79"/>
+                </a:solidFill>
+                <a:latin typeface="微软雅黑"/>
+                <a:ea typeface="微软雅黑"/>
+              </a:rPr>
+              <a:t>触达策略与人群编排</a:t>
+            </a:r>
+          </a:p>
+          <a:p>
+            <a:pPr algn="l">
+              <a:lnSpc>
+                <a:spcPct val="110000"/>
+              </a:lnSpc>
+              <a:spcAft>
+                <a:spcPts val="300"/>
+              </a:spcAft>
+            </a:pPr>
+            <a:r>
+              <a:rPr sz="900" b="1">
+                <a:solidFill>
+                  <a:srgbClr val="D6A000"/>
+                </a:solidFill>
+                <a:latin typeface="微软雅黑"/>
+                <a:ea typeface="微软雅黑"/>
+              </a:rPr>
+              <a:t>★ </a:t>
+            </a:r>
+            <a:r>
+              <a:rPr sz="900" b="1">
+                <a:solidFill>
+                  <a:srgbClr val="1F4E79"/>
+                </a:solidFill>
+                <a:latin typeface="微软雅黑"/>
+                <a:ea typeface="微软雅黑"/>
+              </a:rPr>
+              <a:t>运营监控 AI 智能体</a:t>
+            </a:r>
+          </a:p>
+          <a:p>
+            <a:pPr algn="l">
+              <a:lnSpc>
+                <a:spcPct val="110000"/>
+              </a:lnSpc>
+              <a:spcAft>
+                <a:spcPts val="300"/>
+              </a:spcAft>
+            </a:pPr>
+            <a:r>
+              <a:rPr sz="900" b="1">
+                <a:solidFill>
+                  <a:srgbClr val="D6A000"/>
+                </a:solidFill>
+                <a:latin typeface="微软雅黑"/>
+                <a:ea typeface="微软雅黑"/>
+              </a:rPr>
+              <a:t>★ </a:t>
+            </a:r>
+            <a:r>
+              <a:rPr sz="900" b="1">
+                <a:solidFill>
+                  <a:srgbClr val="1F4E79"/>
+                </a:solidFill>
+                <a:latin typeface="微软雅黑"/>
+                <a:ea typeface="微软雅黑"/>
+              </a:rPr>
+              <a:t>结清客户复贷召回</a:t>
+            </a:r>
+          </a:p>
+          <a:p>
+            <a:pPr algn="l">
+              <a:lnSpc>
+                <a:spcPct val="110000"/>
+              </a:lnSpc>
+              <a:spcAft>
+                <a:spcPts val="300"/>
+              </a:spcAft>
+            </a:pPr>
+            <a:r>
+              <a:rPr sz="900" b="1">
+                <a:solidFill>
+                  <a:srgbClr val="D6A000"/>
+                </a:solidFill>
+                <a:latin typeface="微软雅黑"/>
+                <a:ea typeface="微软雅黑"/>
+              </a:rPr>
+              <a:t>★ </a:t>
+            </a:r>
+            <a:r>
+              <a:rPr sz="900" b="1">
+                <a:solidFill>
+                  <a:srgbClr val="1F4E79"/>
+                </a:solidFill>
+                <a:latin typeface="微软雅黑"/>
+                <a:ea typeface="微软雅黑"/>
+              </a:rPr>
+              <a:t>沉睡客户识别唤醒</a:t>
+            </a:r>
+          </a:p>
+          <a:p>
+            <a:pPr algn="l">
+              <a:lnSpc>
+                <a:spcPct val="110000"/>
+              </a:lnSpc>
+              <a:spcAft>
+                <a:spcPts val="300"/>
+              </a:spcAft>
+            </a:pPr>
+            <a:r>
+              <a:rPr sz="900" b="1">
+                <a:solidFill>
+                  <a:srgbClr val="D6A000"/>
+                </a:solidFill>
+                <a:latin typeface="微软雅黑"/>
+                <a:ea typeface="微软雅黑"/>
+              </a:rPr>
+              <a:t>★ </a:t>
+            </a:r>
+            <a:r>
+              <a:rPr sz="900" b="1">
+                <a:solidFill>
+                  <a:srgbClr val="1F4E79"/>
+                </a:solidFill>
+                <a:latin typeface="微软雅黑"/>
+                <a:ea typeface="微软雅黑"/>
+              </a:rPr>
+              <a:t>竞品经营洞察 AI 智能体</a:t>
+            </a:r>
+          </a:p>
+        </p:txBody>
+      </p:sp>
+      <p:sp>
+        <p:nvSpPr>
+          <p:cNvPr id="24" name="Rectangle 22">
+            <a:extLst>
+              <a:ext uri="{FF2B5EF4-FFF2-40B4-BE49-F238E27FC236}">
+                <a16:creationId xmlns:a16="http://schemas.microsoft.com/office/drawing/2014/main" id="{E76DDCA5-29A7-49BB-9E9C-CDFAA8E06709}"/>
+              </a:ext>
+            </a:extLst>
+          </p:cNvPr>
+          <p:cNvSpPr/>
+          <p:nvPr/>
+        </p:nvSpPr>
+        <p:spPr>
+          <a:xfrm>
+            <a:off x="4197096" y="4041648"/>
+            <a:ext cx="3538728" cy="54864"/>
+          </a:xfrm>
+          <a:prstGeom prst="rect">
+            <a:avLst/>
+          </a:prstGeom>
+          <a:solidFill>
+            <a:srgbClr val="1F4E79"/>
+          </a:solidFill>
+          <a:ln>
+            <a:noFill/>
+          </a:ln>
+          <a:effectLst/>
+        </p:spPr>
+        <p:style>
+          <a:lnRef idx="1">
+            <a:schemeClr val="accent1"/>
+          </a:lnRef>
+          <a:fillRef idx="3">
+            <a:schemeClr val="accent1"/>
+          </a:fillRef>
+          <a:effectRef idx="2">
+            <a:schemeClr val="accent1"/>
+          </a:effectRef>
+          <a:fontRef idx="minor">
+            <a:schemeClr val="lt1"/>
+          </a:fontRef>
+        </p:style>
+        <p:txBody>
+          <a:bodyPr rtlCol="0" anchor="ctr"/>
+          <a:lstStyle/>
+          <a:p>
+            <a:pPr algn="ctr"/>
+            <a:endParaRPr/>
+          </a:p>
+        </p:txBody>
+      </p:sp>
+      <p:sp>
+        <p:nvSpPr>
+          <p:cNvPr id="25" name="Rectangle 23">
+            <a:extLst>
+              <a:ext uri="{FF2B5EF4-FFF2-40B4-BE49-F238E27FC236}">
+                <a16:creationId xmlns:a16="http://schemas.microsoft.com/office/drawing/2014/main" id="{3A8BF65A-0E95-4A9C-A1C4-7270AA902213}"/>
+              </a:ext>
+            </a:extLst>
+          </p:cNvPr>
+          <p:cNvSpPr/>
+          <p:nvPr/>
+        </p:nvSpPr>
+        <p:spPr>
+          <a:xfrm>
+            <a:off x="4343400" y="4206240"/>
+            <a:ext cx="54864" cy="182880"/>
+          </a:xfrm>
+          <a:prstGeom prst="rect">
+            <a:avLst/>
+          </a:prstGeom>
+          <a:solidFill>
+            <a:srgbClr val="D6A000"/>
+          </a:solidFill>
+          <a:ln>
+            <a:noFill/>
+          </a:ln>
+          <a:effectLst/>
+        </p:spPr>
+        <p:style>
+          <a:lnRef idx="1">
+            <a:schemeClr val="accent1"/>
+          </a:lnRef>
+          <a:fillRef idx="3">
+            <a:schemeClr val="accent1"/>
+          </a:fillRef>
+          <a:effectRef idx="2">
+            <a:schemeClr val="accent1"/>
+          </a:effectRef>
+          <a:fontRef idx="minor">
+            <a:schemeClr val="lt1"/>
+          </a:fontRef>
+        </p:style>
+        <p:txBody>
+          <a:bodyPr rtlCol="0" anchor="ctr"/>
+          <a:lstStyle/>
+          <a:p>
+            <a:pPr algn="ctr"/>
+            <a:endParaRPr/>
+          </a:p>
+        </p:txBody>
+      </p:sp>
+      <p:sp>
+        <p:nvSpPr>
+          <p:cNvPr id="26" name="Rectangle 24">
+            <a:extLst>
+              <a:ext uri="{FF2B5EF4-FFF2-40B4-BE49-F238E27FC236}">
+                <a16:creationId xmlns:a16="http://schemas.microsoft.com/office/drawing/2014/main" id="{BA730DCE-496A-4811-A15E-8FC2476C5A9C}"/>
+              </a:ext>
+            </a:extLst>
+          </p:cNvPr>
+          <p:cNvSpPr/>
+          <p:nvPr/>
+        </p:nvSpPr>
+        <p:spPr>
+          <a:xfrm>
+            <a:off x="7882128" y="4041648"/>
+            <a:ext cx="3538728" cy="2039112"/>
+          </a:xfrm>
+          <a:prstGeom prst="rect">
+            <a:avLst/>
+          </a:prstGeom>
+          <a:solidFill>
+            <a:srgbClr val="FFFFFF"/>
+          </a:solidFill>
+          <a:ln w="19050">
+            <a:solidFill>
+              <a:srgbClr val="D6D6D6"/>
+            </a:solidFill>
+          </a:ln>
+          <a:effectLst/>
+        </p:spPr>
+        <p:style>
+          <a:lnRef idx="1">
+            <a:schemeClr val="accent1"/>
+          </a:lnRef>
+          <a:fillRef idx="3">
+            <a:schemeClr val="accent1"/>
+          </a:fillRef>
+          <a:effectRef idx="2">
+            <a:schemeClr val="accent1"/>
+          </a:effectRef>
+          <a:fontRef idx="minor">
+            <a:schemeClr val="lt1"/>
+          </a:fontRef>
+        </p:style>
+        <p:txBody>
+          <a:bodyPr wrap="square" lIns="256032" tIns="128016" rIns="128016" bIns="91440" rtlCol="0" anchor="t"/>
+          <a:lstStyle/>
+          <a:p>
+            <a:pPr algn="l">
+              <a:lnSpc>
+                <a:spcPct val="100000"/>
+              </a:lnSpc>
+              <a:spcAft>
+                <a:spcPts val="600"/>
+              </a:spcAft>
+            </a:pPr>
+            <a:r>
+              <a:rPr sz="1200" b="1">
+                <a:solidFill>
+                  <a:srgbClr val="0A0A0A"/>
+                </a:solidFill>
+                <a:latin typeface="微软雅黑"/>
+                <a:ea typeface="微软雅黑"/>
+              </a:rPr>
+              <a:t>风险管理</a:t>
+            </a:r>
+          </a:p>
+          <a:p>
+            <a:pPr algn="l">
+              <a:lnSpc>
+                <a:spcPct val="110000"/>
+              </a:lnSpc>
+              <a:spcAft>
+                <a:spcPts val="300"/>
+              </a:spcAft>
+            </a:pPr>
+            <a:r>
+              <a:rPr sz="900" b="1">
+                <a:solidFill>
+                  <a:srgbClr val="D6A000"/>
+                </a:solidFill>
+                <a:latin typeface="微软雅黑"/>
+                <a:ea typeface="微软雅黑"/>
+              </a:rPr>
+              <a:t>★ </a:t>
+            </a:r>
+            <a:r>
+              <a:rPr sz="900" b="1">
+                <a:solidFill>
+                  <a:srgbClr val="1F4E79"/>
+                </a:solidFill>
+                <a:latin typeface="微软雅黑"/>
+                <a:ea typeface="微软雅黑"/>
+              </a:rPr>
+              <a:t>新老客 PD 模型迭代:增强头尾区分,平衡通过率、客群结构与风险</a:t>
+            </a:r>
+          </a:p>
+          <a:p>
+            <a:pPr algn="l">
+              <a:lnSpc>
+                <a:spcPct val="110000"/>
+              </a:lnSpc>
+              <a:spcAft>
+                <a:spcPts val="300"/>
+              </a:spcAft>
+            </a:pPr>
+            <a:r>
+              <a:rPr sz="900" b="1">
+                <a:solidFill>
+                  <a:srgbClr val="D6A000"/>
+                </a:solidFill>
+                <a:latin typeface="微软雅黑"/>
+                <a:ea typeface="微软雅黑"/>
+              </a:rPr>
+              <a:t>★ </a:t>
+            </a:r>
+            <a:r>
+              <a:rPr sz="900" b="1">
+                <a:solidFill>
+                  <a:srgbClr val="1F4E79"/>
+                </a:solidFill>
+                <a:latin typeface="微软雅黑"/>
+                <a:ea typeface="微软雅黑"/>
+              </a:rPr>
+              <a:t>风险 × 价值联合额度策略:多模型交叉分箱自动寻优,输出最优额度提升客群与产品承接矩阵标签</a:t>
+            </a:r>
+          </a:p>
+        </p:txBody>
+      </p:sp>
+      <p:sp>
+        <p:nvSpPr>
+          <p:cNvPr id="27" name="Rectangle 25">
+            <a:extLst>
+              <a:ext uri="{FF2B5EF4-FFF2-40B4-BE49-F238E27FC236}">
+                <a16:creationId xmlns:a16="http://schemas.microsoft.com/office/drawing/2014/main" id="{EC39853C-2920-480C-9EF2-C38B227ED0A5}"/>
+              </a:ext>
+            </a:extLst>
+          </p:cNvPr>
+          <p:cNvSpPr/>
+          <p:nvPr/>
+        </p:nvSpPr>
+        <p:spPr>
+          <a:xfrm>
+            <a:off x="7882128" y="4041648"/>
+            <a:ext cx="3538728" cy="54864"/>
+          </a:xfrm>
+          <a:prstGeom prst="rect">
+            <a:avLst/>
+          </a:prstGeom>
+          <a:solidFill>
+            <a:srgbClr val="1F4E79"/>
+          </a:solidFill>
+          <a:ln>
+            <a:noFill/>
+          </a:ln>
+          <a:effectLst/>
+        </p:spPr>
+        <p:style>
+          <a:lnRef idx="1">
+            <a:schemeClr val="accent1"/>
+          </a:lnRef>
+          <a:fillRef idx="3">
+            <a:schemeClr val="accent1"/>
+          </a:fillRef>
+          <a:effectRef idx="2">
+            <a:schemeClr val="accent1"/>
+          </a:effectRef>
+          <a:fontRef idx="minor">
+            <a:schemeClr val="lt1"/>
+          </a:fontRef>
+        </p:style>
+        <p:txBody>
+          <a:bodyPr rtlCol="0" anchor="ctr"/>
+          <a:lstStyle/>
+          <a:p>
+            <a:pPr algn="ctr"/>
+            <a:endParaRPr/>
+          </a:p>
+        </p:txBody>
+      </p:sp>
+      <p:sp>
+        <p:nvSpPr>
+          <p:cNvPr id="28" name="Rectangle 26">
+            <a:extLst>
+              <a:ext uri="{FF2B5EF4-FFF2-40B4-BE49-F238E27FC236}">
+                <a16:creationId xmlns:a16="http://schemas.microsoft.com/office/drawing/2014/main" id="{6D533152-AB68-4116-9B63-B0AC72A41611}"/>
+              </a:ext>
+            </a:extLst>
+          </p:cNvPr>
+          <p:cNvSpPr/>
+          <p:nvPr/>
+        </p:nvSpPr>
+        <p:spPr>
+          <a:xfrm>
+            <a:off x="8028432" y="4206240"/>
+            <a:ext cx="54864" cy="182880"/>
+          </a:xfrm>
+          <a:prstGeom prst="rect">
+            <a:avLst/>
+          </a:prstGeom>
+          <a:solidFill>
+            <a:srgbClr val="D6A000"/>
+          </a:solidFill>
+          <a:ln>
+            <a:noFill/>
+          </a:ln>
+          <a:effectLst/>
+        </p:spPr>
+        <p:style>
+          <a:lnRef idx="1">
+            <a:schemeClr val="accent1"/>
+          </a:lnRef>
+          <a:fillRef idx="3">
+            <a:schemeClr val="accent1"/>
+          </a:fillRef>
+          <a:effectRef idx="2">
+            <a:schemeClr val="accent1"/>
+          </a:effectRef>
+          <a:fontRef idx="minor">
+            <a:schemeClr val="lt1"/>
+          </a:fontRef>
+        </p:style>
+        <p:txBody>
+          <a:bodyPr rtlCol="0" anchor="ctr"/>
+          <a:lstStyle/>
+          <a:p>
+            <a:pPr algn="ctr"/>
+            <a:endParaRPr/>
+          </a:p>
+        </p:txBody>
+      </p:sp>
+      <p:sp>
+        <p:nvSpPr>
+          <p:cNvPr id="29" name="Rectangle 27">
+            <a:extLst>
+              <a:ext uri="{FF2B5EF4-FFF2-40B4-BE49-F238E27FC236}">
+                <a16:creationId xmlns:a16="http://schemas.microsoft.com/office/drawing/2014/main" id="{C2AA76F5-3990-48BF-BB5D-0439F409A254}"/>
+              </a:ext>
+            </a:extLst>
+          </p:cNvPr>
+          <p:cNvSpPr/>
+          <p:nvPr/>
+        </p:nvSpPr>
+        <p:spPr>
+          <a:xfrm>
+            <a:off x="512064" y="6236208"/>
+            <a:ext cx="10899648" cy="384048"/>
+          </a:xfrm>
+          <a:prstGeom prst="rect">
+            <a:avLst/>
+          </a:prstGeom>
+          <a:solidFill>
+            <a:srgbClr val="FAF3E0"/>
+          </a:solidFill>
+          <a:ln>
+            <a:noFill/>
+          </a:ln>
+          <a:effectLst/>
+        </p:spPr>
+        <p:style>
+          <a:lnRef idx="1">
+            <a:schemeClr val="accent1"/>
+          </a:lnRef>
+          <a:fillRef idx="3">
+            <a:schemeClr val="accent1"/>
+          </a:fillRef>
+          <a:effectRef idx="2">
+            <a:schemeClr val="accent1"/>
+          </a:effectRef>
+          <a:fontRef idx="minor">
+            <a:schemeClr val="lt1"/>
+          </a:fontRef>
+        </p:style>
+        <p:txBody>
+          <a:bodyPr wrap="square" lIns="219456" tIns="18288" rIns="128016" bIns="18288" rtlCol="0" anchor="ctr"/>
+          <a:lstStyle/>
+          <a:p>
+            <a:pPr algn="l">
+              <a:lnSpc>
+                <a:spcPct val="110000"/>
+              </a:lnSpc>
+              <a:spcAft>
+                <a:spcPts val="0"/>
+              </a:spcAft>
+            </a:pPr>
+            <a:r>
+              <a:rPr sz="900" b="1">
+                <a:solidFill>
+                  <a:srgbClr val="0A0A0A"/>
+                </a:solidFill>
+                <a:latin typeface="微软雅黑"/>
+                <a:ea typeface="微软雅黑"/>
+              </a:rPr>
+              <a:t>四项目标统领全局——数据基建打底,投放、运营、风险三大领域在统一数据与分层体系上协同建设。</a:t>
+            </a:r>
+          </a:p>
+        </p:txBody>
+      </p:sp>
+      <p:sp>
+        <p:nvSpPr>
+          <p:cNvPr id="30" name="Rectangle 28">
+            <a:extLst>
+              <a:ext uri="{FF2B5EF4-FFF2-40B4-BE49-F238E27FC236}">
+                <a16:creationId xmlns:a16="http://schemas.microsoft.com/office/drawing/2014/main" id="{A694BE8D-DACD-4C4E-BD23-ED6F3577EC26}"/>
+              </a:ext>
+            </a:extLst>
+          </p:cNvPr>
+          <p:cNvSpPr/>
+          <p:nvPr/>
+        </p:nvSpPr>
+        <p:spPr>
+          <a:xfrm>
+            <a:off x="512064" y="6236208"/>
+            <a:ext cx="64008" cy="384048"/>
+          </a:xfrm>
+          <a:prstGeom prst="rect">
+            <a:avLst/>
+          </a:prstGeom>
+          <a:solidFill>
+            <a:srgbClr val="D6A000"/>
+          </a:solidFill>
+          <a:ln>
+            <a:noFill/>
+          </a:ln>
+          <a:effectLst/>
+        </p:spPr>
+        <p:style>
+          <a:lnRef idx="1">
+            <a:schemeClr val="accent1"/>
+          </a:lnRef>
+          <a:fillRef idx="3">
+            <a:schemeClr val="accent1"/>
+          </a:fillRef>
+          <a:effectRef idx="2">
+            <a:schemeClr val="accent1"/>
+          </a:effectRef>
+          <a:fontRef idx="minor">
+            <a:schemeClr val="lt1"/>
+          </a:fontRef>
+        </p:style>
+        <p:txBody>
+          <a:bodyPr rtlCol="0" anchor="ctr"/>
+          <a:lstStyle/>
+          <a:p>
+            <a:pPr algn="ctr"/>
+            <a:endParaRPr/>
           </a:p>
         </p:txBody>
       </p:sp>

--- a/Model MBR August.pptx
+++ b/Model MBR August.pptx
@@ -1890,41 +1890,24 @@
         <p:cNvGrpSpPr/>
         <p:nvPr/>
       </p:nvGrpSpPr>
-      <p:grpSpPr>
-        <a:xfrm>
-          <a:off x="0" y="0"/>
-          <a:ext cx="0" cy="0"/>
-          <a:chOff x="0" y="0"/>
-          <a:chExt cx="0" cy="0"/>
-        </a:xfrm>
-      </p:grpSpPr>
-      <p:sp>
-        <p:nvSpPr>
-          <p:cNvPr id="2" name="title">
-            <a:extLst>
-              <a:ext uri="{FF2B5EF4-FFF2-40B4-BE49-F238E27FC236}">
-                <a16:creationId xmlns:a16="http://schemas.microsoft.com/office/drawing/2014/main" id="{8355AB41-3856-43D4-91F4-2CF8E6943019}"/>
-              </a:ext>
-            </a:extLst>
-          </p:cNvPr>
+      <p:sp>
+        <p:nvSpPr>
+          <p:cNvPr id="2" name="TextBox 1"/>
           <p:cNvSpPr txBox="1"/>
           <p:nvPr/>
         </p:nvSpPr>
         <p:spPr>
           <a:xfrm>
             <a:off x="603504" y="210312"/>
-            <a:ext cx="8887968" cy="356616"/>
+            <a:ext cx="10899648" cy="365760"/>
           </a:xfrm>
           <a:prstGeom prst="rect">
             <a:avLst/>
           </a:prstGeom>
           <a:noFill/>
-          <a:ln>
-            <a:noFill/>
-          </a:ln>
-        </p:spPr>
-        <p:txBody>
-          <a:bodyPr wrap="none" lIns="0" tIns="0" rIns="0" bIns="0" rtlCol="0" anchor="ctr"/>
+        </p:spPr>
+        <p:txBody>
+          <a:bodyPr wrap="square" anchor="t" lIns="0" rIns="0" tIns="0" bIns="0"/>
           <a:lstStyle/>
           <a:p>
             <a:pPr algn="l">
@@ -1936,146 +1919,26 @@
               </a:spcAft>
             </a:pPr>
             <a:r>
-              <a:rPr lang="zh-CN" altLang="en-US" sz="2000" b="1" dirty="0">
+              <a:rPr sz="2000" b="1">
                 <a:solidFill>
                   <a:srgbClr val="0A0A0A"/>
                 </a:solidFill>
                 <a:latin typeface="微软雅黑"/>
                 <a:ea typeface="微软雅黑"/>
               </a:rPr>
-              <a:t>体系规划</a:t>
-            </a:r>
-            <a:r>
-              <a:rPr lang="en-US" altLang="zh-CN" sz="2000" b="1" dirty="0">
-                <a:solidFill>
-                  <a:srgbClr val="0A0A0A"/>
-                </a:solidFill>
-                <a:latin typeface="微软雅黑"/>
-                <a:ea typeface="微软雅黑"/>
-              </a:rPr>
-              <a:t>:</a:t>
-            </a:r>
-            <a:r>
-              <a:rPr lang="zh-CN" altLang="en-US" sz="2000" b="1" dirty="0">
-                <a:solidFill>
-                  <a:srgbClr val="0A0A0A"/>
-                </a:solidFill>
-                <a:latin typeface="微软雅黑"/>
-                <a:ea typeface="微软雅黑"/>
-              </a:rPr>
-              <a:t>四项目标</a:t>
-            </a:r>
-            <a:r>
-              <a:rPr lang="en-US" altLang="zh-CN" sz="2000" b="1" dirty="0">
-                <a:solidFill>
-                  <a:srgbClr val="0A0A0A"/>
-                </a:solidFill>
-                <a:latin typeface="微软雅黑"/>
-                <a:ea typeface="微软雅黑"/>
-              </a:rPr>
-              <a:t>,</a:t>
-            </a:r>
-            <a:r>
-              <a:rPr lang="zh-CN" altLang="en-US" sz="2000" b="1" dirty="0">
-                <a:solidFill>
-                  <a:srgbClr val="0A0A0A"/>
-                </a:solidFill>
-                <a:latin typeface="微软雅黑"/>
-                <a:ea typeface="微软雅黑"/>
-              </a:rPr>
-              <a:t>一个底座</a:t>
-            </a:r>
-            <a:r>
-              <a:rPr lang="en-US" altLang="zh-CN" sz="2000" b="1" dirty="0">
-                <a:solidFill>
-                  <a:srgbClr val="0A0A0A"/>
-                </a:solidFill>
-                <a:latin typeface="微软雅黑"/>
-                <a:ea typeface="微软雅黑"/>
-              </a:rPr>
-              <a:t>,</a:t>
-            </a:r>
-            <a:r>
-              <a:rPr lang="zh-CN" altLang="en-US" sz="2000" b="1" dirty="0">
-                <a:solidFill>
-                  <a:srgbClr val="0A0A0A"/>
-                </a:solidFill>
-                <a:latin typeface="微软雅黑"/>
-                <a:ea typeface="微软雅黑"/>
-              </a:rPr>
-              <a:t>三大领域</a:t>
-            </a:r>
-          </a:p>
-        </p:txBody>
-      </p:sp>
-      <p:sp>
-        <p:nvSpPr>
-          <p:cNvPr id="3" name="TextBox 1">
-            <a:extLst>
-              <a:ext uri="{FF2B5EF4-FFF2-40B4-BE49-F238E27FC236}">
-                <a16:creationId xmlns:a16="http://schemas.microsoft.com/office/drawing/2014/main" id="{2096798B-B135-4C44-B77C-94985B52657C}"/>
-              </a:ext>
-            </a:extLst>
-          </p:cNvPr>
+              <a:t>体系规划:四项目标,四大领域</a:t>
+            </a:r>
+          </a:p>
+        </p:txBody>
+      </p:sp>
+      <p:sp>
+        <p:nvSpPr>
+          <p:cNvPr id="3" name="TextBox 2"/>
           <p:cNvSpPr txBox="1"/>
           <p:nvPr/>
         </p:nvSpPr>
         <p:spPr>
           <a:xfrm>
-            <a:off x="603504" y="210312"/>
-            <a:ext cx="8887968" cy="365760"/>
-          </a:xfrm>
-          <a:prstGeom prst="rect">
-            <a:avLst/>
-          </a:prstGeom>
-          <a:noFill/>
-        </p:spPr>
-        <p:txBody>
-          <a:bodyPr wrap="square" lIns="0" tIns="0" rIns="0" bIns="0" anchor="t"/>
-          <a:lstStyle/>
-          <a:p>
-            <a:pPr algn="l">
-              <a:lnSpc>
-                <a:spcPct val="130000"/>
-              </a:lnSpc>
-              <a:spcAft>
-                <a:spcPts val="0"/>
-              </a:spcAft>
-            </a:pPr>
-            <a:r>
-              <a:rPr sz="2000" b="1" dirty="0" err="1">
-                <a:solidFill>
-                  <a:srgbClr val="0A0A0A"/>
-                </a:solidFill>
-                <a:latin typeface="微软雅黑"/>
-                <a:ea typeface="微软雅黑"/>
-              </a:rPr>
-              <a:t>体系规划:四项目标,一个底座,三大领域</a:t>
-            </a:r>
-            <a:endParaRPr sz="2000" b="1" dirty="0">
-              <a:solidFill>
-                <a:srgbClr val="0A0A0A"/>
-              </a:solidFill>
-              <a:latin typeface="微软雅黑"/>
-              <a:ea typeface="微软雅黑"/>
-            </a:endParaRPr>
-          </a:p>
-        </p:txBody>
-      </p:sp>
-      <p:sp>
-        <p:nvSpPr>
-          <p:cNvPr id="4" name="TextBox 2">
-            <a:extLst>
-              <a:ext uri="{FF2B5EF4-FFF2-40B4-BE49-F238E27FC236}">
-                <a16:creationId xmlns:a16="http://schemas.microsoft.com/office/drawing/2014/main" id="{319678CB-8E7F-488B-A3CD-4463BC189998}"/>
-              </a:ext>
-            </a:extLst>
-          </p:cNvPr>
-          <p:cNvSpPr txBox="1"/>
-          <p:nvPr/>
-        </p:nvSpPr>
-        <p:spPr>
-          <a:xfrm>
             <a:off x="512064" y="585216"/>
             <a:ext cx="10899648" cy="438912"/>
           </a:xfrm>
@@ -2085,7 +1948,7 @@
           <a:noFill/>
         </p:spPr>
         <p:txBody>
-          <a:bodyPr wrap="square" lIns="0" tIns="0" rIns="0" bIns="0" anchor="t"/>
+          <a:bodyPr wrap="square" anchor="t" lIns="0" rIns="0" tIns="0" bIns="0"/>
           <a:lstStyle/>
           <a:p>
             <a:pPr algn="l">
@@ -2097,37 +1960,21 @@
               </a:spcAft>
             </a:pPr>
             <a:r>
-              <a:rPr sz="1800" b="0" dirty="0" err="1">
+              <a:rPr sz="1800" b="0">
                 <a:solidFill>
                   <a:srgbClr val="606060"/>
                 </a:solidFill>
                 <a:latin typeface="微软雅黑"/>
                 <a:ea typeface="微软雅黑"/>
               </a:rPr>
-              <a:t>规模、结构、质量、效率四项目标并重;数据基建打底,投放、运营、风险三大领域共享同一分层体系</a:t>
-            </a:r>
-            <a:r>
-              <a:rPr sz="1800" b="0" dirty="0">
-                <a:solidFill>
-                  <a:srgbClr val="606060"/>
-                </a:solidFill>
-                <a:latin typeface="微软雅黑"/>
-                <a:ea typeface="微软雅黑"/>
-              </a:rPr>
-              <a:t>。</a:t>
-            </a:r>
-          </a:p>
-        </p:txBody>
-      </p:sp>
-      <p:sp>
-        <p:nvSpPr>
-          <p:cNvPr id="5" name="Rectangle 3">
-            <a:extLst>
-              <a:ext uri="{FF2B5EF4-FFF2-40B4-BE49-F238E27FC236}">
-                <a16:creationId xmlns:a16="http://schemas.microsoft.com/office/drawing/2014/main" id="{95250454-BFCA-4E1B-992D-3B2D8D9C2FF2}"/>
-              </a:ext>
-            </a:extLst>
-          </p:cNvPr>
+              <a:t>规模、结构、质量、效率四项目标并重;数据基建、投放、运营、风险四大领域共享同一分层体系。</a:t>
+            </a:r>
+          </a:p>
+        </p:txBody>
+      </p:sp>
+      <p:sp>
+        <p:nvSpPr>
+          <p:cNvPr id="4" name="Rectangle 3"/>
           <p:cNvSpPr/>
           <p:nvPr/>
         </p:nvSpPr>
@@ -2166,19 +2013,12 @@
           <a:lstStyle/>
           <a:p>
             <a:pPr algn="ctr"/>
-            <a:endParaRPr/>
-          </a:p>
-        </p:txBody>
-      </p:sp>
-      <p:sp>
-        <p:nvSpPr>
-          <p:cNvPr id="6" name="Rectangle 4">
-            <a:extLst>
-              <a:ext uri="{FF2B5EF4-FFF2-40B4-BE49-F238E27FC236}">
-                <a16:creationId xmlns:a16="http://schemas.microsoft.com/office/drawing/2014/main" id="{EC5B08CD-1287-4235-B316-50C5D13F7410}"/>
-              </a:ext>
-            </a:extLst>
-          </p:cNvPr>
+          </a:p>
+        </p:txBody>
+      </p:sp>
+      <p:sp>
+        <p:nvSpPr>
+          <p:cNvPr id="5" name="Rectangle 4"/>
           <p:cNvSpPr/>
           <p:nvPr/>
         </p:nvSpPr>
@@ -2217,19 +2057,12 @@
           <a:lstStyle/>
           <a:p>
             <a:pPr algn="ctr"/>
-            <a:endParaRPr/>
-          </a:p>
-        </p:txBody>
-      </p:sp>
-      <p:sp>
-        <p:nvSpPr>
-          <p:cNvPr id="7" name="TextBox 5">
-            <a:extLst>
-              <a:ext uri="{FF2B5EF4-FFF2-40B4-BE49-F238E27FC236}">
-                <a16:creationId xmlns:a16="http://schemas.microsoft.com/office/drawing/2014/main" id="{392BE699-6C38-498C-9C9A-CE38B718C728}"/>
-              </a:ext>
-            </a:extLst>
-          </p:cNvPr>
+          </a:p>
+        </p:txBody>
+      </p:sp>
+      <p:sp>
+        <p:nvSpPr>
+          <p:cNvPr id="6" name="TextBox 5"/>
           <p:cNvSpPr txBox="1"/>
           <p:nvPr/>
         </p:nvSpPr>
@@ -2244,7 +2077,7 @@
           <a:noFill/>
         </p:spPr>
         <p:txBody>
-          <a:bodyPr wrap="square" lIns="0" tIns="0" rIns="0" bIns="0" anchor="t"/>
+          <a:bodyPr wrap="square" anchor="t" lIns="0" rIns="0" tIns="0" bIns="0"/>
           <a:lstStyle/>
           <a:p>
             <a:pPr algn="l">
@@ -2270,13 +2103,7 @@
       </p:sp>
       <p:sp>
         <p:nvSpPr>
-          <p:cNvPr id="8" name="Rectangle 6">
-            <a:extLst>
-              <a:ext uri="{FF2B5EF4-FFF2-40B4-BE49-F238E27FC236}">
-                <a16:creationId xmlns:a16="http://schemas.microsoft.com/office/drawing/2014/main" id="{24566B3E-7E2A-45FE-AFD7-C393585CCF0C}"/>
-              </a:ext>
-            </a:extLst>
-          </p:cNvPr>
+          <p:cNvPr id="7" name="Rectangle 6"/>
           <p:cNvSpPr/>
           <p:nvPr/>
         </p:nvSpPr>
@@ -2311,7 +2138,7 @@
           </a:fontRef>
         </p:style>
         <p:txBody>
-          <a:bodyPr wrap="square" lIns="164592" tIns="146304" rIns="128016" bIns="73152" rtlCol="0" anchor="t"/>
+          <a:bodyPr rtlCol="0" anchor="t" wrap="square" lIns="164592" rIns="128016" tIns="146304" bIns="73152"/>
           <a:lstStyle/>
           <a:p>
             <a:pPr algn="l">
@@ -2377,13 +2204,7 @@
       </p:sp>
       <p:sp>
         <p:nvSpPr>
-          <p:cNvPr id="9" name="Rectangle 7">
-            <a:extLst>
-              <a:ext uri="{FF2B5EF4-FFF2-40B4-BE49-F238E27FC236}">
-                <a16:creationId xmlns:a16="http://schemas.microsoft.com/office/drawing/2014/main" id="{31590DBD-B04D-4967-8C2D-D2622818954C}"/>
-              </a:ext>
-            </a:extLst>
-          </p:cNvPr>
+          <p:cNvPr id="8" name="Rectangle 7"/>
           <p:cNvSpPr/>
           <p:nvPr/>
         </p:nvSpPr>
@@ -2422,19 +2243,12 @@
           <a:lstStyle/>
           <a:p>
             <a:pPr algn="ctr"/>
-            <a:endParaRPr/>
-          </a:p>
-        </p:txBody>
-      </p:sp>
-      <p:sp>
-        <p:nvSpPr>
-          <p:cNvPr id="10" name="Rectangle 8">
-            <a:extLst>
-              <a:ext uri="{FF2B5EF4-FFF2-40B4-BE49-F238E27FC236}">
-                <a16:creationId xmlns:a16="http://schemas.microsoft.com/office/drawing/2014/main" id="{C4AE971E-C2C0-4B49-85EB-BC4D5AFBDE73}"/>
-              </a:ext>
-            </a:extLst>
-          </p:cNvPr>
+          </a:p>
+        </p:txBody>
+      </p:sp>
+      <p:sp>
+        <p:nvSpPr>
+          <p:cNvPr id="9" name="Rectangle 8"/>
           <p:cNvSpPr/>
           <p:nvPr/>
         </p:nvSpPr>
@@ -2469,7 +2283,7 @@
           </a:fontRef>
         </p:style>
         <p:txBody>
-          <a:bodyPr wrap="square" lIns="164592" tIns="146304" rIns="128016" bIns="73152" rtlCol="0" anchor="t"/>
+          <a:bodyPr rtlCol="0" anchor="t" wrap="square" lIns="164592" rIns="128016" tIns="146304" bIns="73152"/>
           <a:lstStyle/>
           <a:p>
             <a:pPr algn="l">
@@ -2508,7 +2322,7 @@
                 <a:latin typeface="微软雅黑"/>
                 <a:ea typeface="微软雅黑"/>
               </a:rPr>
-              <a:t>NON SAAC ≥ 40%</a:t>
+              <a:t>NON SAAC 全年 ≥ 40%</a:t>
             </a:r>
           </a:p>
           <a:p>
@@ -2535,13 +2349,7 @@
       </p:sp>
       <p:sp>
         <p:nvSpPr>
-          <p:cNvPr id="11" name="Rectangle 9">
-            <a:extLst>
-              <a:ext uri="{FF2B5EF4-FFF2-40B4-BE49-F238E27FC236}">
-                <a16:creationId xmlns:a16="http://schemas.microsoft.com/office/drawing/2014/main" id="{CDF80DEF-E436-4BF9-8530-4C23C7B3CC3E}"/>
-              </a:ext>
-            </a:extLst>
-          </p:cNvPr>
+          <p:cNvPr id="10" name="Rectangle 9"/>
           <p:cNvSpPr/>
           <p:nvPr/>
         </p:nvSpPr>
@@ -2580,19 +2388,12 @@
           <a:lstStyle/>
           <a:p>
             <a:pPr algn="ctr"/>
-            <a:endParaRPr/>
-          </a:p>
-        </p:txBody>
-      </p:sp>
-      <p:sp>
-        <p:nvSpPr>
-          <p:cNvPr id="12" name="Rectangle 10">
-            <a:extLst>
-              <a:ext uri="{FF2B5EF4-FFF2-40B4-BE49-F238E27FC236}">
-                <a16:creationId xmlns:a16="http://schemas.microsoft.com/office/drawing/2014/main" id="{77591C11-2152-45DC-9076-E928E007A992}"/>
-              </a:ext>
-            </a:extLst>
-          </p:cNvPr>
+          </a:p>
+        </p:txBody>
+      </p:sp>
+      <p:sp>
+        <p:nvSpPr>
+          <p:cNvPr id="11" name="Rectangle 10"/>
           <p:cNvSpPr/>
           <p:nvPr/>
         </p:nvSpPr>
@@ -2627,7 +2428,7 @@
           </a:fontRef>
         </p:style>
         <p:txBody>
-          <a:bodyPr wrap="square" lIns="164592" tIns="146304" rIns="128016" bIns="73152" rtlCol="0" anchor="t"/>
+          <a:bodyPr rtlCol="0" anchor="t" wrap="square" lIns="164592" rIns="128016" tIns="146304" bIns="73152"/>
           <a:lstStyle/>
           <a:p>
             <a:pPr algn="l">
@@ -2666,7 +2467,7 @@
                 <a:latin typeface="微软雅黑"/>
                 <a:ea typeface="微软雅黑"/>
               </a:rPr>
-              <a:t>风险 ≤ 7.1%</a:t>
+              <a:t>风险表现控制在 7.1%</a:t>
             </a:r>
           </a:p>
           <a:p>
@@ -2693,13 +2494,7 @@
       </p:sp>
       <p:sp>
         <p:nvSpPr>
-          <p:cNvPr id="13" name="Rectangle 11">
-            <a:extLst>
-              <a:ext uri="{FF2B5EF4-FFF2-40B4-BE49-F238E27FC236}">
-                <a16:creationId xmlns:a16="http://schemas.microsoft.com/office/drawing/2014/main" id="{38097190-FB31-4028-BAA3-2FCC32D25383}"/>
-              </a:ext>
-            </a:extLst>
-          </p:cNvPr>
+          <p:cNvPr id="12" name="Rectangle 11"/>
           <p:cNvSpPr/>
           <p:nvPr/>
         </p:nvSpPr>
@@ -2738,19 +2533,12 @@
           <a:lstStyle/>
           <a:p>
             <a:pPr algn="ctr"/>
-            <a:endParaRPr/>
-          </a:p>
-        </p:txBody>
-      </p:sp>
-      <p:sp>
-        <p:nvSpPr>
-          <p:cNvPr id="14" name="Rectangle 12">
-            <a:extLst>
-              <a:ext uri="{FF2B5EF4-FFF2-40B4-BE49-F238E27FC236}">
-                <a16:creationId xmlns:a16="http://schemas.microsoft.com/office/drawing/2014/main" id="{A619135E-B486-4A84-8B9F-FDF63F21247C}"/>
-              </a:ext>
-            </a:extLst>
-          </p:cNvPr>
+          </a:p>
+        </p:txBody>
+      </p:sp>
+      <p:sp>
+        <p:nvSpPr>
+          <p:cNvPr id="13" name="Rectangle 12"/>
           <p:cNvSpPr/>
           <p:nvPr/>
         </p:nvSpPr>
@@ -2785,7 +2573,7 @@
           </a:fontRef>
         </p:style>
         <p:txBody>
-          <a:bodyPr wrap="square" lIns="164592" tIns="146304" rIns="128016" bIns="73152" rtlCol="0" anchor="t"/>
+          <a:bodyPr rtlCol="0" anchor="t" wrap="square" lIns="164592" rIns="128016" tIns="146304" bIns="73152"/>
           <a:lstStyle/>
           <a:p>
             <a:pPr algn="l">
@@ -2824,7 +2612,7 @@
                 <a:latin typeface="微软雅黑"/>
                 <a:ea typeface="微软雅黑"/>
               </a:rPr>
-              <a:t>LTV 统筹经营</a:t>
+              <a:t>提升转化率与投放 ROI</a:t>
             </a:r>
           </a:p>
           <a:p>
@@ -2844,20 +2632,14 @@
                 <a:latin typeface="微软雅黑"/>
                 <a:ea typeface="微软雅黑"/>
               </a:rPr>
-              <a:t>统筹获客、额度、定价、权益</a:t>
-            </a:r>
-          </a:p>
-        </p:txBody>
-      </p:sp>
-      <p:sp>
-        <p:nvSpPr>
-          <p:cNvPr id="15" name="Rectangle 13">
-            <a:extLst>
-              <a:ext uri="{FF2B5EF4-FFF2-40B4-BE49-F238E27FC236}">
-                <a16:creationId xmlns:a16="http://schemas.microsoft.com/office/drawing/2014/main" id="{CCDD6742-AF3A-4F28-BA32-3966F1BED965}"/>
-              </a:ext>
-            </a:extLst>
-          </p:cNvPr>
+              <a:t>以 LTV 统筹获客、额度、定价、权益</a:t>
+            </a:r>
+          </a:p>
+        </p:txBody>
+      </p:sp>
+      <p:sp>
+        <p:nvSpPr>
+          <p:cNvPr id="14" name="Rectangle 13"/>
           <p:cNvSpPr/>
           <p:nvPr/>
         </p:nvSpPr>
@@ -2896,32 +2678,25 @@
           <a:lstStyle/>
           <a:p>
             <a:pPr algn="ctr"/>
-            <a:endParaRPr/>
-          </a:p>
-        </p:txBody>
-      </p:sp>
-      <p:sp>
-        <p:nvSpPr>
-          <p:cNvPr id="16" name="Rectangle 14">
-            <a:extLst>
-              <a:ext uri="{FF2B5EF4-FFF2-40B4-BE49-F238E27FC236}">
-                <a16:creationId xmlns:a16="http://schemas.microsoft.com/office/drawing/2014/main" id="{D9A96881-A0A7-4404-A29C-9F72A7B4B680}"/>
-              </a:ext>
-            </a:extLst>
-          </p:cNvPr>
+          </a:p>
+        </p:txBody>
+      </p:sp>
+      <p:sp>
+        <p:nvSpPr>
+          <p:cNvPr id="15" name="Rectangle 14"/>
           <p:cNvSpPr/>
           <p:nvPr/>
         </p:nvSpPr>
         <p:spPr>
           <a:xfrm>
             <a:off x="512064" y="2670048"/>
-            <a:ext cx="10899648" cy="1005840"/>
-          </a:xfrm>
-          <a:prstGeom prst="rect">
-            <a:avLst/>
-          </a:prstGeom>
-          <a:solidFill>
-            <a:srgbClr val="F0F0F0"/>
+            <a:ext cx="64008" cy="201168"/>
+          </a:xfrm>
+          <a:prstGeom prst="rect">
+            <a:avLst/>
+          </a:prstGeom>
+          <a:solidFill>
+            <a:srgbClr val="D6A000"/>
           </a:solidFill>
           <a:ln>
             <a:noFill/>
@@ -2943,247 +2718,22 @@
           </a:fontRef>
         </p:style>
         <p:txBody>
-          <a:bodyPr wrap="square" lIns="201168" tIns="109728" rIns="182880" bIns="54864" rtlCol="0" anchor="t"/>
-          <a:lstStyle/>
-          <a:p>
-            <a:pPr algn="l">
-              <a:lnSpc>
-                <a:spcPct val="100000"/>
-              </a:lnSpc>
-              <a:spcAft>
-                <a:spcPts val="200"/>
-              </a:spcAft>
-            </a:pPr>
-            <a:r>
-              <a:rPr sz="1100" b="1">
-                <a:solidFill>
-                  <a:srgbClr val="1F4E79"/>
-                </a:solidFill>
-                <a:latin typeface="微软雅黑"/>
-                <a:ea typeface="微软雅黑"/>
-              </a:rPr>
-              <a:t>数据基建 · 一个底座</a:t>
-            </a:r>
-            <a:r>
-              <a:rPr sz="950" b="0">
-                <a:solidFill>
-                  <a:srgbClr val="3D3C3A"/>
-                </a:solidFill>
-                <a:latin typeface="微软雅黑"/>
-                <a:ea typeface="微软雅黑"/>
-              </a:rPr>
-              <a:t>  自主流水识别 + 统一数据底座,为模型、策略与归因提供一致口径</a:t>
-            </a:r>
-          </a:p>
-          <a:p>
-            <a:pPr algn="l">
-              <a:lnSpc>
-                <a:spcPct val="105000"/>
-              </a:lnSpc>
-              <a:spcAft>
-                <a:spcPts val="100"/>
-              </a:spcAft>
-            </a:pPr>
-            <a:r>
-              <a:rPr sz="900" b="1">
-                <a:solidFill>
-                  <a:srgbClr val="D6A000"/>
-                </a:solidFill>
-                <a:latin typeface="微软雅黑"/>
-                <a:ea typeface="微软雅黑"/>
-              </a:rPr>
-              <a:t>★ </a:t>
-            </a:r>
-            <a:r>
-              <a:rPr sz="900" b="1">
-                <a:solidFill>
-                  <a:srgbClr val="1F4E79"/>
-                </a:solidFill>
-                <a:latin typeface="微软雅黑"/>
-                <a:ea typeface="微软雅黑"/>
-              </a:rPr>
-              <a:t>BS-CAT 生产化与并行验证</a:t>
-            </a:r>
-          </a:p>
-          <a:p>
-            <a:pPr algn="l">
-              <a:lnSpc>
-                <a:spcPct val="105000"/>
-              </a:lnSpc>
-              <a:spcAft>
-                <a:spcPts val="100"/>
-              </a:spcAft>
-            </a:pPr>
-            <a:r>
-              <a:rPr sz="900" b="1">
-                <a:solidFill>
-                  <a:srgbClr val="D6A000"/>
-                </a:solidFill>
-                <a:latin typeface="微软雅黑"/>
-                <a:ea typeface="微软雅黑"/>
-              </a:rPr>
-              <a:t>★ </a:t>
-            </a:r>
-            <a:r>
-              <a:rPr sz="900" b="1">
-                <a:solidFill>
-                  <a:srgbClr val="1F4E79"/>
-                </a:solidFill>
-                <a:latin typeface="微软雅黑"/>
-                <a:ea typeface="微软雅黑"/>
-              </a:rPr>
-              <a:t>打通 IDP2 全链路:IDA → IDP → BS-CAT → S-CALC → 落库 → 风险决策 → 人工复核</a:t>
-            </a:r>
-          </a:p>
-          <a:p>
-            <a:pPr algn="l">
-              <a:lnSpc>
-                <a:spcPct val="105000"/>
-              </a:lnSpc>
-              <a:spcAft>
-                <a:spcPts val="100"/>
-              </a:spcAft>
-            </a:pPr>
-            <a:r>
-              <a:rPr sz="900" b="1">
-                <a:solidFill>
-                  <a:srgbClr val="D6A000"/>
-                </a:solidFill>
-                <a:latin typeface="微软雅黑"/>
-                <a:ea typeface="微软雅黑"/>
-              </a:rPr>
-              <a:t>★ </a:t>
-            </a:r>
-            <a:r>
-              <a:rPr sz="900" b="1">
-                <a:solidFill>
-                  <a:srgbClr val="1F4E79"/>
-                </a:solidFill>
-                <a:latin typeface="微软雅黑"/>
-                <a:ea typeface="微软雅黑"/>
-              </a:rPr>
-              <a:t>商户 / 类别知识库智能体</a:t>
-            </a:r>
-          </a:p>
-        </p:txBody>
-      </p:sp>
-      <p:sp>
-        <p:nvSpPr>
-          <p:cNvPr id="17" name="Rectangle 15">
-            <a:extLst>
-              <a:ext uri="{FF2B5EF4-FFF2-40B4-BE49-F238E27FC236}">
-                <a16:creationId xmlns:a16="http://schemas.microsoft.com/office/drawing/2014/main" id="{98592C1C-BE2E-42A8-9FC4-3615C1AA0A80}"/>
-              </a:ext>
-            </a:extLst>
-          </p:cNvPr>
-          <p:cNvSpPr/>
-          <p:nvPr/>
-        </p:nvSpPr>
-        <p:spPr>
-          <a:xfrm>
-            <a:off x="512064" y="2670048"/>
-            <a:ext cx="10899648" cy="54864"/>
-          </a:xfrm>
-          <a:prstGeom prst="rect">
-            <a:avLst/>
-          </a:prstGeom>
-          <a:solidFill>
-            <a:srgbClr val="1F4E79"/>
-          </a:solidFill>
-          <a:ln>
-            <a:noFill/>
-          </a:ln>
-          <a:effectLst/>
-        </p:spPr>
-        <p:style>
-          <a:lnRef idx="1">
-            <a:schemeClr val="accent1"/>
-          </a:lnRef>
-          <a:fillRef idx="3">
-            <a:schemeClr val="accent1"/>
-          </a:fillRef>
-          <a:effectRef idx="2">
-            <a:schemeClr val="accent1"/>
-          </a:effectRef>
-          <a:fontRef idx="minor">
-            <a:schemeClr val="lt1"/>
-          </a:fontRef>
-        </p:style>
-        <p:txBody>
           <a:bodyPr rtlCol="0" anchor="ctr"/>
           <a:lstStyle/>
           <a:p>
             <a:pPr algn="ctr"/>
-            <a:endParaRPr/>
-          </a:p>
-        </p:txBody>
-      </p:sp>
-      <p:sp>
-        <p:nvSpPr>
-          <p:cNvPr id="18" name="Rectangle 16">
-            <a:extLst>
-              <a:ext uri="{FF2B5EF4-FFF2-40B4-BE49-F238E27FC236}">
-                <a16:creationId xmlns:a16="http://schemas.microsoft.com/office/drawing/2014/main" id="{2007C5F1-651D-49E8-ACCB-06E12F18A3D5}"/>
-              </a:ext>
-            </a:extLst>
-          </p:cNvPr>
-          <p:cNvSpPr/>
-          <p:nvPr/>
-        </p:nvSpPr>
-        <p:spPr>
-          <a:xfrm>
-            <a:off x="512064" y="3767327"/>
-            <a:ext cx="64008" cy="201168"/>
-          </a:xfrm>
-          <a:prstGeom prst="rect">
-            <a:avLst/>
-          </a:prstGeom>
-          <a:solidFill>
-            <a:srgbClr val="D6A000"/>
-          </a:solidFill>
-          <a:ln>
-            <a:noFill/>
-          </a:ln>
-          <a:effectLst/>
-        </p:spPr>
-        <p:style>
-          <a:lnRef idx="1">
-            <a:schemeClr val="accent1"/>
-          </a:lnRef>
-          <a:fillRef idx="3">
-            <a:schemeClr val="accent1"/>
-          </a:fillRef>
-          <a:effectRef idx="2">
-            <a:schemeClr val="accent1"/>
-          </a:effectRef>
-          <a:fontRef idx="minor">
-            <a:schemeClr val="lt1"/>
-          </a:fontRef>
-        </p:style>
-        <p:txBody>
-          <a:bodyPr rtlCol="0" anchor="ctr"/>
-          <a:lstStyle/>
-          <a:p>
-            <a:pPr algn="ctr"/>
-            <a:endParaRPr/>
-          </a:p>
-        </p:txBody>
-      </p:sp>
-      <p:sp>
-        <p:nvSpPr>
-          <p:cNvPr id="19" name="TextBox 17">
-            <a:extLst>
-              <a:ext uri="{FF2B5EF4-FFF2-40B4-BE49-F238E27FC236}">
-                <a16:creationId xmlns:a16="http://schemas.microsoft.com/office/drawing/2014/main" id="{5C4EB545-A783-426C-8186-A719EEFFCCC7}"/>
-              </a:ext>
-            </a:extLst>
-          </p:cNvPr>
+          </a:p>
+        </p:txBody>
+      </p:sp>
+      <p:sp>
+        <p:nvSpPr>
+          <p:cNvPr id="16" name="TextBox 15"/>
           <p:cNvSpPr txBox="1"/>
           <p:nvPr/>
         </p:nvSpPr>
         <p:spPr>
           <a:xfrm>
-            <a:off x="640080" y="3749039"/>
+            <a:off x="640080" y="2651760"/>
             <a:ext cx="8229600" cy="274320"/>
           </a:xfrm>
           <a:prstGeom prst="rect">
@@ -3192,7 +2742,7 @@
           <a:noFill/>
         </p:spPr>
         <p:txBody>
-          <a:bodyPr wrap="square" lIns="0" tIns="0" rIns="0" bIns="0" anchor="t"/>
+          <a:bodyPr wrap="square" anchor="t" lIns="0" rIns="0" tIns="0" bIns="0"/>
           <a:lstStyle/>
           <a:p>
             <a:pPr algn="l">
@@ -3211,27 +2761,21 @@
                 <a:latin typeface="微软雅黑"/>
                 <a:ea typeface="微软雅黑"/>
               </a:rPr>
-              <a:t>三大领域:共享同一分层体系</a:t>
-            </a:r>
-          </a:p>
-        </p:txBody>
-      </p:sp>
-      <p:sp>
-        <p:nvSpPr>
-          <p:cNvPr id="20" name="Rectangle 18">
-            <a:extLst>
-              <a:ext uri="{FF2B5EF4-FFF2-40B4-BE49-F238E27FC236}">
-                <a16:creationId xmlns:a16="http://schemas.microsoft.com/office/drawing/2014/main" id="{1EF1F9D8-8F0B-4EE2-B52B-04BADE8943A2}"/>
-              </a:ext>
-            </a:extLst>
-          </p:cNvPr>
+              <a:t>四大领域:共享同一分层体系</a:t>
+            </a:r>
+          </a:p>
+        </p:txBody>
+      </p:sp>
+      <p:sp>
+        <p:nvSpPr>
+          <p:cNvPr id="17" name="Rectangle 16"/>
           <p:cNvSpPr/>
           <p:nvPr/>
         </p:nvSpPr>
         <p:spPr>
           <a:xfrm>
-            <a:off x="512064" y="4041648"/>
-            <a:ext cx="3538728" cy="2039112"/>
+            <a:off x="512064" y="2926080"/>
+            <a:ext cx="5367528" cy="1609344"/>
           </a:xfrm>
           <a:prstGeom prst="rect">
             <a:avLst/>
@@ -3261,7 +2805,7 @@
           </a:fontRef>
         </p:style>
         <p:txBody>
-          <a:bodyPr wrap="square" lIns="256032" tIns="128016" rIns="128016" bIns="91440" rtlCol="0" anchor="t"/>
+          <a:bodyPr rtlCol="0" anchor="t" wrap="square" lIns="256032" rIns="128016" tIns="128016" bIns="73152"/>
           <a:lstStyle/>
           <a:p>
             <a:pPr algn="l">
@@ -3269,7 +2813,7 @@
                 <a:spcPct val="100000"/>
               </a:lnSpc>
               <a:spcAft>
-                <a:spcPts val="600"/>
+                <a:spcPts val="500"/>
               </a:spcAft>
             </a:pPr>
             <a:r>
@@ -3280,60 +2824,70 @@
                 <a:latin typeface="微软雅黑"/>
                 <a:ea typeface="微软雅黑"/>
               </a:rPr>
-              <a:t>投放市场</a:t>
+              <a:t>数据基建</a:t>
             </a:r>
           </a:p>
           <a:p>
             <a:pPr algn="l">
               <a:lnSpc>
-                <a:spcPct val="110000"/>
+                <a:spcPct val="100000"/>
               </a:lnSpc>
               <a:spcAft>
-                <a:spcPts val="300"/>
+                <a:spcPts val="6"/>
               </a:spcAft>
             </a:pPr>
             <a:r>
-              <a:rPr sz="900" b="0">
-                <a:solidFill>
-                  <a:srgbClr val="3D3C3A"/>
-                </a:solidFill>
-                <a:latin typeface="微软雅黑"/>
-                <a:ea typeface="微软雅黑"/>
-              </a:rPr>
-              <a:t>人群圈选:风险 × 意愿 × 价值分层输出人群包</a:t>
+              <a:rPr sz="950" b="1">
+                <a:solidFill>
+                  <a:srgbClr val="1F4E79"/>
+                </a:solidFill>
+                <a:latin typeface="微软雅黑"/>
+                <a:ea typeface="微软雅黑"/>
+              </a:rPr>
+              <a:t>流水识别与统一底座</a:t>
             </a:r>
           </a:p>
           <a:p>
             <a:pPr algn="l">
               <a:lnSpc>
-                <a:spcPct val="110000"/>
+                <a:spcPct val="100000"/>
               </a:lnSpc>
               <a:spcAft>
-                <a:spcPts val="300"/>
+                <a:spcPts val="6"/>
               </a:spcAft>
             </a:pPr>
             <a:r>
-              <a:rPr sz="900" b="0">
-                <a:solidFill>
-                  <a:srgbClr val="3D3C3A"/>
-                </a:solidFill>
-                <a:latin typeface="微软雅黑"/>
-                <a:ea typeface="微软雅黑"/>
-              </a:rPr>
-              <a:t>Lead Partner 线索评估</a:t>
+              <a:rPr sz="850" b="1">
+                <a:solidFill>
+                  <a:srgbClr val="D6A000"/>
+                </a:solidFill>
+                <a:latin typeface="微软雅黑"/>
+                <a:ea typeface="微软雅黑"/>
+              </a:rPr>
+              <a:t>★ </a:t>
+            </a:r>
+            <a:r>
+              <a:rPr sz="850" b="1">
+                <a:solidFill>
+                  <a:srgbClr val="1F4E79"/>
+                </a:solidFill>
+                <a:latin typeface="微软雅黑"/>
+                <a:ea typeface="微软雅黑"/>
+              </a:rPr>
+              <a:t>BS-CAT 生产化与并行验证</a:t>
             </a:r>
           </a:p>
           <a:p>
             <a:pPr algn="l">
               <a:lnSpc>
-                <a:spcPct val="110000"/>
+                <a:spcPct val="100000"/>
               </a:lnSpc>
               <a:spcAft>
-                <a:spcPts val="300"/>
+                <a:spcPts val="6"/>
               </a:spcAft>
             </a:pPr>
             <a:r>
-              <a:rPr sz="900" b="1">
+              <a:rPr sz="850" b="1">
                 <a:solidFill>
                   <a:srgbClr val="D6A000"/>
                 </a:solidFill>
@@ -3343,87 +2897,67 @@
               <a:t>★ </a:t>
             </a:r>
             <a:r>
-              <a:rPr sz="900" b="1">
+              <a:rPr sz="850" b="1">
                 <a:solidFill>
                   <a:srgbClr val="1F4E79"/>
                 </a:solidFill>
                 <a:latin typeface="微软雅黑"/>
                 <a:ea typeface="微软雅黑"/>
               </a:rPr>
-              <a:t>投放归因基建</a:t>
+              <a:t>打通 IDP2 全链路:IDA → IDP → BS-CAT → S-CALC → 落库 → 人工复核</a:t>
             </a:r>
           </a:p>
           <a:p>
             <a:pPr algn="l">
               <a:lnSpc>
-                <a:spcPct val="110000"/>
+                <a:spcPct val="100000"/>
               </a:lnSpc>
               <a:spcAft>
-                <a:spcPts val="300"/>
+                <a:spcPts val="6"/>
               </a:spcAft>
             </a:pPr>
             <a:r>
-              <a:rPr sz="900" b="1">
-                <a:solidFill>
-                  <a:srgbClr val="D6A000"/>
-                </a:solidFill>
-                <a:latin typeface="微软雅黑"/>
-                <a:ea typeface="微软雅黑"/>
-              </a:rPr>
-              <a:t>★ </a:t>
-            </a:r>
-            <a:r>
-              <a:rPr sz="900" b="1">
-                <a:solidFill>
-                  <a:srgbClr val="1F4E79"/>
-                </a:solidFill>
-                <a:latin typeface="微软雅黑"/>
-                <a:ea typeface="微软雅黑"/>
-              </a:rPr>
-              <a:t>回传监控基建</a:t>
+              <a:rPr sz="850" b="0">
+                <a:solidFill>
+                  <a:srgbClr val="3D3C3A"/>
+                </a:solidFill>
+                <a:latin typeface="微软雅黑"/>
+                <a:ea typeface="微软雅黑"/>
+              </a:rPr>
+              <a:t>商户 / 类别知识库智能体</a:t>
             </a:r>
           </a:p>
           <a:p>
             <a:pPr algn="l">
               <a:lnSpc>
-                <a:spcPct val="110000"/>
+                <a:spcPct val="100000"/>
               </a:lnSpc>
               <a:spcAft>
-                <a:spcPts val="300"/>
+                <a:spcPts val="6"/>
               </a:spcAft>
             </a:pPr>
             <a:r>
-              <a:rPr sz="900" b="1">
-                <a:solidFill>
-                  <a:srgbClr val="D6A000"/>
-                </a:solidFill>
-                <a:latin typeface="微软雅黑"/>
-                <a:ea typeface="微软雅黑"/>
-              </a:rPr>
-              <a:t>★ </a:t>
-            </a:r>
-            <a:r>
-              <a:rPr sz="900" b="1">
+              <a:rPr sz="950" b="1">
                 <a:solidFill>
                   <a:srgbClr val="1F4E79"/>
                 </a:solidFill>
                 <a:latin typeface="微软雅黑"/>
                 <a:ea typeface="微软雅黑"/>
               </a:rPr>
-              <a:t>边际 CPS 与扩量决策</a:t>
+              <a:t>归因基建</a:t>
             </a:r>
           </a:p>
           <a:p>
             <a:pPr algn="l">
               <a:lnSpc>
-                <a:spcPct val="110000"/>
+                <a:spcPct val="100000"/>
               </a:lnSpc>
               <a:spcAft>
-                <a:spcPts val="300"/>
+                <a:spcPts val="6"/>
               </a:spcAft>
             </a:pPr>
             <a:r>
-              <a:rPr sz="900" b="1">
+              <a:rPr sz="850" b="1">
                 <a:solidFill>
                   <a:srgbClr val="D6A000"/>
                 </a:solidFill>
@@ -3433,34 +2967,58 @@
               <a:t>★ </a:t>
             </a:r>
             <a:r>
-              <a:rPr sz="900" b="1">
+              <a:rPr sz="850" b="1">
                 <a:solidFill>
                   <a:srgbClr val="1F4E79"/>
                 </a:solidFill>
                 <a:latin typeface="微软雅黑"/>
                 <a:ea typeface="微软雅黑"/>
               </a:rPr>
-              <a:t>Campaign 早期质量预测</a:t>
-            </a:r>
-          </a:p>
-        </p:txBody>
-      </p:sp>
-      <p:sp>
-        <p:nvSpPr>
-          <p:cNvPr id="21" name="Rectangle 19">
-            <a:extLst>
-              <a:ext uri="{FF2B5EF4-FFF2-40B4-BE49-F238E27FC236}">
-                <a16:creationId xmlns:a16="http://schemas.microsoft.com/office/drawing/2014/main" id="{92B0A974-6BD4-4737-8595-CED5933C53BD}"/>
-              </a:ext>
-            </a:extLst>
-          </p:cNvPr>
+              <a:t>投放归因与回传:渠道/Campaign overlap、Web 追踪、回传质量监控</a:t>
+            </a:r>
+          </a:p>
+          <a:p>
+            <a:pPr algn="l">
+              <a:lnSpc>
+                <a:spcPct val="100000"/>
+              </a:lnSpc>
+              <a:spcAft>
+                <a:spcPts val="6"/>
+              </a:spcAft>
+            </a:pPr>
+            <a:r>
+              <a:rPr sz="850" b="1">
+                <a:solidFill>
+                  <a:srgbClr val="D6A000"/>
+                </a:solidFill>
+                <a:latin typeface="微软雅黑"/>
+                <a:ea typeface="微软雅黑"/>
+              </a:rPr>
+              <a:t>★ </a:t>
+            </a:r>
+            <a:r>
+              <a:rPr sz="850" b="1">
+                <a:solidFill>
+                  <a:srgbClr val="1F4E79"/>
+                </a:solidFill>
+                <a:latin typeface="微软雅黑"/>
+                <a:ea typeface="微软雅黑"/>
+              </a:rPr>
+              <a:t>触达归因与效果监控:短信/邮件/Push/APP 曝光 → 放款</a:t>
+            </a:r>
+          </a:p>
+        </p:txBody>
+      </p:sp>
+      <p:sp>
+        <p:nvSpPr>
+          <p:cNvPr id="18" name="Rectangle 17"/>
           <p:cNvSpPr/>
           <p:nvPr/>
         </p:nvSpPr>
         <p:spPr>
           <a:xfrm>
-            <a:off x="512064" y="4041648"/>
-            <a:ext cx="3538728" cy="54864"/>
+            <a:off x="512064" y="2926080"/>
+            <a:ext cx="5367528" cy="54864"/>
           </a:xfrm>
           <a:prstGeom prst="rect">
             <a:avLst/>
@@ -3492,25 +3050,18 @@
           <a:lstStyle/>
           <a:p>
             <a:pPr algn="ctr"/>
-            <a:endParaRPr/>
-          </a:p>
-        </p:txBody>
-      </p:sp>
-      <p:sp>
-        <p:nvSpPr>
-          <p:cNvPr id="22" name="Rectangle 20">
-            <a:extLst>
-              <a:ext uri="{FF2B5EF4-FFF2-40B4-BE49-F238E27FC236}">
-                <a16:creationId xmlns:a16="http://schemas.microsoft.com/office/drawing/2014/main" id="{0A2B91B9-D84D-4E60-98BD-9AD6CD657208}"/>
-              </a:ext>
-            </a:extLst>
-          </p:cNvPr>
+          </a:p>
+        </p:txBody>
+      </p:sp>
+      <p:sp>
+        <p:nvSpPr>
+          <p:cNvPr id="19" name="Rectangle 18"/>
           <p:cNvSpPr/>
           <p:nvPr/>
         </p:nvSpPr>
         <p:spPr>
           <a:xfrm>
-            <a:off x="658368" y="4206240"/>
+            <a:off x="658368" y="3072384"/>
             <a:ext cx="54864" cy="182880"/>
           </a:xfrm>
           <a:prstGeom prst="rect">
@@ -3543,26 +3094,19 @@
           <a:lstStyle/>
           <a:p>
             <a:pPr algn="ctr"/>
-            <a:endParaRPr/>
-          </a:p>
-        </p:txBody>
-      </p:sp>
-      <p:sp>
-        <p:nvSpPr>
-          <p:cNvPr id="23" name="Rectangle 21">
-            <a:extLst>
-              <a:ext uri="{FF2B5EF4-FFF2-40B4-BE49-F238E27FC236}">
-                <a16:creationId xmlns:a16="http://schemas.microsoft.com/office/drawing/2014/main" id="{EDDFBB8C-8F9A-45A2-A926-D8FB6CB97D39}"/>
-              </a:ext>
-            </a:extLst>
-          </p:cNvPr>
+          </a:p>
+        </p:txBody>
+      </p:sp>
+      <p:sp>
+        <p:nvSpPr>
+          <p:cNvPr id="20" name="Rectangle 19"/>
           <p:cNvSpPr/>
           <p:nvPr/>
         </p:nvSpPr>
         <p:spPr>
           <a:xfrm>
-            <a:off x="4197096" y="4041648"/>
-            <a:ext cx="3538728" cy="2039112"/>
+            <a:off x="6025896" y="2926080"/>
+            <a:ext cx="5367528" cy="1609344"/>
           </a:xfrm>
           <a:prstGeom prst="rect">
             <a:avLst/>
@@ -3592,7 +3136,7 @@
           </a:fontRef>
         </p:style>
         <p:txBody>
-          <a:bodyPr wrap="square" lIns="256032" tIns="128016" rIns="128016" bIns="91440" rtlCol="0" anchor="t"/>
+          <a:bodyPr rtlCol="0" anchor="t" wrap="square" lIns="256032" rIns="128016" tIns="128016" bIns="73152"/>
           <a:lstStyle/>
           <a:p>
             <a:pPr algn="l">
@@ -3600,7 +3144,7 @@
                 <a:spcPct val="100000"/>
               </a:lnSpc>
               <a:spcAft>
-                <a:spcPts val="600"/>
+                <a:spcPts val="500"/>
               </a:spcAft>
             </a:pPr>
             <a:r>
@@ -3611,267 +3155,111 @@
                 <a:latin typeface="微软雅黑"/>
                 <a:ea typeface="微软雅黑"/>
               </a:rPr>
-              <a:t>用户运营</a:t>
+              <a:t>投放市场</a:t>
             </a:r>
           </a:p>
           <a:p>
             <a:pPr algn="l">
               <a:lnSpc>
-                <a:spcPct val="110000"/>
+                <a:spcPct val="100000"/>
               </a:lnSpc>
               <a:spcAft>
-                <a:spcPts val="300"/>
+                <a:spcPts val="12"/>
               </a:spcAft>
             </a:pPr>
             <a:r>
-              <a:rPr sz="900" b="0">
+              <a:rPr sz="850" b="0">
                 <a:solidFill>
                   <a:srgbClr val="3D3C3A"/>
                 </a:solidFill>
                 <a:latin typeface="微软雅黑"/>
                 <a:ea typeface="微软雅黑"/>
               </a:rPr>
-              <a:t>盈利性评估</a:t>
+              <a:t>人群圈选:风险 × 意愿 × 价值分层输出人群包</a:t>
             </a:r>
           </a:p>
           <a:p>
             <a:pPr algn="l">
               <a:lnSpc>
-                <a:spcPct val="110000"/>
+                <a:spcPct val="100000"/>
               </a:lnSpc>
               <a:spcAft>
-                <a:spcPts val="300"/>
+                <a:spcPts val="12"/>
               </a:spcAft>
             </a:pPr>
             <a:r>
-              <a:rPr sz="900" b="0">
+              <a:rPr sz="850" b="0">
                 <a:solidFill>
                   <a:srgbClr val="3D3C3A"/>
                 </a:solidFill>
                 <a:latin typeface="微软雅黑"/>
                 <a:ea typeface="微软雅黑"/>
               </a:rPr>
-              <a:t>自动寻优定价</a:t>
+              <a:t>Lead Partner 线索评估</a:t>
             </a:r>
           </a:p>
           <a:p>
             <a:pPr algn="l">
               <a:lnSpc>
-                <a:spcPct val="110000"/>
+                <a:spcPct val="100000"/>
               </a:lnSpc>
               <a:spcAft>
-                <a:spcPts val="300"/>
+                <a:spcPts val="12"/>
               </a:spcAft>
             </a:pPr>
             <a:r>
-              <a:rPr sz="900" b="0">
-                <a:solidFill>
-                  <a:srgbClr val="3D3C3A"/>
-                </a:solidFill>
-                <a:latin typeface="微软雅黑"/>
-                <a:ea typeface="微软雅黑"/>
-              </a:rPr>
-              <a:t>Fundo Score</a:t>
+              <a:rPr sz="850" b="1">
+                <a:solidFill>
+                  <a:srgbClr val="D6A000"/>
+                </a:solidFill>
+                <a:latin typeface="微软雅黑"/>
+                <a:ea typeface="微软雅黑"/>
+              </a:rPr>
+              <a:t>★ </a:t>
+            </a:r>
+            <a:r>
+              <a:rPr sz="850" b="1">
+                <a:solidFill>
+                  <a:srgbClr val="1F4E79"/>
+                </a:solidFill>
+                <a:latin typeface="微软雅黑"/>
+                <a:ea typeface="微软雅黑"/>
+              </a:rPr>
+              <a:t>边际 CPS 与扩量决策</a:t>
             </a:r>
           </a:p>
           <a:p>
             <a:pPr algn="l">
               <a:lnSpc>
-                <a:spcPct val="110000"/>
+                <a:spcPct val="100000"/>
               </a:lnSpc>
               <a:spcAft>
-                <a:spcPts val="300"/>
+                <a:spcPts val="12"/>
               </a:spcAft>
             </a:pPr>
             <a:r>
-              <a:rPr sz="900" b="1">
-                <a:solidFill>
-                  <a:srgbClr val="D6A000"/>
-                </a:solidFill>
-                <a:latin typeface="微软雅黑"/>
-                <a:ea typeface="微软雅黑"/>
-              </a:rPr>
-              <a:t>★ </a:t>
-            </a:r>
-            <a:r>
-              <a:rPr sz="900" b="1">
-                <a:solidFill>
-                  <a:srgbClr val="1F4E79"/>
-                </a:solidFill>
-                <a:latin typeface="微软雅黑"/>
-                <a:ea typeface="微软雅黑"/>
-              </a:rPr>
-              <a:t>触达归因与效果监控</a:t>
-            </a:r>
-          </a:p>
-          <a:p>
-            <a:pPr algn="l">
-              <a:lnSpc>
-                <a:spcPct val="110000"/>
-              </a:lnSpc>
-              <a:spcAft>
-                <a:spcPts val="300"/>
-              </a:spcAft>
-            </a:pPr>
-            <a:r>
-              <a:rPr sz="900" b="1">
-                <a:solidFill>
-                  <a:srgbClr val="D6A000"/>
-                </a:solidFill>
-                <a:latin typeface="微软雅黑"/>
-                <a:ea typeface="微软雅黑"/>
-              </a:rPr>
-              <a:t>★ </a:t>
-            </a:r>
-            <a:r>
-              <a:rPr sz="900" b="1">
-                <a:solidFill>
-                  <a:srgbClr val="1F4E79"/>
-                </a:solidFill>
-                <a:latin typeface="微软雅黑"/>
-                <a:ea typeface="微软雅黑"/>
-              </a:rPr>
-              <a:t>触达策略与人群编排</a:t>
-            </a:r>
-          </a:p>
-          <a:p>
-            <a:pPr algn="l">
-              <a:lnSpc>
-                <a:spcPct val="110000"/>
-              </a:lnSpc>
-              <a:spcAft>
-                <a:spcPts val="300"/>
-              </a:spcAft>
-            </a:pPr>
-            <a:r>
-              <a:rPr sz="900" b="1">
-                <a:solidFill>
-                  <a:srgbClr val="D6A000"/>
-                </a:solidFill>
-                <a:latin typeface="微软雅黑"/>
-                <a:ea typeface="微软雅黑"/>
-              </a:rPr>
-              <a:t>★ </a:t>
-            </a:r>
-            <a:r>
-              <a:rPr sz="900" b="1">
-                <a:solidFill>
-                  <a:srgbClr val="1F4E79"/>
-                </a:solidFill>
-                <a:latin typeface="微软雅黑"/>
-                <a:ea typeface="微软雅黑"/>
-              </a:rPr>
-              <a:t>运营监控 AI 智能体</a:t>
-            </a:r>
-          </a:p>
-          <a:p>
-            <a:pPr algn="l">
-              <a:lnSpc>
-                <a:spcPct val="110000"/>
-              </a:lnSpc>
-              <a:spcAft>
-                <a:spcPts val="300"/>
-              </a:spcAft>
-            </a:pPr>
-            <a:r>
-              <a:rPr sz="900" b="1">
-                <a:solidFill>
-                  <a:srgbClr val="D6A000"/>
-                </a:solidFill>
-                <a:latin typeface="微软雅黑"/>
-                <a:ea typeface="微软雅黑"/>
-              </a:rPr>
-              <a:t>★ </a:t>
-            </a:r>
-            <a:r>
-              <a:rPr sz="900" b="1">
-                <a:solidFill>
-                  <a:srgbClr val="1F4E79"/>
-                </a:solidFill>
-                <a:latin typeface="微软雅黑"/>
-                <a:ea typeface="微软雅黑"/>
-              </a:rPr>
-              <a:t>结清客户复贷召回</a:t>
-            </a:r>
-          </a:p>
-          <a:p>
-            <a:pPr algn="l">
-              <a:lnSpc>
-                <a:spcPct val="110000"/>
-              </a:lnSpc>
-              <a:spcAft>
-                <a:spcPts val="300"/>
-              </a:spcAft>
-            </a:pPr>
-            <a:r>
-              <a:rPr sz="900" b="1">
-                <a:solidFill>
-                  <a:srgbClr val="D6A000"/>
-                </a:solidFill>
-                <a:latin typeface="微软雅黑"/>
-                <a:ea typeface="微软雅黑"/>
-              </a:rPr>
-              <a:t>★ </a:t>
-            </a:r>
-            <a:r>
-              <a:rPr sz="900" b="1">
-                <a:solidFill>
-                  <a:srgbClr val="1F4E79"/>
-                </a:solidFill>
-                <a:latin typeface="微软雅黑"/>
-                <a:ea typeface="微软雅黑"/>
-              </a:rPr>
-              <a:t>沉睡客户识别唤醒</a:t>
-            </a:r>
-          </a:p>
-          <a:p>
-            <a:pPr algn="l">
-              <a:lnSpc>
-                <a:spcPct val="110000"/>
-              </a:lnSpc>
-              <a:spcAft>
-                <a:spcPts val="300"/>
-              </a:spcAft>
-            </a:pPr>
-            <a:r>
-              <a:rPr sz="900" b="1">
-                <a:solidFill>
-                  <a:srgbClr val="D6A000"/>
-                </a:solidFill>
-                <a:latin typeface="微软雅黑"/>
-                <a:ea typeface="微软雅黑"/>
-              </a:rPr>
-              <a:t>★ </a:t>
-            </a:r>
-            <a:r>
-              <a:rPr sz="900" b="1">
-                <a:solidFill>
-                  <a:srgbClr val="1F4E79"/>
-                </a:solidFill>
-                <a:latin typeface="微软雅黑"/>
-                <a:ea typeface="微软雅黑"/>
-              </a:rPr>
-              <a:t>竞品经营洞察 AI 智能体</a:t>
-            </a:r>
-          </a:p>
-        </p:txBody>
-      </p:sp>
-      <p:sp>
-        <p:nvSpPr>
-          <p:cNvPr id="24" name="Rectangle 22">
-            <a:extLst>
-              <a:ext uri="{FF2B5EF4-FFF2-40B4-BE49-F238E27FC236}">
-                <a16:creationId xmlns:a16="http://schemas.microsoft.com/office/drawing/2014/main" id="{E76DDCA5-29A7-49BB-9E9C-CDFAA8E06709}"/>
-              </a:ext>
-            </a:extLst>
-          </p:cNvPr>
+              <a:rPr sz="850" b="0">
+                <a:solidFill>
+                  <a:srgbClr val="3D3C3A"/>
+                </a:solidFill>
+                <a:latin typeface="微软雅黑"/>
+                <a:ea typeface="微软雅黑"/>
+              </a:rPr>
+              <a:t>Campaign 早期质量预测</a:t>
+            </a:r>
+          </a:p>
+        </p:txBody>
+      </p:sp>
+      <p:sp>
+        <p:nvSpPr>
+          <p:cNvPr id="21" name="Rectangle 20"/>
           <p:cNvSpPr/>
           <p:nvPr/>
         </p:nvSpPr>
         <p:spPr>
           <a:xfrm>
-            <a:off x="4197096" y="4041648"/>
-            <a:ext cx="3538728" cy="54864"/>
+            <a:off x="6025896" y="2926080"/>
+            <a:ext cx="5367528" cy="54864"/>
           </a:xfrm>
           <a:prstGeom prst="rect">
             <a:avLst/>
@@ -3903,25 +3291,18 @@
           <a:lstStyle/>
           <a:p>
             <a:pPr algn="ctr"/>
-            <a:endParaRPr/>
-          </a:p>
-        </p:txBody>
-      </p:sp>
-      <p:sp>
-        <p:nvSpPr>
-          <p:cNvPr id="25" name="Rectangle 23">
-            <a:extLst>
-              <a:ext uri="{FF2B5EF4-FFF2-40B4-BE49-F238E27FC236}">
-                <a16:creationId xmlns:a16="http://schemas.microsoft.com/office/drawing/2014/main" id="{3A8BF65A-0E95-4A9C-A1C4-7270AA902213}"/>
-              </a:ext>
-            </a:extLst>
-          </p:cNvPr>
+          </a:p>
+        </p:txBody>
+      </p:sp>
+      <p:sp>
+        <p:nvSpPr>
+          <p:cNvPr id="22" name="Rectangle 21"/>
           <p:cNvSpPr/>
           <p:nvPr/>
         </p:nvSpPr>
         <p:spPr>
           <a:xfrm>
-            <a:off x="4343400" y="4206240"/>
+            <a:off x="6172200" y="3072384"/>
             <a:ext cx="54864" cy="182880"/>
           </a:xfrm>
           <a:prstGeom prst="rect">
@@ -3954,26 +3335,19 @@
           <a:lstStyle/>
           <a:p>
             <a:pPr algn="ctr"/>
-            <a:endParaRPr/>
-          </a:p>
-        </p:txBody>
-      </p:sp>
-      <p:sp>
-        <p:nvSpPr>
-          <p:cNvPr id="26" name="Rectangle 24">
-            <a:extLst>
-              <a:ext uri="{FF2B5EF4-FFF2-40B4-BE49-F238E27FC236}">
-                <a16:creationId xmlns:a16="http://schemas.microsoft.com/office/drawing/2014/main" id="{BA730DCE-496A-4811-A15E-8FC2476C5A9C}"/>
-              </a:ext>
-            </a:extLst>
-          </p:cNvPr>
+          </a:p>
+        </p:txBody>
+      </p:sp>
+      <p:sp>
+        <p:nvSpPr>
+          <p:cNvPr id="23" name="Rectangle 22"/>
           <p:cNvSpPr/>
           <p:nvPr/>
         </p:nvSpPr>
         <p:spPr>
           <a:xfrm>
-            <a:off x="7882128" y="4041648"/>
-            <a:ext cx="3538728" cy="2039112"/>
+            <a:off x="512064" y="4626864"/>
+            <a:ext cx="5367528" cy="1609344"/>
           </a:xfrm>
           <a:prstGeom prst="rect">
             <a:avLst/>
@@ -4003,7 +3377,7 @@
           </a:fontRef>
         </p:style>
         <p:txBody>
-          <a:bodyPr wrap="square" lIns="256032" tIns="128016" rIns="128016" bIns="91440" rtlCol="0" anchor="t"/>
+          <a:bodyPr rtlCol="0" anchor="t" wrap="square" lIns="256032" rIns="128016" tIns="128016" bIns="73152"/>
           <a:lstStyle/>
           <a:p>
             <a:pPr algn="l">
@@ -4011,7 +3385,7 @@
                 <a:spcPct val="100000"/>
               </a:lnSpc>
               <a:spcAft>
-                <a:spcPts val="600"/>
+                <a:spcPts val="500"/>
               </a:spcAft>
             </a:pPr>
             <a:r>
@@ -4022,50 +3396,120 @@
                 <a:latin typeface="微软雅黑"/>
                 <a:ea typeface="微软雅黑"/>
               </a:rPr>
-              <a:t>风险管理</a:t>
+              <a:t>用户运营</a:t>
             </a:r>
           </a:p>
           <a:p>
             <a:pPr algn="l">
               <a:lnSpc>
-                <a:spcPct val="110000"/>
+                <a:spcPct val="100000"/>
               </a:lnSpc>
               <a:spcAft>
-                <a:spcPts val="300"/>
+                <a:spcPts val="0"/>
               </a:spcAft>
             </a:pPr>
             <a:r>
-              <a:rPr sz="900" b="1">
-                <a:solidFill>
-                  <a:srgbClr val="D6A000"/>
-                </a:solidFill>
-                <a:latin typeface="微软雅黑"/>
-                <a:ea typeface="微软雅黑"/>
-              </a:rPr>
-              <a:t>★ </a:t>
-            </a:r>
-            <a:r>
-              <a:rPr sz="900" b="1">
+              <a:rPr sz="950" b="1">
                 <a:solidFill>
                   <a:srgbClr val="1F4E79"/>
                 </a:solidFill>
                 <a:latin typeface="微软雅黑"/>
                 <a:ea typeface="微软雅黑"/>
               </a:rPr>
-              <a:t>新老客 PD 模型迭代:增强头尾区分,平衡通过率、客群结构与风险</a:t>
+              <a:t>客户价值与定价</a:t>
             </a:r>
           </a:p>
           <a:p>
             <a:pPr algn="l">
               <a:lnSpc>
-                <a:spcPct val="110000"/>
+                <a:spcPct val="100000"/>
               </a:lnSpc>
               <a:spcAft>
-                <a:spcPts val="300"/>
+                <a:spcPts val="0"/>
               </a:spcAft>
             </a:pPr>
             <a:r>
-              <a:rPr sz="900" b="1">
+              <a:rPr sz="850" b="0">
+                <a:solidFill>
+                  <a:srgbClr val="3D3C3A"/>
+                </a:solidFill>
+                <a:latin typeface="微软雅黑"/>
+                <a:ea typeface="微软雅黑"/>
+              </a:rPr>
+              <a:t>盈利性评估</a:t>
+            </a:r>
+          </a:p>
+          <a:p>
+            <a:pPr algn="l">
+              <a:lnSpc>
+                <a:spcPct val="100000"/>
+              </a:lnSpc>
+              <a:spcAft>
+                <a:spcPts val="0"/>
+              </a:spcAft>
+            </a:pPr>
+            <a:r>
+              <a:rPr sz="850" b="0">
+                <a:solidFill>
+                  <a:srgbClr val="3D3C3A"/>
+                </a:solidFill>
+                <a:latin typeface="微软雅黑"/>
+                <a:ea typeface="微软雅黑"/>
+              </a:rPr>
+              <a:t>自动寻优定价</a:t>
+            </a:r>
+          </a:p>
+          <a:p>
+            <a:pPr algn="l">
+              <a:lnSpc>
+                <a:spcPct val="100000"/>
+              </a:lnSpc>
+              <a:spcAft>
+                <a:spcPts val="0"/>
+              </a:spcAft>
+            </a:pPr>
+            <a:r>
+              <a:rPr sz="850" b="0">
+                <a:solidFill>
+                  <a:srgbClr val="3D3C3A"/>
+                </a:solidFill>
+                <a:latin typeface="微软雅黑"/>
+                <a:ea typeface="微软雅黑"/>
+              </a:rPr>
+              <a:t>Fundo Score</a:t>
+            </a:r>
+          </a:p>
+          <a:p>
+            <a:pPr algn="l">
+              <a:lnSpc>
+                <a:spcPct val="100000"/>
+              </a:lnSpc>
+              <a:spcAft>
+                <a:spcPts val="0"/>
+              </a:spcAft>
+            </a:pPr>
+            <a:r>
+              <a:rPr sz="950" b="1">
+                <a:solidFill>
+                  <a:srgbClr val="1F4E79"/>
+                </a:solidFill>
+                <a:latin typeface="微软雅黑"/>
+                <a:ea typeface="微软雅黑"/>
+              </a:rPr>
+              <a:t>触达与智能经营</a:t>
+            </a:r>
+          </a:p>
+          <a:p>
+            <a:pPr algn="l">
+              <a:lnSpc>
+                <a:spcPct val="100000"/>
+              </a:lnSpc>
+              <a:spcAft>
+                <a:spcPts val="0"/>
+              </a:spcAft>
+            </a:pPr>
+            <a:r>
+              <a:rPr sz="850" b="1">
                 <a:solidFill>
                   <a:srgbClr val="D6A000"/>
                 </a:solidFill>
@@ -4075,34 +3519,118 @@
               <a:t>★ </a:t>
             </a:r>
             <a:r>
-              <a:rPr sz="900" b="1">
+              <a:rPr sz="850" b="1">
                 <a:solidFill>
                   <a:srgbClr val="1F4E79"/>
                 </a:solidFill>
                 <a:latin typeface="微软雅黑"/>
                 <a:ea typeface="微软雅黑"/>
               </a:rPr>
-              <a:t>风险 × 价值联合额度策略:多模型交叉分箱自动寻优,输出最优额度提升客群与产品承接矩阵标签</a:t>
-            </a:r>
-          </a:p>
-        </p:txBody>
-      </p:sp>
-      <p:sp>
-        <p:nvSpPr>
-          <p:cNvPr id="27" name="Rectangle 25">
-            <a:extLst>
-              <a:ext uri="{FF2B5EF4-FFF2-40B4-BE49-F238E27FC236}">
-                <a16:creationId xmlns:a16="http://schemas.microsoft.com/office/drawing/2014/main" id="{EC39853C-2920-480C-9EF2-C38B227ED0A5}"/>
-              </a:ext>
-            </a:extLst>
-          </p:cNvPr>
+              <a:t>触达策略与人群编排</a:t>
+            </a:r>
+          </a:p>
+          <a:p>
+            <a:pPr algn="l">
+              <a:lnSpc>
+                <a:spcPct val="100000"/>
+              </a:lnSpc>
+              <a:spcAft>
+                <a:spcPts val="0"/>
+              </a:spcAft>
+            </a:pPr>
+            <a:r>
+              <a:rPr sz="850" b="0">
+                <a:solidFill>
+                  <a:srgbClr val="3D3C3A"/>
+                </a:solidFill>
+                <a:latin typeface="微软雅黑"/>
+                <a:ea typeface="微软雅黑"/>
+              </a:rPr>
+              <a:t>运营监控 AI 智能体</a:t>
+            </a:r>
+          </a:p>
+          <a:p>
+            <a:pPr algn="l">
+              <a:lnSpc>
+                <a:spcPct val="100000"/>
+              </a:lnSpc>
+              <a:spcAft>
+                <a:spcPts val="0"/>
+              </a:spcAft>
+            </a:pPr>
+            <a:r>
+              <a:rPr sz="850" b="1">
+                <a:solidFill>
+                  <a:srgbClr val="D6A000"/>
+                </a:solidFill>
+                <a:latin typeface="微软雅黑"/>
+                <a:ea typeface="微软雅黑"/>
+              </a:rPr>
+              <a:t>★ </a:t>
+            </a:r>
+            <a:r>
+              <a:rPr sz="850" b="1">
+                <a:solidFill>
+                  <a:srgbClr val="1F4E79"/>
+                </a:solidFill>
+                <a:latin typeface="微软雅黑"/>
+                <a:ea typeface="微软雅黑"/>
+              </a:rPr>
+              <a:t>结清客户复贷召回</a:t>
+            </a:r>
+          </a:p>
+          <a:p>
+            <a:pPr algn="l">
+              <a:lnSpc>
+                <a:spcPct val="100000"/>
+              </a:lnSpc>
+              <a:spcAft>
+                <a:spcPts val="0"/>
+              </a:spcAft>
+            </a:pPr>
+            <a:r>
+              <a:rPr sz="850" b="0">
+                <a:solidFill>
+                  <a:srgbClr val="3D3C3A"/>
+                </a:solidFill>
+                <a:latin typeface="微软雅黑"/>
+                <a:ea typeface="微软雅黑"/>
+              </a:rPr>
+              <a:t>沉睡客户识别唤醒</a:t>
+            </a:r>
+          </a:p>
+          <a:p>
+            <a:pPr algn="l">
+              <a:lnSpc>
+                <a:spcPct val="100000"/>
+              </a:lnSpc>
+              <a:spcAft>
+                <a:spcPts val="0"/>
+              </a:spcAft>
+            </a:pPr>
+            <a:r>
+              <a:rPr sz="850" b="0">
+                <a:solidFill>
+                  <a:srgbClr val="3D3C3A"/>
+                </a:solidFill>
+                <a:latin typeface="微软雅黑"/>
+                <a:ea typeface="微软雅黑"/>
+              </a:rPr>
+              <a:t>竞品经营洞察 AI 智能体</a:t>
+            </a:r>
+          </a:p>
+        </p:txBody>
+      </p:sp>
+      <p:sp>
+        <p:nvSpPr>
+          <p:cNvPr id="24" name="Rectangle 23"/>
           <p:cNvSpPr/>
           <p:nvPr/>
         </p:nvSpPr>
         <p:spPr>
           <a:xfrm>
-            <a:off x="7882128" y="4041648"/>
-            <a:ext cx="3538728" cy="54864"/>
+            <a:off x="512064" y="4626864"/>
+            <a:ext cx="5367528" cy="54864"/>
           </a:xfrm>
           <a:prstGeom prst="rect">
             <a:avLst/>
@@ -4134,25 +3662,18 @@
           <a:lstStyle/>
           <a:p>
             <a:pPr algn="ctr"/>
-            <a:endParaRPr/>
-          </a:p>
-        </p:txBody>
-      </p:sp>
-      <p:sp>
-        <p:nvSpPr>
-          <p:cNvPr id="28" name="Rectangle 26">
-            <a:extLst>
-              <a:ext uri="{FF2B5EF4-FFF2-40B4-BE49-F238E27FC236}">
-                <a16:creationId xmlns:a16="http://schemas.microsoft.com/office/drawing/2014/main" id="{6D533152-AB68-4116-9B63-B0AC72A41611}"/>
-              </a:ext>
-            </a:extLst>
-          </p:cNvPr>
+          </a:p>
+        </p:txBody>
+      </p:sp>
+      <p:sp>
+        <p:nvSpPr>
+          <p:cNvPr id="25" name="Rectangle 24"/>
           <p:cNvSpPr/>
           <p:nvPr/>
         </p:nvSpPr>
         <p:spPr>
           <a:xfrm>
-            <a:off x="8028432" y="4206240"/>
+            <a:off x="658368" y="4773168"/>
             <a:ext cx="54864" cy="182880"/>
           </a:xfrm>
           <a:prstGeom prst="rect">
@@ -4185,35 +3706,30 @@
           <a:lstStyle/>
           <a:p>
             <a:pPr algn="ctr"/>
-            <a:endParaRPr/>
-          </a:p>
-        </p:txBody>
-      </p:sp>
-      <p:sp>
-        <p:nvSpPr>
-          <p:cNvPr id="29" name="Rectangle 27">
-            <a:extLst>
-              <a:ext uri="{FF2B5EF4-FFF2-40B4-BE49-F238E27FC236}">
-                <a16:creationId xmlns:a16="http://schemas.microsoft.com/office/drawing/2014/main" id="{C2AA76F5-3990-48BF-BB5D-0439F409A254}"/>
-              </a:ext>
-            </a:extLst>
-          </p:cNvPr>
+          </a:p>
+        </p:txBody>
+      </p:sp>
+      <p:sp>
+        <p:nvSpPr>
+          <p:cNvPr id="26" name="Rectangle 25"/>
           <p:cNvSpPr/>
           <p:nvPr/>
         </p:nvSpPr>
         <p:spPr>
           <a:xfrm>
-            <a:off x="512064" y="6236208"/>
-            <a:ext cx="10899648" cy="384048"/>
-          </a:xfrm>
-          <a:prstGeom prst="rect">
-            <a:avLst/>
-          </a:prstGeom>
-          <a:solidFill>
-            <a:srgbClr val="FAF3E0"/>
-          </a:solidFill>
-          <a:ln>
-            <a:noFill/>
+            <a:off x="6025896" y="4626864"/>
+            <a:ext cx="5367528" cy="1609344"/>
+          </a:xfrm>
+          <a:prstGeom prst="rect">
+            <a:avLst/>
+          </a:prstGeom>
+          <a:solidFill>
+            <a:srgbClr val="FFFFFF"/>
+          </a:solidFill>
+          <a:ln w="19050">
+            <a:solidFill>
+              <a:srgbClr val="D6D6D6"/>
+            </a:solidFill>
           </a:ln>
           <a:effectLst/>
         </p:spPr>
@@ -4232,7 +3748,216 @@
           </a:fontRef>
         </p:style>
         <p:txBody>
-          <a:bodyPr wrap="square" lIns="219456" tIns="18288" rIns="128016" bIns="18288" rtlCol="0" anchor="ctr"/>
+          <a:bodyPr rtlCol="0" anchor="t" wrap="square" lIns="256032" rIns="128016" tIns="128016" bIns="73152"/>
+          <a:lstStyle/>
+          <a:p>
+            <a:pPr algn="l">
+              <a:lnSpc>
+                <a:spcPct val="100000"/>
+              </a:lnSpc>
+              <a:spcAft>
+                <a:spcPts val="500"/>
+              </a:spcAft>
+            </a:pPr>
+            <a:r>
+              <a:rPr sz="1200" b="1">
+                <a:solidFill>
+                  <a:srgbClr val="0A0A0A"/>
+                </a:solidFill>
+                <a:latin typeface="微软雅黑"/>
+                <a:ea typeface="微软雅黑"/>
+              </a:rPr>
+              <a:t>风险管理</a:t>
+            </a:r>
+          </a:p>
+          <a:p>
+            <a:pPr algn="l">
+              <a:lnSpc>
+                <a:spcPct val="100000"/>
+              </a:lnSpc>
+              <a:spcAft>
+                <a:spcPts val="12"/>
+              </a:spcAft>
+            </a:pPr>
+            <a:r>
+              <a:rPr sz="850" b="1">
+                <a:solidFill>
+                  <a:srgbClr val="D6A000"/>
+                </a:solidFill>
+                <a:latin typeface="微软雅黑"/>
+                <a:ea typeface="微软雅黑"/>
+              </a:rPr>
+              <a:t>★ </a:t>
+            </a:r>
+            <a:r>
+              <a:rPr sz="850" b="1">
+                <a:solidFill>
+                  <a:srgbClr val="1F4E79"/>
+                </a:solidFill>
+                <a:latin typeface="微软雅黑"/>
+                <a:ea typeface="微软雅黑"/>
+              </a:rPr>
+              <a:t>新老客 PD 模型迭代:增强头尾区分,平衡通过率与风险</a:t>
+            </a:r>
+          </a:p>
+          <a:p>
+            <a:pPr algn="l">
+              <a:lnSpc>
+                <a:spcPct val="100000"/>
+              </a:lnSpc>
+              <a:spcAft>
+                <a:spcPts val="12"/>
+              </a:spcAft>
+            </a:pPr>
+            <a:r>
+              <a:rPr sz="850" b="1">
+                <a:solidFill>
+                  <a:srgbClr val="D6A000"/>
+                </a:solidFill>
+                <a:latin typeface="微软雅黑"/>
+                <a:ea typeface="微软雅黑"/>
+              </a:rPr>
+              <a:t>★ </a:t>
+            </a:r>
+            <a:r>
+              <a:rPr sz="850" b="1">
+                <a:solidFill>
+                  <a:srgbClr val="1F4E79"/>
+                </a:solidFill>
+                <a:latin typeface="微软雅黑"/>
+                <a:ea typeface="微软雅黑"/>
+              </a:rPr>
+              <a:t>风险 × 价值联合额度策略:交叉分箱自动寻优,输出最优额度与承接标签</a:t>
+            </a:r>
+          </a:p>
+        </p:txBody>
+      </p:sp>
+      <p:sp>
+        <p:nvSpPr>
+          <p:cNvPr id="27" name="Rectangle 26"/>
+          <p:cNvSpPr/>
+          <p:nvPr/>
+        </p:nvSpPr>
+        <p:spPr>
+          <a:xfrm>
+            <a:off x="6025896" y="4626864"/>
+            <a:ext cx="5367528" cy="54864"/>
+          </a:xfrm>
+          <a:prstGeom prst="rect">
+            <a:avLst/>
+          </a:prstGeom>
+          <a:solidFill>
+            <a:srgbClr val="1F4E79"/>
+          </a:solidFill>
+          <a:ln>
+            <a:noFill/>
+          </a:ln>
+          <a:effectLst/>
+        </p:spPr>
+        <p:style>
+          <a:lnRef idx="1">
+            <a:schemeClr val="accent1"/>
+          </a:lnRef>
+          <a:fillRef idx="3">
+            <a:schemeClr val="accent1"/>
+          </a:fillRef>
+          <a:effectRef idx="2">
+            <a:schemeClr val="accent1"/>
+          </a:effectRef>
+          <a:fontRef idx="minor">
+            <a:schemeClr val="lt1"/>
+          </a:fontRef>
+        </p:style>
+        <p:txBody>
+          <a:bodyPr rtlCol="0" anchor="ctr"/>
+          <a:lstStyle/>
+          <a:p>
+            <a:pPr algn="ctr"/>
+          </a:p>
+        </p:txBody>
+      </p:sp>
+      <p:sp>
+        <p:nvSpPr>
+          <p:cNvPr id="28" name="Rectangle 27"/>
+          <p:cNvSpPr/>
+          <p:nvPr/>
+        </p:nvSpPr>
+        <p:spPr>
+          <a:xfrm>
+            <a:off x="6172200" y="4773168"/>
+            <a:ext cx="54864" cy="182880"/>
+          </a:xfrm>
+          <a:prstGeom prst="rect">
+            <a:avLst/>
+          </a:prstGeom>
+          <a:solidFill>
+            <a:srgbClr val="D6A000"/>
+          </a:solidFill>
+          <a:ln>
+            <a:noFill/>
+          </a:ln>
+          <a:effectLst/>
+        </p:spPr>
+        <p:style>
+          <a:lnRef idx="1">
+            <a:schemeClr val="accent1"/>
+          </a:lnRef>
+          <a:fillRef idx="3">
+            <a:schemeClr val="accent1"/>
+          </a:fillRef>
+          <a:effectRef idx="2">
+            <a:schemeClr val="accent1"/>
+          </a:effectRef>
+          <a:fontRef idx="minor">
+            <a:schemeClr val="lt1"/>
+          </a:fontRef>
+        </p:style>
+        <p:txBody>
+          <a:bodyPr rtlCol="0" anchor="ctr"/>
+          <a:lstStyle/>
+          <a:p>
+            <a:pPr algn="ctr"/>
+          </a:p>
+        </p:txBody>
+      </p:sp>
+      <p:sp>
+        <p:nvSpPr>
+          <p:cNvPr id="29" name="Rectangle 28"/>
+          <p:cNvSpPr/>
+          <p:nvPr/>
+        </p:nvSpPr>
+        <p:spPr>
+          <a:xfrm>
+            <a:off x="512064" y="6236208"/>
+            <a:ext cx="10899648" cy="384048"/>
+          </a:xfrm>
+          <a:prstGeom prst="rect">
+            <a:avLst/>
+          </a:prstGeom>
+          <a:solidFill>
+            <a:srgbClr val="FAF3E0"/>
+          </a:solidFill>
+          <a:ln>
+            <a:noFill/>
+          </a:ln>
+          <a:effectLst/>
+        </p:spPr>
+        <p:style>
+          <a:lnRef idx="1">
+            <a:schemeClr val="accent1"/>
+          </a:lnRef>
+          <a:fillRef idx="3">
+            <a:schemeClr val="accent1"/>
+          </a:fillRef>
+          <a:effectRef idx="2">
+            <a:schemeClr val="accent1"/>
+          </a:effectRef>
+          <a:fontRef idx="minor">
+            <a:schemeClr val="lt1"/>
+          </a:fontRef>
+        </p:style>
+        <p:txBody>
+          <a:bodyPr rtlCol="0" anchor="ctr" wrap="square" lIns="219456" rIns="128016" tIns="18288" bIns="18288"/>
           <a:lstStyle/>
           <a:p>
             <a:pPr algn="l">
@@ -4251,20 +3976,14 @@
                 <a:latin typeface="微软雅黑"/>
                 <a:ea typeface="微软雅黑"/>
               </a:rPr>
-              <a:t>四项目标统领全局——数据基建打底,投放、运营、风险三大领域在统一数据与分层体系上协同建设。</a:t>
-            </a:r>
-          </a:p>
-        </p:txBody>
-      </p:sp>
-      <p:sp>
-        <p:nvSpPr>
-          <p:cNvPr id="30" name="Rectangle 28">
-            <a:extLst>
-              <a:ext uri="{FF2B5EF4-FFF2-40B4-BE49-F238E27FC236}">
-                <a16:creationId xmlns:a16="http://schemas.microsoft.com/office/drawing/2014/main" id="{A694BE8D-DACD-4C4E-BD23-ED6F3577EC26}"/>
-              </a:ext>
-            </a:extLst>
-          </p:cNvPr>
+              <a:t>四项目标统领全局——数据基建打底,投放、运营、风险四大领域在统一数据与分层体系上协同建设。</a:t>
+            </a:r>
+          </a:p>
+        </p:txBody>
+      </p:sp>
+      <p:sp>
+        <p:nvSpPr>
+          <p:cNvPr id="30" name="Rectangle 29"/>
           <p:cNvSpPr/>
           <p:nvPr/>
         </p:nvSpPr>
@@ -4303,7 +4022,6 @@
           <a:lstStyle/>
           <a:p>
             <a:pPr algn="ctr"/>
-            <a:endParaRPr/>
           </a:p>
         </p:txBody>
       </p:sp>

--- a/Model MBR August.pptx
+++ b/Model MBR August.pptx
@@ -113,13 +113,21 @@
   <p:extLst>
     <p:ext uri="{521415D9-36F7-43E2-AB2F-B90AF26B5E84}">
       <p14:sectionLst xmlns:p14="http://schemas.microsoft.com/office/powerpoint/2010/main">
-        <p14:section name="模型基本盘及汇总" id="{C6715D47-869E-44D0-B78F-B43D1D3129E5}">
+        <p14:section name="模型规划" id="{C6715D47-869E-44D0-B78F-B43D1D3129E5}">
           <p14:sldIdLst>
             <p14:sldId id="269"/>
+          </p14:sldIdLst>
+        </p14:section>
+        <p14:section name="价值模型" id="{FCDB1B79-23DC-4AE2-A85A-0A162791C9E3}">
+          <p14:sldIdLst>
             <p14:sldId id="270"/>
             <p14:sldId id="271"/>
             <p14:sldId id="272"/>
             <p14:sldId id="273"/>
+          </p14:sldIdLst>
+        </p14:section>
+        <p14:section name="分类模型" id="{8E957497-B430-415D-84AE-94DE7350E81B}">
+          <p14:sldIdLst>
             <p14:sldId id="274"/>
             <p14:sldId id="275"/>
           </p14:sldIdLst>
@@ -128,6 +136,9 @@
           <p14:sldIdLst/>
         </p14:section>
       </p14:sectionLst>
+    </p:ext>
+    <p:ext uri="{EFAFB233-063F-42B5-8137-9DF3F51BA10A}">
+      <p15:sldGuideLst xmlns:p15="http://schemas.microsoft.com/office/powerpoint/2012/main"/>
     </p:ext>
   </p:extLst>
 </p:presentation>
@@ -5793,7 +5804,7 @@
         </p:nvSpPr>
         <p:spPr>
           <a:xfrm>
-            <a:off x="603504" y="210312"/>
+            <a:off x="516042" y="210312"/>
             <a:ext cx="10899648" cy="365760"/>
           </a:xfrm>
           <a:prstGeom prst="rect">
@@ -5814,7 +5825,17 @@
               </a:spcAft>
             </a:pPr>
             <a:r>
-              <a:rPr sz="2000" b="1">
+              <a:rPr lang="zh-CN" altLang="en-US" sz="2000" b="1" dirty="0">
+                <a:solidFill>
+                  <a:srgbClr val="0A0A0A"/>
+                </a:solidFill>
+                <a:latin typeface="微软雅黑"/>
+                <a:ea typeface="微软雅黑"/>
+              </a:rPr>
+              <a:t>价值模型：</a:t>
+            </a:r>
+            <a:r>
+              <a:rPr sz="2000" b="1" dirty="0" err="1">
                 <a:solidFill>
                   <a:srgbClr val="0A0A0A"/>
                 </a:solidFill>
@@ -5823,6 +5844,13 @@
               </a:rPr>
               <a:t>模型识别的是客户价值，不是历史额度策略</a:t>
             </a:r>
+            <a:endParaRPr sz="2000" b="1" dirty="0">
+              <a:solidFill>
+                <a:srgbClr val="0A0A0A"/>
+              </a:solidFill>
+              <a:latin typeface="微软雅黑"/>
+              <a:ea typeface="微软雅黑"/>
+            </a:endParaRPr>
           </a:p>
         </p:txBody>
       </p:sp>
@@ -5941,7 +5969,7 @@
               </a:spcAft>
             </a:pPr>
             <a:r>
-              <a:rPr sz="1000" b="1">
+              <a:rPr sz="1000" b="1" dirty="0" err="1">
                 <a:solidFill>
                   <a:srgbClr val="0A0A0A"/>
                 </a:solidFill>
@@ -5950,6 +5978,13 @@
               </a:rPr>
               <a:t>直接回答</a:t>
             </a:r>
+            <a:endParaRPr sz="1000" b="1" dirty="0">
+              <a:solidFill>
+                <a:srgbClr val="0A0A0A"/>
+              </a:solidFill>
+              <a:latin typeface="微软雅黑"/>
+              <a:ea typeface="微软雅黑"/>
+            </a:endParaRPr>
           </a:p>
           <a:p>
             <a:pPr algn="l">
@@ -5961,14 +5996,44 @@
               </a:spcAft>
             </a:pPr>
             <a:r>
-              <a:rPr sz="900" b="0">
+              <a:rPr sz="900" b="0" dirty="0" err="1">
                 <a:solidFill>
                   <a:srgbClr val="3D3C3A"/>
                 </a:solidFill>
                 <a:latin typeface="微软雅黑"/>
                 <a:ea typeface="微软雅黑"/>
               </a:rPr>
-              <a:t>额度在先、利息收入在后；但同等额度能否转化为收入，取决于客户的收入、现金流与履约能力——模型识别的是客户本身的价值潜力。</a:t>
+              <a:t>额度在先、利息收入在后；但同等额度能否转化为收入，取决于客户的收入、现金流与履约能力</a:t>
+            </a:r>
+            <a:r>
+              <a:rPr sz="900" b="0" dirty="0">
+                <a:solidFill>
+                  <a:srgbClr val="3D3C3A"/>
+                </a:solidFill>
+                <a:latin typeface="微软雅黑"/>
+                <a:ea typeface="微软雅黑"/>
+              </a:rPr>
+              <a:t>——</a:t>
+            </a:r>
+            <a:r>
+              <a:rPr sz="900" b="0" dirty="0" err="1">
+                <a:solidFill>
+                  <a:srgbClr val="3D3C3A"/>
+                </a:solidFill>
+                <a:latin typeface="微软雅黑"/>
+                <a:ea typeface="微软雅黑"/>
+              </a:rPr>
+              <a:t>模型识别的是客户本身的价值潜力</a:t>
+            </a:r>
+            <a:r>
+              <a:rPr sz="900" b="0" dirty="0">
+                <a:solidFill>
+                  <a:srgbClr val="3D3C3A"/>
+                </a:solidFill>
+                <a:latin typeface="微软雅黑"/>
+                <a:ea typeface="微软雅黑"/>
+              </a:rPr>
+              <a:t>。</a:t>
             </a:r>
           </a:p>
           <a:p>
@@ -5981,7 +6046,7 @@
               </a:spcAft>
             </a:pPr>
             <a:r>
-              <a:rPr sz="1000" b="1">
+              <a:rPr sz="1000" b="1" dirty="0" err="1">
                 <a:solidFill>
                   <a:srgbClr val="0A0A0A"/>
                 </a:solidFill>
@@ -5990,6 +6055,13 @@
               </a:rPr>
               <a:t>为什么必须检验</a:t>
             </a:r>
+            <a:endParaRPr sz="1000" b="1" dirty="0">
+              <a:solidFill>
+                <a:srgbClr val="0A0A0A"/>
+              </a:solidFill>
+              <a:latin typeface="微软雅黑"/>
+              <a:ea typeface="微软雅黑"/>
+            </a:endParaRPr>
           </a:p>
           <a:p>
             <a:pPr algn="l">
@@ -6001,14 +6073,124 @@
               </a:spcAft>
             </a:pPr>
             <a:r>
-              <a:rPr sz="900" b="0">
+              <a:rPr sz="900" b="0" dirty="0" err="1">
                 <a:solidFill>
                   <a:srgbClr val="3D3C3A"/>
                 </a:solidFill>
                 <a:latin typeface="微软雅黑"/>
                 <a:ea typeface="微软雅黑"/>
               </a:rPr>
-              <a:t>利息收入 ≈ 在贷余额 × 利率 × 用款时长，与额度机械关联；「高额度 = 高价值」的质疑仅凭论证无法排除。</a:t>
+              <a:t>利息收入</a:t>
+            </a:r>
+            <a:r>
+              <a:rPr sz="900" b="0" dirty="0">
+                <a:solidFill>
+                  <a:srgbClr val="3D3C3A"/>
+                </a:solidFill>
+                <a:latin typeface="微软雅黑"/>
+                <a:ea typeface="微软雅黑"/>
+              </a:rPr>
+              <a:t> ≈ </a:t>
+            </a:r>
+            <a:r>
+              <a:rPr sz="900" b="0" dirty="0" err="1">
+                <a:solidFill>
+                  <a:srgbClr val="3D3C3A"/>
+                </a:solidFill>
+                <a:latin typeface="微软雅黑"/>
+                <a:ea typeface="微软雅黑"/>
+              </a:rPr>
+              <a:t>在贷余额</a:t>
+            </a:r>
+            <a:r>
+              <a:rPr sz="900" b="0" dirty="0">
+                <a:solidFill>
+                  <a:srgbClr val="3D3C3A"/>
+                </a:solidFill>
+                <a:latin typeface="微软雅黑"/>
+                <a:ea typeface="微软雅黑"/>
+              </a:rPr>
+              <a:t> × </a:t>
+            </a:r>
+            <a:r>
+              <a:rPr sz="900" b="0" dirty="0" err="1">
+                <a:solidFill>
+                  <a:srgbClr val="3D3C3A"/>
+                </a:solidFill>
+                <a:latin typeface="微软雅黑"/>
+                <a:ea typeface="微软雅黑"/>
+              </a:rPr>
+              <a:t>利率</a:t>
+            </a:r>
+            <a:r>
+              <a:rPr sz="900" b="0" dirty="0">
+                <a:solidFill>
+                  <a:srgbClr val="3D3C3A"/>
+                </a:solidFill>
+                <a:latin typeface="微软雅黑"/>
+                <a:ea typeface="微软雅黑"/>
+              </a:rPr>
+              <a:t> × </a:t>
+            </a:r>
+            <a:r>
+              <a:rPr sz="900" b="0" dirty="0" err="1">
+                <a:solidFill>
+                  <a:srgbClr val="3D3C3A"/>
+                </a:solidFill>
+                <a:latin typeface="微软雅黑"/>
+                <a:ea typeface="微软雅黑"/>
+              </a:rPr>
+              <a:t>用款时长，与额度机械关联</a:t>
+            </a:r>
+            <a:r>
+              <a:rPr sz="900" b="0" dirty="0">
+                <a:solidFill>
+                  <a:srgbClr val="3D3C3A"/>
+                </a:solidFill>
+                <a:latin typeface="微软雅黑"/>
+                <a:ea typeface="微软雅黑"/>
+              </a:rPr>
+              <a:t>；「</a:t>
+            </a:r>
+            <a:r>
+              <a:rPr sz="900" b="0" dirty="0" err="1">
+                <a:solidFill>
+                  <a:srgbClr val="3D3C3A"/>
+                </a:solidFill>
+                <a:latin typeface="微软雅黑"/>
+                <a:ea typeface="微软雅黑"/>
+              </a:rPr>
+              <a:t>高额度</a:t>
+            </a:r>
+            <a:r>
+              <a:rPr sz="900" b="0" dirty="0">
+                <a:solidFill>
+                  <a:srgbClr val="3D3C3A"/>
+                </a:solidFill>
+                <a:latin typeface="微软雅黑"/>
+                <a:ea typeface="微软雅黑"/>
+              </a:rPr>
+              <a:t> = </a:t>
+            </a:r>
+            <a:r>
+              <a:rPr sz="900" b="0" dirty="0" err="1">
+                <a:solidFill>
+                  <a:srgbClr val="3D3C3A"/>
+                </a:solidFill>
+                <a:latin typeface="微软雅黑"/>
+                <a:ea typeface="微软雅黑"/>
+              </a:rPr>
+              <a:t>高价值」的质疑仅凭论证无法排除</a:t>
+            </a:r>
+            <a:r>
+              <a:rPr sz="900" b="0" dirty="0">
+                <a:solidFill>
+                  <a:srgbClr val="3D3C3A"/>
+                </a:solidFill>
+                <a:latin typeface="微软雅黑"/>
+                <a:ea typeface="微软雅黑"/>
+              </a:rPr>
+              <a:t>。</a:t>
             </a:r>
           </a:p>
           <a:p>
@@ -6021,15 +6203,42 @@
               </a:spcAft>
             </a:pPr>
             <a:r>
-              <a:rPr sz="1000" b="1">
+              <a:rPr sz="1000" b="1" dirty="0" err="1">
                 <a:solidFill>
                   <a:srgbClr val="0A0A0A"/>
                 </a:solidFill>
                 <a:latin typeface="微软雅黑"/>
                 <a:ea typeface="微软雅黑"/>
               </a:rPr>
-              <a:t>决定性检验——同额度分层</a:t>
-            </a:r>
+              <a:t>决定性检验</a:t>
+            </a:r>
+            <a:r>
+              <a:rPr sz="1000" b="1" dirty="0">
+                <a:solidFill>
+                  <a:srgbClr val="0A0A0A"/>
+                </a:solidFill>
+                <a:latin typeface="微软雅黑"/>
+                <a:ea typeface="微软雅黑"/>
+              </a:rPr>
+              <a:t>——</a:t>
+            </a:r>
+            <a:r>
+              <a:rPr sz="1000" b="1" dirty="0" err="1">
+                <a:solidFill>
+                  <a:srgbClr val="0A0A0A"/>
+                </a:solidFill>
+                <a:latin typeface="微软雅黑"/>
+                <a:ea typeface="微软雅黑"/>
+              </a:rPr>
+              <a:t>同额度分层</a:t>
+            </a:r>
+            <a:endParaRPr sz="1000" b="1" dirty="0">
+              <a:solidFill>
+                <a:srgbClr val="0A0A0A"/>
+              </a:solidFill>
+              <a:latin typeface="微软雅黑"/>
+              <a:ea typeface="微软雅黑"/>
+            </a:endParaRPr>
           </a:p>
           <a:p>
             <a:pPr algn="l">
@@ -6041,17 +6250,27 @@
               </a:spcAft>
             </a:pPr>
             <a:r>
-              <a:rPr sz="900" b="0">
+              <a:rPr sz="900" b="0" dirty="0" err="1">
                 <a:solidFill>
                   <a:srgbClr val="3D3C3A"/>
                 </a:solidFill>
                 <a:latin typeface="微软雅黑"/>
                 <a:ea typeface="微软雅黑"/>
               </a:rPr>
-              <a:t>收入 6 个申请金额区间全部单调（5000+ 档：</a:t>
-            </a:r>
-            <a:r>
-              <a:rPr sz="900" b="1">
+              <a:t>收入</a:t>
+            </a:r>
+            <a:r>
+              <a:rPr sz="900" b="0" dirty="0">
+                <a:solidFill>
+                  <a:srgbClr val="3D3C3A"/>
+                </a:solidFill>
+                <a:latin typeface="微软雅黑"/>
+                <a:ea typeface="微软雅黑"/>
+              </a:rPr>
+              <a:t> 6 个申请金额区间全部单调（5000+ 档：</a:t>
+            </a:r>
+            <a:r>
+              <a:rPr sz="900" b="1" dirty="0">
                 <a:solidFill>
                   <a:srgbClr val="1F4E79"/>
                 </a:solidFill>
@@ -6061,17 +6280,37 @@
               <a:t>10,388 vs 3,891</a:t>
             </a:r>
             <a:r>
-              <a:rPr sz="900" b="0">
+              <a:rPr sz="900" b="0" dirty="0">
                 <a:solidFill>
                   <a:srgbClr val="3D3C3A"/>
                 </a:solidFill>
                 <a:latin typeface="微软雅黑"/>
                 <a:ea typeface="微软雅黑"/>
               </a:rPr>
-              <a:t>）；逾期率 4 个总额度区间首尾方向全部随价值变差上升（</a:t>
-            </a:r>
-            <a:r>
-              <a:rPr sz="900" b="1">
+              <a:t>）；</a:t>
+            </a:r>
+            <a:r>
+              <a:rPr sz="900" b="0" dirty="0" err="1">
+                <a:solidFill>
+                  <a:srgbClr val="3D3C3A"/>
+                </a:solidFill>
+                <a:latin typeface="微软雅黑"/>
+                <a:ea typeface="微软雅黑"/>
+              </a:rPr>
+              <a:t>逾期率</a:t>
+            </a:r>
+            <a:r>
+              <a:rPr sz="900" b="0" dirty="0">
+                <a:solidFill>
+                  <a:srgbClr val="3D3C3A"/>
+                </a:solidFill>
+                <a:latin typeface="微软雅黑"/>
+                <a:ea typeface="微软雅黑"/>
+              </a:rPr>
+              <a:t> 4 个总额度区间首尾方向全部随价值变差上升（</a:t>
+            </a:r>
+            <a:r>
+              <a:rPr sz="900" b="1" dirty="0">
                 <a:solidFill>
                   <a:srgbClr val="1F4E79"/>
                 </a:solidFill>
@@ -6081,55 +6320,52 @@
               <a:t>4.37% vs 20.59%</a:t>
             </a:r>
             <a:r>
-              <a:rPr sz="900" b="0">
+              <a:rPr sz="900" b="0" dirty="0">
                 <a:solidFill>
                   <a:srgbClr val="3D3C3A"/>
                 </a:solidFill>
                 <a:latin typeface="微软雅黑"/>
                 <a:ea typeface="微软雅黑"/>
               </a:rPr>
-              <a:t>）；盈余 1,334→84、支出 7,902→3,566 同样单调。</a:t>
-            </a:r>
-          </a:p>
-          <a:p>
-            <a:pPr algn="l">
-              <a:lnSpc>
-                <a:spcPct val="100000"/>
-              </a:lnSpc>
-              <a:spcAft>
-                <a:spcPts val="200"/>
-              </a:spcAft>
-            </a:pPr>
-            <a:r>
-              <a:rPr sz="1000" b="1">
-                <a:solidFill>
-                  <a:srgbClr val="0A0A0A"/>
-                </a:solidFill>
-                <a:latin typeface="微软雅黑"/>
-                <a:ea typeface="微软雅黑"/>
-              </a:rPr>
-              <a:t>局限披露</a:t>
-            </a:r>
-          </a:p>
-          <a:p>
-            <a:pPr algn="l">
-              <a:lnSpc>
-                <a:spcPct val="105000"/>
-              </a:lnSpc>
-              <a:spcAft>
-                <a:spcPts val="0"/>
-              </a:spcAft>
-            </a:pPr>
-            <a:r>
-              <a:rPr sz="900" b="0">
+              <a:t>）；</a:t>
+            </a:r>
+            <a:r>
+              <a:rPr sz="900" b="0" dirty="0" err="1">
                 <a:solidFill>
                   <a:srgbClr val="3D3C3A"/>
                 </a:solidFill>
                 <a:latin typeface="微软雅黑"/>
                 <a:ea typeface="微软雅黑"/>
               </a:rPr>
-              <a:t>总额度 2,500+ 区间暂无足够放款表现样本（高额度申请基本被拒），逾期维度暂不能验证；申请金额维度在该区间仍保持收入单调，不影响结论方向。</a:t>
-            </a:r>
+              <a:t>盈余</a:t>
+            </a:r>
+            <a:r>
+              <a:rPr sz="900" b="0" dirty="0">
+                <a:solidFill>
+                  <a:srgbClr val="3D3C3A"/>
+                </a:solidFill>
+                <a:latin typeface="微软雅黑"/>
+                <a:ea typeface="微软雅黑"/>
+              </a:rPr>
+              <a:t> 1,334→84、支出 7,902→3,566 </a:t>
+            </a:r>
+            <a:r>
+              <a:rPr sz="900" b="0" dirty="0" err="1">
+                <a:solidFill>
+                  <a:srgbClr val="3D3C3A"/>
+                </a:solidFill>
+                <a:latin typeface="微软雅黑"/>
+                <a:ea typeface="微软雅黑"/>
+              </a:rPr>
+              <a:t>同样单调</a:t>
+            </a:r>
+            <a:endParaRPr sz="900" b="0" dirty="0">
+              <a:solidFill>
+                <a:srgbClr val="3D3C3A"/>
+              </a:solidFill>
+              <a:latin typeface="微软雅黑"/>
+              <a:ea typeface="微软雅黑"/>
+            </a:endParaRPr>
           </a:p>
         </p:txBody>
       </p:sp>
@@ -8355,8 +8591,8 @@
         </p:nvSpPr>
         <p:spPr>
           <a:xfrm>
-            <a:off x="512064" y="3529584"/>
-            <a:ext cx="10899648" cy="228600"/>
+            <a:off x="5742432" y="3527240"/>
+            <a:ext cx="5669280" cy="228600"/>
           </a:xfrm>
           <a:prstGeom prst="rect">
             <a:avLst/>
@@ -8376,15 +8612,32 @@
               </a:spcAft>
             </a:pPr>
             <a:r>
-              <a:rPr sz="1050" b="1">
+              <a:rPr sz="1050" b="1" dirty="0">
                 <a:solidFill>
                   <a:srgbClr val="0A0A0A"/>
                 </a:solidFill>
                 <a:latin typeface="微软雅黑"/>
                 <a:ea typeface="微软雅黑"/>
               </a:rPr>
-              <a:t>表1：各申请金额区间 × 价值分箱的平均收入</a:t>
-            </a:r>
+              <a:t>表1：各申请金额区间 × </a:t>
+            </a:r>
+            <a:r>
+              <a:rPr sz="1050" b="1" dirty="0" err="1">
+                <a:solidFill>
+                  <a:srgbClr val="0A0A0A"/>
+                </a:solidFill>
+                <a:latin typeface="微软雅黑"/>
+                <a:ea typeface="微软雅黑"/>
+              </a:rPr>
+              <a:t>价值分箱的平均收入</a:t>
+            </a:r>
+            <a:endParaRPr sz="1050" b="1" dirty="0">
+              <a:solidFill>
+                <a:srgbClr val="0A0A0A"/>
+              </a:solidFill>
+              <a:latin typeface="微软雅黑"/>
+              <a:ea typeface="微软雅黑"/>
+            </a:endParaRPr>
           </a:p>
         </p:txBody>
       </p:sp>
@@ -8394,53 +8647,59 @@
           <p:cNvGraphicFramePr>
             <a:graphicFrameLocks noGrp="1"/>
           </p:cNvGraphicFramePr>
-          <p:nvPr/>
+          <p:nvPr>
+            <p:extLst>
+              <p:ext uri="{D42A27DB-BD31-4B8C-83A1-F6EECF244321}">
+                <p14:modId xmlns:p14="http://schemas.microsoft.com/office/powerpoint/2010/main" val="2808351611"/>
+              </p:ext>
+            </p:extLst>
+          </p:nvPr>
         </p:nvGraphicFramePr>
         <p:xfrm>
-          <a:off x="512064" y="3785615"/>
-          <a:ext cx="10899648" cy="1828800"/>
+          <a:off x="5742432" y="3785615"/>
+          <a:ext cx="5669278" cy="1828800"/>
         </p:xfrm>
         <a:graphic>
           <a:graphicData uri="http://schemas.openxmlformats.org/drawingml/2006/table">
             <a:tbl>
               <a:tblPr/>
               <a:tblGrid>
-                <a:gridCol w="1389888">
+                <a:gridCol w="722928">
                   <a:extLst>
                     <a:ext uri="{9D8B030D-6E8A-4147-A177-3AD203B41FA5}">
                       <a16:colId xmlns:a16="http://schemas.microsoft.com/office/drawing/2014/main" val="20000"/>
                     </a:ext>
                   </a:extLst>
                 </a:gridCol>
-                <a:gridCol w="1901952">
+                <a:gridCol w="989270">
                   <a:extLst>
                     <a:ext uri="{9D8B030D-6E8A-4147-A177-3AD203B41FA5}">
                       <a16:colId xmlns:a16="http://schemas.microsoft.com/office/drawing/2014/main" val="20001"/>
                     </a:ext>
                   </a:extLst>
                 </a:gridCol>
-                <a:gridCol w="1901952">
+                <a:gridCol w="989270">
                   <a:extLst>
                     <a:ext uri="{9D8B030D-6E8A-4147-A177-3AD203B41FA5}">
                       <a16:colId xmlns:a16="http://schemas.microsoft.com/office/drawing/2014/main" val="20002"/>
                     </a:ext>
                   </a:extLst>
                 </a:gridCol>
-                <a:gridCol w="1901952">
+                <a:gridCol w="989270">
                   <a:extLst>
                     <a:ext uri="{9D8B030D-6E8A-4147-A177-3AD203B41FA5}">
                       <a16:colId xmlns:a16="http://schemas.microsoft.com/office/drawing/2014/main" val="20003"/>
                     </a:ext>
                   </a:extLst>
                 </a:gridCol>
-                <a:gridCol w="1901952">
+                <a:gridCol w="989270">
                   <a:extLst>
                     <a:ext uri="{9D8B030D-6E8A-4147-A177-3AD203B41FA5}">
                       <a16:colId xmlns:a16="http://schemas.microsoft.com/office/drawing/2014/main" val="20004"/>
                     </a:ext>
                   </a:extLst>
                 </a:gridCol>
-                <a:gridCol w="1901952">
+                <a:gridCol w="989270">
                   <a:extLst>
                     <a:ext uri="{9D8B030D-6E8A-4147-A177-3AD203B41FA5}">
                       <a16:colId xmlns:a16="http://schemas.microsoft.com/office/drawing/2014/main" val="20005"/>
@@ -10729,7 +10988,7 @@
                         </a:lnSpc>
                       </a:pPr>
                       <a:r>
-                        <a:rPr sz="800" b="0">
+                        <a:rPr sz="800" b="0" dirty="0">
                           <a:solidFill>
                             <a:srgbClr val="3D3C3A"/>
                           </a:solidFill>
@@ -10879,6 +11138,2148 @@
           <a:p>
             <a:pPr algn="ctr"/>
             <a:endParaRPr/>
+          </a:p>
+        </p:txBody>
+      </p:sp>
+      <p:sp>
+        <p:nvSpPr>
+          <p:cNvPr id="14" name="TextBox 13"/>
+          <p:cNvSpPr txBox="1"/>
+          <p:nvPr/>
+        </p:nvSpPr>
+        <p:spPr>
+          <a:xfrm>
+            <a:off x="512064" y="3529584"/>
+            <a:ext cx="4425696" cy="228600"/>
+          </a:xfrm>
+          <a:prstGeom prst="rect">
+            <a:avLst/>
+          </a:prstGeom>
+          <a:noFill/>
+        </p:spPr>
+        <p:txBody>
+          <a:bodyPr wrap="square" anchor="t" lIns="0" rIns="0" tIns="0" bIns="0"/>
+          <a:lstStyle/>
+          <a:p>
+            <a:pPr algn="l">
+              <a:lnSpc>
+                <a:spcPct val="100000"/>
+              </a:lnSpc>
+              <a:spcAft>
+                <a:spcPts val="0"/>
+              </a:spcAft>
+            </a:pPr>
+            <a:r>
+              <a:rPr sz="1050" b="1">
+                <a:solidFill>
+                  <a:srgbClr val="0A0A0A"/>
+                </a:solidFill>
+                <a:latin typeface="微软雅黑"/>
+                <a:ea typeface="微软雅黑"/>
+              </a:rPr>
+              <a:t>表3：各申请金额区间 × 价值分箱的平均可支配盈余</a:t>
+            </a:r>
+          </a:p>
+        </p:txBody>
+      </p:sp>
+      <p:graphicFrame>
+        <p:nvGraphicFramePr>
+          <p:cNvPr id="15" name="Table 14"/>
+          <p:cNvGraphicFramePr>
+            <a:graphicFrameLocks noGrp="1"/>
+          </p:cNvGraphicFramePr>
+          <p:nvPr/>
+        </p:nvGraphicFramePr>
+        <p:xfrm>
+          <a:off x="512064" y="3785615"/>
+          <a:ext cx="4425695" cy="1828800"/>
+        </p:xfrm>
+        <a:graphic>
+          <a:graphicData uri="http://schemas.openxmlformats.org/drawingml/2006/table">
+            <a:tbl>
+              <a:tblPr firstRow="0" bandRow="0"/>
+              <a:tblGrid>
+                <a:gridCol w="1188720"/>
+                <a:gridCol w="647395"/>
+                <a:gridCol w="647395"/>
+                <a:gridCol w="647395"/>
+                <a:gridCol w="647395"/>
+                <a:gridCol w="647395"/>
+              </a:tblGrid>
+              <a:tr h="228600">
+                <a:tc>
+                  <a:txBody>
+                    <a:bodyPr wrap="square"/>
+                    <a:lstStyle/>
+                    <a:p>
+                      <a:pPr algn="l">
+                        <a:lnSpc>
+                          <a:spcPct val="100000"/>
+                        </a:lnSpc>
+                      </a:pPr>
+                      <a:r>
+                        <a:rPr sz="800" b="1">
+                          <a:solidFill>
+                            <a:srgbClr val="0A0A0A"/>
+                          </a:solidFill>
+                          <a:latin typeface="微软雅黑"/>
+                          <a:ea typeface="微软雅黑"/>
+                        </a:rPr>
+                        <a:t>申请金额区间</a:t>
+                      </a:r>
+                    </a:p>
+                  </a:txBody>
+                  <a:tcPr marL="36576" marR="36576" marT="0" marB="0" anchor="ctr">
+                    <a:lnL w="12700" cap="flat">
+                      <a:noFill/>
+                    </a:lnL>
+                    <a:lnR w="12700" cap="flat">
+                      <a:noFill/>
+                    </a:lnR>
+                    <a:lnT w="12700" cap="flat">
+                      <a:noFill/>
+                    </a:lnT>
+                    <a:lnB w="19050" cap="flat">
+                      <a:solidFill>
+                        <a:srgbClr val="0A0A0A"/>
+                      </a:solidFill>
+                    </a:lnB>
+                    <a:solidFill>
+                      <a:srgbClr val="F0F0F0"/>
+                    </a:solidFill>
+                  </a:tcPr>
+                </a:tc>
+                <a:tc>
+                  <a:txBody>
+                    <a:bodyPr wrap="square"/>
+                    <a:lstStyle/>
+                    <a:p>
+                      <a:pPr algn="ctr">
+                        <a:lnSpc>
+                          <a:spcPct val="100000"/>
+                        </a:lnSpc>
+                      </a:pPr>
+                      <a:r>
+                        <a:rPr sz="800" b="1">
+                          <a:solidFill>
+                            <a:srgbClr val="0A0A0A"/>
+                          </a:solidFill>
+                          <a:latin typeface="微软雅黑"/>
+                          <a:ea typeface="微软雅黑"/>
+                        </a:rPr>
+                        <a:t>价值1</a:t>
+                      </a:r>
+                    </a:p>
+                  </a:txBody>
+                  <a:tcPr marL="36576" marR="36576" marT="0" marB="0" anchor="ctr">
+                    <a:lnL w="12700" cap="flat">
+                      <a:noFill/>
+                    </a:lnL>
+                    <a:lnR w="12700" cap="flat">
+                      <a:noFill/>
+                    </a:lnR>
+                    <a:lnT w="12700" cap="flat">
+                      <a:noFill/>
+                    </a:lnT>
+                    <a:lnB w="19050" cap="flat">
+                      <a:solidFill>
+                        <a:srgbClr val="0A0A0A"/>
+                      </a:solidFill>
+                    </a:lnB>
+                    <a:solidFill>
+                      <a:srgbClr val="F0F0F0"/>
+                    </a:solidFill>
+                  </a:tcPr>
+                </a:tc>
+                <a:tc>
+                  <a:txBody>
+                    <a:bodyPr wrap="square"/>
+                    <a:lstStyle/>
+                    <a:p>
+                      <a:pPr algn="ctr">
+                        <a:lnSpc>
+                          <a:spcPct val="100000"/>
+                        </a:lnSpc>
+                      </a:pPr>
+                      <a:r>
+                        <a:rPr sz="800" b="1">
+                          <a:solidFill>
+                            <a:srgbClr val="0A0A0A"/>
+                          </a:solidFill>
+                          <a:latin typeface="微软雅黑"/>
+                          <a:ea typeface="微软雅黑"/>
+                        </a:rPr>
+                        <a:t>价值2</a:t>
+                      </a:r>
+                    </a:p>
+                  </a:txBody>
+                  <a:tcPr marL="36576" marR="36576" marT="0" marB="0" anchor="ctr">
+                    <a:lnL w="12700" cap="flat">
+                      <a:noFill/>
+                    </a:lnL>
+                    <a:lnR w="12700" cap="flat">
+                      <a:noFill/>
+                    </a:lnR>
+                    <a:lnT w="12700" cap="flat">
+                      <a:noFill/>
+                    </a:lnT>
+                    <a:lnB w="19050" cap="flat">
+                      <a:solidFill>
+                        <a:srgbClr val="0A0A0A"/>
+                      </a:solidFill>
+                    </a:lnB>
+                    <a:solidFill>
+                      <a:srgbClr val="F0F0F0"/>
+                    </a:solidFill>
+                  </a:tcPr>
+                </a:tc>
+                <a:tc>
+                  <a:txBody>
+                    <a:bodyPr wrap="square"/>
+                    <a:lstStyle/>
+                    <a:p>
+                      <a:pPr algn="ctr">
+                        <a:lnSpc>
+                          <a:spcPct val="100000"/>
+                        </a:lnSpc>
+                      </a:pPr>
+                      <a:r>
+                        <a:rPr sz="800" b="1">
+                          <a:solidFill>
+                            <a:srgbClr val="0A0A0A"/>
+                          </a:solidFill>
+                          <a:latin typeface="微软雅黑"/>
+                          <a:ea typeface="微软雅黑"/>
+                        </a:rPr>
+                        <a:t>价值3</a:t>
+                      </a:r>
+                    </a:p>
+                  </a:txBody>
+                  <a:tcPr marL="36576" marR="36576" marT="0" marB="0" anchor="ctr">
+                    <a:lnL w="12700" cap="flat">
+                      <a:noFill/>
+                    </a:lnL>
+                    <a:lnR w="12700" cap="flat">
+                      <a:noFill/>
+                    </a:lnR>
+                    <a:lnT w="12700" cap="flat">
+                      <a:noFill/>
+                    </a:lnT>
+                    <a:lnB w="19050" cap="flat">
+                      <a:solidFill>
+                        <a:srgbClr val="0A0A0A"/>
+                      </a:solidFill>
+                    </a:lnB>
+                    <a:solidFill>
+                      <a:srgbClr val="F0F0F0"/>
+                    </a:solidFill>
+                  </a:tcPr>
+                </a:tc>
+                <a:tc>
+                  <a:txBody>
+                    <a:bodyPr wrap="square"/>
+                    <a:lstStyle/>
+                    <a:p>
+                      <a:pPr algn="ctr">
+                        <a:lnSpc>
+                          <a:spcPct val="100000"/>
+                        </a:lnSpc>
+                      </a:pPr>
+                      <a:r>
+                        <a:rPr sz="800" b="1">
+                          <a:solidFill>
+                            <a:srgbClr val="0A0A0A"/>
+                          </a:solidFill>
+                          <a:latin typeface="微软雅黑"/>
+                          <a:ea typeface="微软雅黑"/>
+                        </a:rPr>
+                        <a:t>价值4</a:t>
+                      </a:r>
+                    </a:p>
+                  </a:txBody>
+                  <a:tcPr marL="36576" marR="36576" marT="0" marB="0" anchor="ctr">
+                    <a:lnL w="12700" cap="flat">
+                      <a:noFill/>
+                    </a:lnL>
+                    <a:lnR w="12700" cap="flat">
+                      <a:noFill/>
+                    </a:lnR>
+                    <a:lnT w="12700" cap="flat">
+                      <a:noFill/>
+                    </a:lnT>
+                    <a:lnB w="19050" cap="flat">
+                      <a:solidFill>
+                        <a:srgbClr val="0A0A0A"/>
+                      </a:solidFill>
+                    </a:lnB>
+                    <a:solidFill>
+                      <a:srgbClr val="F0F0F0"/>
+                    </a:solidFill>
+                  </a:tcPr>
+                </a:tc>
+                <a:tc>
+                  <a:txBody>
+                    <a:bodyPr wrap="square"/>
+                    <a:lstStyle/>
+                    <a:p>
+                      <a:pPr algn="ctr">
+                        <a:lnSpc>
+                          <a:spcPct val="100000"/>
+                        </a:lnSpc>
+                      </a:pPr>
+                      <a:r>
+                        <a:rPr sz="800" b="1">
+                          <a:solidFill>
+                            <a:srgbClr val="0A0A0A"/>
+                          </a:solidFill>
+                          <a:latin typeface="微软雅黑"/>
+                          <a:ea typeface="微软雅黑"/>
+                        </a:rPr>
+                        <a:t>价值5</a:t>
+                      </a:r>
+                    </a:p>
+                  </a:txBody>
+                  <a:tcPr marL="36576" marR="36576" marT="0" marB="0" anchor="ctr">
+                    <a:lnL w="12700" cap="flat">
+                      <a:noFill/>
+                    </a:lnL>
+                    <a:lnR w="12700" cap="flat">
+                      <a:noFill/>
+                    </a:lnR>
+                    <a:lnT w="12700" cap="flat">
+                      <a:noFill/>
+                    </a:lnT>
+                    <a:lnB w="19050" cap="flat">
+                      <a:solidFill>
+                        <a:srgbClr val="0A0A0A"/>
+                      </a:solidFill>
+                    </a:lnB>
+                    <a:solidFill>
+                      <a:srgbClr val="F0F0F0"/>
+                    </a:solidFill>
+                  </a:tcPr>
+                </a:tc>
+              </a:tr>
+              <a:tr h="228600">
+                <a:tc>
+                  <a:txBody>
+                    <a:bodyPr wrap="square"/>
+                    <a:lstStyle/>
+                    <a:p>
+                      <a:pPr algn="l">
+                        <a:lnSpc>
+                          <a:spcPct val="100000"/>
+                        </a:lnSpc>
+                      </a:pPr>
+                      <a:r>
+                        <a:rPr sz="800" b="0">
+                          <a:solidFill>
+                            <a:srgbClr val="3D3C3A"/>
+                          </a:solidFill>
+                          <a:latin typeface="微软雅黑"/>
+                          <a:ea typeface="微软雅黑"/>
+                        </a:rPr>
+                        <a:t>500–1000</a:t>
+                      </a:r>
+                    </a:p>
+                  </a:txBody>
+                  <a:tcPr marL="36576" marR="36576" marT="0" marB="0" anchor="ctr">
+                    <a:lnL w="12700" cap="flat">
+                      <a:noFill/>
+                    </a:lnL>
+                    <a:lnR w="12700" cap="flat">
+                      <a:noFill/>
+                    </a:lnR>
+                    <a:lnT w="12700" cap="flat">
+                      <a:noFill/>
+                    </a:lnT>
+                    <a:lnB w="9525" cap="flat">
+                      <a:solidFill>
+                        <a:srgbClr val="D6D6D6"/>
+                      </a:solidFill>
+                    </a:lnB>
+                    <a:solidFill>
+                      <a:srgbClr val="FFFFFF"/>
+                    </a:solidFill>
+                  </a:tcPr>
+                </a:tc>
+                <a:tc>
+                  <a:txBody>
+                    <a:bodyPr wrap="square"/>
+                    <a:lstStyle/>
+                    <a:p>
+                      <a:pPr algn="ctr">
+                        <a:lnSpc>
+                          <a:spcPct val="100000"/>
+                        </a:lnSpc>
+                      </a:pPr>
+                      <a:r>
+                        <a:rPr sz="800" b="0">
+                          <a:solidFill>
+                            <a:srgbClr val="3D3C3A"/>
+                          </a:solidFill>
+                          <a:latin typeface="微软雅黑"/>
+                          <a:ea typeface="微软雅黑"/>
+                        </a:rPr>
+                        <a:t>1,106</a:t>
+                      </a:r>
+                    </a:p>
+                  </a:txBody>
+                  <a:tcPr marL="36576" marR="36576" marT="0" marB="0" anchor="ctr">
+                    <a:lnL w="12700" cap="flat">
+                      <a:noFill/>
+                    </a:lnL>
+                    <a:lnR w="12700" cap="flat">
+                      <a:noFill/>
+                    </a:lnR>
+                    <a:lnT w="12700" cap="flat">
+                      <a:noFill/>
+                    </a:lnT>
+                    <a:lnB w="9525" cap="flat">
+                      <a:solidFill>
+                        <a:srgbClr val="D6D6D6"/>
+                      </a:solidFill>
+                    </a:lnB>
+                    <a:solidFill>
+                      <a:srgbClr val="FFFFFF"/>
+                    </a:solidFill>
+                  </a:tcPr>
+                </a:tc>
+                <a:tc>
+                  <a:txBody>
+                    <a:bodyPr wrap="square"/>
+                    <a:lstStyle/>
+                    <a:p>
+                      <a:pPr algn="ctr">
+                        <a:lnSpc>
+                          <a:spcPct val="100000"/>
+                        </a:lnSpc>
+                      </a:pPr>
+                      <a:r>
+                        <a:rPr sz="800" b="0">
+                          <a:solidFill>
+                            <a:srgbClr val="3D3C3A"/>
+                          </a:solidFill>
+                          <a:latin typeface="微软雅黑"/>
+                          <a:ea typeface="微软雅黑"/>
+                        </a:rPr>
+                        <a:t>763</a:t>
+                      </a:r>
+                    </a:p>
+                  </a:txBody>
+                  <a:tcPr marL="36576" marR="36576" marT="0" marB="0" anchor="ctr">
+                    <a:lnL w="12700" cap="flat">
+                      <a:noFill/>
+                    </a:lnL>
+                    <a:lnR w="12700" cap="flat">
+                      <a:noFill/>
+                    </a:lnR>
+                    <a:lnT w="12700" cap="flat">
+                      <a:noFill/>
+                    </a:lnT>
+                    <a:lnB w="9525" cap="flat">
+                      <a:solidFill>
+                        <a:srgbClr val="D6D6D6"/>
+                      </a:solidFill>
+                    </a:lnB>
+                    <a:solidFill>
+                      <a:srgbClr val="FFFFFF"/>
+                    </a:solidFill>
+                  </a:tcPr>
+                </a:tc>
+                <a:tc>
+                  <a:txBody>
+                    <a:bodyPr wrap="square"/>
+                    <a:lstStyle/>
+                    <a:p>
+                      <a:pPr algn="ctr">
+                        <a:lnSpc>
+                          <a:spcPct val="100000"/>
+                        </a:lnSpc>
+                      </a:pPr>
+                      <a:r>
+                        <a:rPr sz="800" b="0">
+                          <a:solidFill>
+                            <a:srgbClr val="3D3C3A"/>
+                          </a:solidFill>
+                          <a:latin typeface="微软雅黑"/>
+                          <a:ea typeface="微软雅黑"/>
+                        </a:rPr>
+                        <a:t>288</a:t>
+                      </a:r>
+                    </a:p>
+                  </a:txBody>
+                  <a:tcPr marL="36576" marR="36576" marT="0" marB="0" anchor="ctr">
+                    <a:lnL w="12700" cap="flat">
+                      <a:noFill/>
+                    </a:lnL>
+                    <a:lnR w="12700" cap="flat">
+                      <a:noFill/>
+                    </a:lnR>
+                    <a:lnT w="12700" cap="flat">
+                      <a:noFill/>
+                    </a:lnT>
+                    <a:lnB w="9525" cap="flat">
+                      <a:solidFill>
+                        <a:srgbClr val="D6D6D6"/>
+                      </a:solidFill>
+                    </a:lnB>
+                    <a:solidFill>
+                      <a:srgbClr val="FFFFFF"/>
+                    </a:solidFill>
+                  </a:tcPr>
+                </a:tc>
+                <a:tc>
+                  <a:txBody>
+                    <a:bodyPr wrap="square"/>
+                    <a:lstStyle/>
+                    <a:p>
+                      <a:pPr algn="ctr">
+                        <a:lnSpc>
+                          <a:spcPct val="100000"/>
+                        </a:lnSpc>
+                      </a:pPr>
+                      <a:r>
+                        <a:rPr sz="800" b="0">
+                          <a:solidFill>
+                            <a:srgbClr val="3D3C3A"/>
+                          </a:solidFill>
+                          <a:latin typeface="微软雅黑"/>
+                          <a:ea typeface="微软雅黑"/>
+                        </a:rPr>
+                        <a:t>793</a:t>
+                      </a:r>
+                    </a:p>
+                  </a:txBody>
+                  <a:tcPr marL="36576" marR="36576" marT="0" marB="0" anchor="ctr">
+                    <a:lnL w="12700" cap="flat">
+                      <a:noFill/>
+                    </a:lnL>
+                    <a:lnR w="12700" cap="flat">
+                      <a:noFill/>
+                    </a:lnR>
+                    <a:lnT w="12700" cap="flat">
+                      <a:noFill/>
+                    </a:lnT>
+                    <a:lnB w="9525" cap="flat">
+                      <a:solidFill>
+                        <a:srgbClr val="D6D6D6"/>
+                      </a:solidFill>
+                    </a:lnB>
+                    <a:solidFill>
+                      <a:srgbClr val="FFFFFF"/>
+                    </a:solidFill>
+                  </a:tcPr>
+                </a:tc>
+                <a:tc>
+                  <a:txBody>
+                    <a:bodyPr wrap="square"/>
+                    <a:lstStyle/>
+                    <a:p>
+                      <a:pPr algn="ctr">
+                        <a:lnSpc>
+                          <a:spcPct val="100000"/>
+                        </a:lnSpc>
+                      </a:pPr>
+                      <a:r>
+                        <a:rPr sz="800" b="0">
+                          <a:solidFill>
+                            <a:srgbClr val="3D3C3A"/>
+                          </a:solidFill>
+                          <a:latin typeface="微软雅黑"/>
+                          <a:ea typeface="微软雅黑"/>
+                        </a:rPr>
+                        <a:t>287</a:t>
+                      </a:r>
+                    </a:p>
+                  </a:txBody>
+                  <a:tcPr marL="36576" marR="36576" marT="0" marB="0" anchor="ctr">
+                    <a:lnL w="12700" cap="flat">
+                      <a:noFill/>
+                    </a:lnL>
+                    <a:lnR w="12700" cap="flat">
+                      <a:noFill/>
+                    </a:lnR>
+                    <a:lnT w="12700" cap="flat">
+                      <a:noFill/>
+                    </a:lnT>
+                    <a:lnB w="9525" cap="flat">
+                      <a:solidFill>
+                        <a:srgbClr val="D6D6D6"/>
+                      </a:solidFill>
+                    </a:lnB>
+                    <a:solidFill>
+                      <a:srgbClr val="FFFFFF"/>
+                    </a:solidFill>
+                  </a:tcPr>
+                </a:tc>
+              </a:tr>
+              <a:tr h="228600">
+                <a:tc>
+                  <a:txBody>
+                    <a:bodyPr wrap="square"/>
+                    <a:lstStyle/>
+                    <a:p>
+                      <a:pPr algn="l">
+                        <a:lnSpc>
+                          <a:spcPct val="100000"/>
+                        </a:lnSpc>
+                      </a:pPr>
+                      <a:r>
+                        <a:rPr sz="800" b="0">
+                          <a:solidFill>
+                            <a:srgbClr val="3D3C3A"/>
+                          </a:solidFill>
+                          <a:latin typeface="微软雅黑"/>
+                          <a:ea typeface="微软雅黑"/>
+                        </a:rPr>
+                        <a:t>1000–1500</a:t>
+                      </a:r>
+                    </a:p>
+                  </a:txBody>
+                  <a:tcPr marL="36576" marR="36576" marT="0" marB="0" anchor="ctr">
+                    <a:lnL w="12700" cap="flat">
+                      <a:noFill/>
+                    </a:lnL>
+                    <a:lnR w="12700" cap="flat">
+                      <a:noFill/>
+                    </a:lnR>
+                    <a:lnT w="12700" cap="flat">
+                      <a:noFill/>
+                    </a:lnT>
+                    <a:lnB w="9525" cap="flat">
+                      <a:solidFill>
+                        <a:srgbClr val="D6D6D6"/>
+                      </a:solidFill>
+                    </a:lnB>
+                    <a:solidFill>
+                      <a:srgbClr val="FFFFFF"/>
+                    </a:solidFill>
+                  </a:tcPr>
+                </a:tc>
+                <a:tc>
+                  <a:txBody>
+                    <a:bodyPr wrap="square"/>
+                    <a:lstStyle/>
+                    <a:p>
+                      <a:pPr algn="ctr">
+                        <a:lnSpc>
+                          <a:spcPct val="100000"/>
+                        </a:lnSpc>
+                      </a:pPr>
+                      <a:r>
+                        <a:rPr sz="800" b="0">
+                          <a:solidFill>
+                            <a:srgbClr val="3D3C3A"/>
+                          </a:solidFill>
+                          <a:latin typeface="微软雅黑"/>
+                          <a:ea typeface="微软雅黑"/>
+                        </a:rPr>
+                        <a:t>940</a:t>
+                      </a:r>
+                    </a:p>
+                  </a:txBody>
+                  <a:tcPr marL="36576" marR="36576" marT="0" marB="0" anchor="ctr">
+                    <a:lnL w="12700" cap="flat">
+                      <a:noFill/>
+                    </a:lnL>
+                    <a:lnR w="12700" cap="flat">
+                      <a:noFill/>
+                    </a:lnR>
+                    <a:lnT w="12700" cap="flat">
+                      <a:noFill/>
+                    </a:lnT>
+                    <a:lnB w="9525" cap="flat">
+                      <a:solidFill>
+                        <a:srgbClr val="D6D6D6"/>
+                      </a:solidFill>
+                    </a:lnB>
+                    <a:solidFill>
+                      <a:srgbClr val="FFFFFF"/>
+                    </a:solidFill>
+                  </a:tcPr>
+                </a:tc>
+                <a:tc>
+                  <a:txBody>
+                    <a:bodyPr wrap="square"/>
+                    <a:lstStyle/>
+                    <a:p>
+                      <a:pPr algn="ctr">
+                        <a:lnSpc>
+                          <a:spcPct val="100000"/>
+                        </a:lnSpc>
+                      </a:pPr>
+                      <a:r>
+                        <a:rPr sz="800" b="0">
+                          <a:solidFill>
+                            <a:srgbClr val="3D3C3A"/>
+                          </a:solidFill>
+                          <a:latin typeface="微软雅黑"/>
+                          <a:ea typeface="微软雅黑"/>
+                        </a:rPr>
+                        <a:t>685</a:t>
+                      </a:r>
+                    </a:p>
+                  </a:txBody>
+                  <a:tcPr marL="36576" marR="36576" marT="0" marB="0" anchor="ctr">
+                    <a:lnL w="12700" cap="flat">
+                      <a:noFill/>
+                    </a:lnL>
+                    <a:lnR w="12700" cap="flat">
+                      <a:noFill/>
+                    </a:lnR>
+                    <a:lnT w="12700" cap="flat">
+                      <a:noFill/>
+                    </a:lnT>
+                    <a:lnB w="9525" cap="flat">
+                      <a:solidFill>
+                        <a:srgbClr val="D6D6D6"/>
+                      </a:solidFill>
+                    </a:lnB>
+                    <a:solidFill>
+                      <a:srgbClr val="FFFFFF"/>
+                    </a:solidFill>
+                  </a:tcPr>
+                </a:tc>
+                <a:tc>
+                  <a:txBody>
+                    <a:bodyPr wrap="square"/>
+                    <a:lstStyle/>
+                    <a:p>
+                      <a:pPr algn="ctr">
+                        <a:lnSpc>
+                          <a:spcPct val="100000"/>
+                        </a:lnSpc>
+                      </a:pPr>
+                      <a:r>
+                        <a:rPr sz="800" b="0">
+                          <a:solidFill>
+                            <a:srgbClr val="3D3C3A"/>
+                          </a:solidFill>
+                          <a:latin typeface="微软雅黑"/>
+                          <a:ea typeface="微软雅黑"/>
+                        </a:rPr>
+                        <a:t>731</a:t>
+                      </a:r>
+                    </a:p>
+                  </a:txBody>
+                  <a:tcPr marL="36576" marR="36576" marT="0" marB="0" anchor="ctr">
+                    <a:lnL w="12700" cap="flat">
+                      <a:noFill/>
+                    </a:lnL>
+                    <a:lnR w="12700" cap="flat">
+                      <a:noFill/>
+                    </a:lnR>
+                    <a:lnT w="12700" cap="flat">
+                      <a:noFill/>
+                    </a:lnT>
+                    <a:lnB w="9525" cap="flat">
+                      <a:solidFill>
+                        <a:srgbClr val="D6D6D6"/>
+                      </a:solidFill>
+                    </a:lnB>
+                    <a:solidFill>
+                      <a:srgbClr val="FFFFFF"/>
+                    </a:solidFill>
+                  </a:tcPr>
+                </a:tc>
+                <a:tc>
+                  <a:txBody>
+                    <a:bodyPr wrap="square"/>
+                    <a:lstStyle/>
+                    <a:p>
+                      <a:pPr algn="ctr">
+                        <a:lnSpc>
+                          <a:spcPct val="100000"/>
+                        </a:lnSpc>
+                      </a:pPr>
+                      <a:r>
+                        <a:rPr sz="800" b="0">
+                          <a:solidFill>
+                            <a:srgbClr val="3D3C3A"/>
+                          </a:solidFill>
+                          <a:latin typeface="微软雅黑"/>
+                          <a:ea typeface="微软雅黑"/>
+                        </a:rPr>
+                        <a:t>603</a:t>
+                      </a:r>
+                    </a:p>
+                  </a:txBody>
+                  <a:tcPr marL="36576" marR="36576" marT="0" marB="0" anchor="ctr">
+                    <a:lnL w="12700" cap="flat">
+                      <a:noFill/>
+                    </a:lnL>
+                    <a:lnR w="12700" cap="flat">
+                      <a:noFill/>
+                    </a:lnR>
+                    <a:lnT w="12700" cap="flat">
+                      <a:noFill/>
+                    </a:lnT>
+                    <a:lnB w="9525" cap="flat">
+                      <a:solidFill>
+                        <a:srgbClr val="D6D6D6"/>
+                      </a:solidFill>
+                    </a:lnB>
+                    <a:solidFill>
+                      <a:srgbClr val="FFFFFF"/>
+                    </a:solidFill>
+                  </a:tcPr>
+                </a:tc>
+                <a:tc>
+                  <a:txBody>
+                    <a:bodyPr wrap="square"/>
+                    <a:lstStyle/>
+                    <a:p>
+                      <a:pPr algn="ctr">
+                        <a:lnSpc>
+                          <a:spcPct val="100000"/>
+                        </a:lnSpc>
+                      </a:pPr>
+                      <a:r>
+                        <a:rPr sz="800" b="0">
+                          <a:solidFill>
+                            <a:srgbClr val="3D3C3A"/>
+                          </a:solidFill>
+                          <a:latin typeface="微软雅黑"/>
+                          <a:ea typeface="微软雅黑"/>
+                        </a:rPr>
+                        <a:t>46</a:t>
+                      </a:r>
+                    </a:p>
+                  </a:txBody>
+                  <a:tcPr marL="36576" marR="36576" marT="0" marB="0" anchor="ctr">
+                    <a:lnL w="12700" cap="flat">
+                      <a:noFill/>
+                    </a:lnL>
+                    <a:lnR w="12700" cap="flat">
+                      <a:noFill/>
+                    </a:lnR>
+                    <a:lnT w="12700" cap="flat">
+                      <a:noFill/>
+                    </a:lnT>
+                    <a:lnB w="9525" cap="flat">
+                      <a:solidFill>
+                        <a:srgbClr val="D6D6D6"/>
+                      </a:solidFill>
+                    </a:lnB>
+                    <a:solidFill>
+                      <a:srgbClr val="FFFFFF"/>
+                    </a:solidFill>
+                  </a:tcPr>
+                </a:tc>
+              </a:tr>
+              <a:tr h="228600">
+                <a:tc>
+                  <a:txBody>
+                    <a:bodyPr wrap="square"/>
+                    <a:lstStyle/>
+                    <a:p>
+                      <a:pPr algn="l">
+                        <a:lnSpc>
+                          <a:spcPct val="100000"/>
+                        </a:lnSpc>
+                      </a:pPr>
+                      <a:r>
+                        <a:rPr sz="800" b="0">
+                          <a:solidFill>
+                            <a:srgbClr val="3D3C3A"/>
+                          </a:solidFill>
+                          <a:latin typeface="微软雅黑"/>
+                          <a:ea typeface="微软雅黑"/>
+                        </a:rPr>
+                        <a:t>1500–2000</a:t>
+                      </a:r>
+                    </a:p>
+                  </a:txBody>
+                  <a:tcPr marL="36576" marR="36576" marT="0" marB="0" anchor="ctr">
+                    <a:lnL w="12700" cap="flat">
+                      <a:noFill/>
+                    </a:lnL>
+                    <a:lnR w="12700" cap="flat">
+                      <a:noFill/>
+                    </a:lnR>
+                    <a:lnT w="12700" cap="flat">
+                      <a:noFill/>
+                    </a:lnT>
+                    <a:lnB w="9525" cap="flat">
+                      <a:solidFill>
+                        <a:srgbClr val="D6D6D6"/>
+                      </a:solidFill>
+                    </a:lnB>
+                    <a:solidFill>
+                      <a:srgbClr val="FFFFFF"/>
+                    </a:solidFill>
+                  </a:tcPr>
+                </a:tc>
+                <a:tc>
+                  <a:txBody>
+                    <a:bodyPr wrap="square"/>
+                    <a:lstStyle/>
+                    <a:p>
+                      <a:pPr algn="ctr">
+                        <a:lnSpc>
+                          <a:spcPct val="100000"/>
+                        </a:lnSpc>
+                      </a:pPr>
+                      <a:r>
+                        <a:rPr sz="800" b="0">
+                          <a:solidFill>
+                            <a:srgbClr val="3D3C3A"/>
+                          </a:solidFill>
+                          <a:latin typeface="微软雅黑"/>
+                          <a:ea typeface="微软雅黑"/>
+                        </a:rPr>
+                        <a:t>1,096</a:t>
+                      </a:r>
+                    </a:p>
+                  </a:txBody>
+                  <a:tcPr marL="36576" marR="36576" marT="0" marB="0" anchor="ctr">
+                    <a:lnL w="12700" cap="flat">
+                      <a:noFill/>
+                    </a:lnL>
+                    <a:lnR w="12700" cap="flat">
+                      <a:noFill/>
+                    </a:lnR>
+                    <a:lnT w="12700" cap="flat">
+                      <a:noFill/>
+                    </a:lnT>
+                    <a:lnB w="9525" cap="flat">
+                      <a:solidFill>
+                        <a:srgbClr val="D6D6D6"/>
+                      </a:solidFill>
+                    </a:lnB>
+                    <a:solidFill>
+                      <a:srgbClr val="FFFFFF"/>
+                    </a:solidFill>
+                  </a:tcPr>
+                </a:tc>
+                <a:tc>
+                  <a:txBody>
+                    <a:bodyPr wrap="square"/>
+                    <a:lstStyle/>
+                    <a:p>
+                      <a:pPr algn="ctr">
+                        <a:lnSpc>
+                          <a:spcPct val="100000"/>
+                        </a:lnSpc>
+                      </a:pPr>
+                      <a:r>
+                        <a:rPr sz="800" b="0">
+                          <a:solidFill>
+                            <a:srgbClr val="3D3C3A"/>
+                          </a:solidFill>
+                          <a:latin typeface="微软雅黑"/>
+                          <a:ea typeface="微软雅黑"/>
+                        </a:rPr>
+                        <a:t>798</a:t>
+                      </a:r>
+                    </a:p>
+                  </a:txBody>
+                  <a:tcPr marL="36576" marR="36576" marT="0" marB="0" anchor="ctr">
+                    <a:lnL w="12700" cap="flat">
+                      <a:noFill/>
+                    </a:lnL>
+                    <a:lnR w="12700" cap="flat">
+                      <a:noFill/>
+                    </a:lnR>
+                    <a:lnT w="12700" cap="flat">
+                      <a:noFill/>
+                    </a:lnT>
+                    <a:lnB w="9525" cap="flat">
+                      <a:solidFill>
+                        <a:srgbClr val="D6D6D6"/>
+                      </a:solidFill>
+                    </a:lnB>
+                    <a:solidFill>
+                      <a:srgbClr val="FFFFFF"/>
+                    </a:solidFill>
+                  </a:tcPr>
+                </a:tc>
+                <a:tc>
+                  <a:txBody>
+                    <a:bodyPr wrap="square"/>
+                    <a:lstStyle/>
+                    <a:p>
+                      <a:pPr algn="ctr">
+                        <a:lnSpc>
+                          <a:spcPct val="100000"/>
+                        </a:lnSpc>
+                      </a:pPr>
+                      <a:r>
+                        <a:rPr sz="800" b="0">
+                          <a:solidFill>
+                            <a:srgbClr val="3D3C3A"/>
+                          </a:solidFill>
+                          <a:latin typeface="微软雅黑"/>
+                          <a:ea typeface="微软雅黑"/>
+                        </a:rPr>
+                        <a:t>729</a:t>
+                      </a:r>
+                    </a:p>
+                  </a:txBody>
+                  <a:tcPr marL="36576" marR="36576" marT="0" marB="0" anchor="ctr">
+                    <a:lnL w="12700" cap="flat">
+                      <a:noFill/>
+                    </a:lnL>
+                    <a:lnR w="12700" cap="flat">
+                      <a:noFill/>
+                    </a:lnR>
+                    <a:lnT w="12700" cap="flat">
+                      <a:noFill/>
+                    </a:lnT>
+                    <a:lnB w="9525" cap="flat">
+                      <a:solidFill>
+                        <a:srgbClr val="D6D6D6"/>
+                      </a:solidFill>
+                    </a:lnB>
+                    <a:solidFill>
+                      <a:srgbClr val="FFFFFF"/>
+                    </a:solidFill>
+                  </a:tcPr>
+                </a:tc>
+                <a:tc>
+                  <a:txBody>
+                    <a:bodyPr wrap="square"/>
+                    <a:lstStyle/>
+                    <a:p>
+                      <a:pPr algn="ctr">
+                        <a:lnSpc>
+                          <a:spcPct val="100000"/>
+                        </a:lnSpc>
+                      </a:pPr>
+                      <a:r>
+                        <a:rPr sz="800" b="0">
+                          <a:solidFill>
+                            <a:srgbClr val="3D3C3A"/>
+                          </a:solidFill>
+                          <a:latin typeface="微软雅黑"/>
+                          <a:ea typeface="微软雅黑"/>
+                        </a:rPr>
+                        <a:t>608</a:t>
+                      </a:r>
+                    </a:p>
+                  </a:txBody>
+                  <a:tcPr marL="36576" marR="36576" marT="0" marB="0" anchor="ctr">
+                    <a:lnL w="12700" cap="flat">
+                      <a:noFill/>
+                    </a:lnL>
+                    <a:lnR w="12700" cap="flat">
+                      <a:noFill/>
+                    </a:lnR>
+                    <a:lnT w="12700" cap="flat">
+                      <a:noFill/>
+                    </a:lnT>
+                    <a:lnB w="9525" cap="flat">
+                      <a:solidFill>
+                        <a:srgbClr val="D6D6D6"/>
+                      </a:solidFill>
+                    </a:lnB>
+                    <a:solidFill>
+                      <a:srgbClr val="FFFFFF"/>
+                    </a:solidFill>
+                  </a:tcPr>
+                </a:tc>
+                <a:tc>
+                  <a:txBody>
+                    <a:bodyPr wrap="square"/>
+                    <a:lstStyle/>
+                    <a:p>
+                      <a:pPr algn="ctr">
+                        <a:lnSpc>
+                          <a:spcPct val="100000"/>
+                        </a:lnSpc>
+                      </a:pPr>
+                      <a:r>
+                        <a:rPr sz="800" b="0">
+                          <a:solidFill>
+                            <a:srgbClr val="3D3C3A"/>
+                          </a:solidFill>
+                          <a:latin typeface="微软雅黑"/>
+                          <a:ea typeface="微软雅黑"/>
+                        </a:rPr>
+                        <a:t>144</a:t>
+                      </a:r>
+                    </a:p>
+                  </a:txBody>
+                  <a:tcPr marL="36576" marR="36576" marT="0" marB="0" anchor="ctr">
+                    <a:lnL w="12700" cap="flat">
+                      <a:noFill/>
+                    </a:lnL>
+                    <a:lnR w="12700" cap="flat">
+                      <a:noFill/>
+                    </a:lnR>
+                    <a:lnT w="12700" cap="flat">
+                      <a:noFill/>
+                    </a:lnT>
+                    <a:lnB w="9525" cap="flat">
+                      <a:solidFill>
+                        <a:srgbClr val="D6D6D6"/>
+                      </a:solidFill>
+                    </a:lnB>
+                    <a:solidFill>
+                      <a:srgbClr val="FFFFFF"/>
+                    </a:solidFill>
+                  </a:tcPr>
+                </a:tc>
+              </a:tr>
+              <a:tr h="228600">
+                <a:tc>
+                  <a:txBody>
+                    <a:bodyPr wrap="square"/>
+                    <a:lstStyle/>
+                    <a:p>
+                      <a:pPr algn="l">
+                        <a:lnSpc>
+                          <a:spcPct val="100000"/>
+                        </a:lnSpc>
+                      </a:pPr>
+                      <a:r>
+                        <a:rPr sz="800" b="0">
+                          <a:solidFill>
+                            <a:srgbClr val="3D3C3A"/>
+                          </a:solidFill>
+                          <a:latin typeface="微软雅黑"/>
+                          <a:ea typeface="微软雅黑"/>
+                        </a:rPr>
+                        <a:t>2000–2500</a:t>
+                      </a:r>
+                    </a:p>
+                  </a:txBody>
+                  <a:tcPr marL="36576" marR="36576" marT="0" marB="0" anchor="ctr">
+                    <a:lnL w="12700" cap="flat">
+                      <a:noFill/>
+                    </a:lnL>
+                    <a:lnR w="12700" cap="flat">
+                      <a:noFill/>
+                    </a:lnR>
+                    <a:lnT w="12700" cap="flat">
+                      <a:noFill/>
+                    </a:lnT>
+                    <a:lnB w="9525" cap="flat">
+                      <a:solidFill>
+                        <a:srgbClr val="D6D6D6"/>
+                      </a:solidFill>
+                    </a:lnB>
+                    <a:solidFill>
+                      <a:srgbClr val="FFFFFF"/>
+                    </a:solidFill>
+                  </a:tcPr>
+                </a:tc>
+                <a:tc>
+                  <a:txBody>
+                    <a:bodyPr wrap="square"/>
+                    <a:lstStyle/>
+                    <a:p>
+                      <a:pPr algn="ctr">
+                        <a:lnSpc>
+                          <a:spcPct val="100000"/>
+                        </a:lnSpc>
+                      </a:pPr>
+                      <a:r>
+                        <a:rPr sz="800" b="0">
+                          <a:solidFill>
+                            <a:srgbClr val="3D3C3A"/>
+                          </a:solidFill>
+                          <a:latin typeface="微软雅黑"/>
+                          <a:ea typeface="微软雅黑"/>
+                        </a:rPr>
+                        <a:t>1,708</a:t>
+                      </a:r>
+                    </a:p>
+                  </a:txBody>
+                  <a:tcPr marL="36576" marR="36576" marT="0" marB="0" anchor="ctr">
+                    <a:lnL w="12700" cap="flat">
+                      <a:noFill/>
+                    </a:lnL>
+                    <a:lnR w="12700" cap="flat">
+                      <a:noFill/>
+                    </a:lnR>
+                    <a:lnT w="12700" cap="flat">
+                      <a:noFill/>
+                    </a:lnT>
+                    <a:lnB w="9525" cap="flat">
+                      <a:solidFill>
+                        <a:srgbClr val="D6D6D6"/>
+                      </a:solidFill>
+                    </a:lnB>
+                    <a:solidFill>
+                      <a:srgbClr val="FFFFFF"/>
+                    </a:solidFill>
+                  </a:tcPr>
+                </a:tc>
+                <a:tc>
+                  <a:txBody>
+                    <a:bodyPr wrap="square"/>
+                    <a:lstStyle/>
+                    <a:p>
+                      <a:pPr algn="ctr">
+                        <a:lnSpc>
+                          <a:spcPct val="100000"/>
+                        </a:lnSpc>
+                      </a:pPr>
+                      <a:r>
+                        <a:rPr sz="800" b="0">
+                          <a:solidFill>
+                            <a:srgbClr val="3D3C3A"/>
+                          </a:solidFill>
+                          <a:latin typeface="微软雅黑"/>
+                          <a:ea typeface="微软雅黑"/>
+                        </a:rPr>
+                        <a:t>737</a:t>
+                      </a:r>
+                    </a:p>
+                  </a:txBody>
+                  <a:tcPr marL="36576" marR="36576" marT="0" marB="0" anchor="ctr">
+                    <a:lnL w="12700" cap="flat">
+                      <a:noFill/>
+                    </a:lnL>
+                    <a:lnR w="12700" cap="flat">
+                      <a:noFill/>
+                    </a:lnR>
+                    <a:lnT w="12700" cap="flat">
+                      <a:noFill/>
+                    </a:lnT>
+                    <a:lnB w="9525" cap="flat">
+                      <a:solidFill>
+                        <a:srgbClr val="D6D6D6"/>
+                      </a:solidFill>
+                    </a:lnB>
+                    <a:solidFill>
+                      <a:srgbClr val="FFFFFF"/>
+                    </a:solidFill>
+                  </a:tcPr>
+                </a:tc>
+                <a:tc>
+                  <a:txBody>
+                    <a:bodyPr wrap="square"/>
+                    <a:lstStyle/>
+                    <a:p>
+                      <a:pPr algn="ctr">
+                        <a:lnSpc>
+                          <a:spcPct val="100000"/>
+                        </a:lnSpc>
+                      </a:pPr>
+                      <a:r>
+                        <a:rPr sz="800" b="0">
+                          <a:solidFill>
+                            <a:srgbClr val="3D3C3A"/>
+                          </a:solidFill>
+                          <a:latin typeface="微软雅黑"/>
+                          <a:ea typeface="微软雅黑"/>
+                        </a:rPr>
+                        <a:t>496</a:t>
+                      </a:r>
+                    </a:p>
+                  </a:txBody>
+                  <a:tcPr marL="36576" marR="36576" marT="0" marB="0" anchor="ctr">
+                    <a:lnL w="12700" cap="flat">
+                      <a:noFill/>
+                    </a:lnL>
+                    <a:lnR w="12700" cap="flat">
+                      <a:noFill/>
+                    </a:lnR>
+                    <a:lnT w="12700" cap="flat">
+                      <a:noFill/>
+                    </a:lnT>
+                    <a:lnB w="9525" cap="flat">
+                      <a:solidFill>
+                        <a:srgbClr val="D6D6D6"/>
+                      </a:solidFill>
+                    </a:lnB>
+                    <a:solidFill>
+                      <a:srgbClr val="FFFFFF"/>
+                    </a:solidFill>
+                  </a:tcPr>
+                </a:tc>
+                <a:tc>
+                  <a:txBody>
+                    <a:bodyPr wrap="square"/>
+                    <a:lstStyle/>
+                    <a:p>
+                      <a:pPr algn="ctr">
+                        <a:lnSpc>
+                          <a:spcPct val="100000"/>
+                        </a:lnSpc>
+                      </a:pPr>
+                      <a:r>
+                        <a:rPr sz="800" b="0">
+                          <a:solidFill>
+                            <a:srgbClr val="3D3C3A"/>
+                          </a:solidFill>
+                          <a:latin typeface="微软雅黑"/>
+                          <a:ea typeface="微软雅黑"/>
+                        </a:rPr>
+                        <a:t>828</a:t>
+                      </a:r>
+                    </a:p>
+                  </a:txBody>
+                  <a:tcPr marL="36576" marR="36576" marT="0" marB="0" anchor="ctr">
+                    <a:lnL w="12700" cap="flat">
+                      <a:noFill/>
+                    </a:lnL>
+                    <a:lnR w="12700" cap="flat">
+                      <a:noFill/>
+                    </a:lnR>
+                    <a:lnT w="12700" cap="flat">
+                      <a:noFill/>
+                    </a:lnT>
+                    <a:lnB w="9525" cap="flat">
+                      <a:solidFill>
+                        <a:srgbClr val="D6D6D6"/>
+                      </a:solidFill>
+                    </a:lnB>
+                    <a:solidFill>
+                      <a:srgbClr val="FFFFFF"/>
+                    </a:solidFill>
+                  </a:tcPr>
+                </a:tc>
+                <a:tc>
+                  <a:txBody>
+                    <a:bodyPr wrap="square"/>
+                    <a:lstStyle/>
+                    <a:p>
+                      <a:pPr algn="ctr">
+                        <a:lnSpc>
+                          <a:spcPct val="100000"/>
+                        </a:lnSpc>
+                      </a:pPr>
+                      <a:r>
+                        <a:rPr sz="800" b="0">
+                          <a:solidFill>
+                            <a:srgbClr val="3D3C3A"/>
+                          </a:solidFill>
+                          <a:latin typeface="微软雅黑"/>
+                          <a:ea typeface="微软雅黑"/>
+                        </a:rPr>
+                        <a:t>−154</a:t>
+                      </a:r>
+                    </a:p>
+                  </a:txBody>
+                  <a:tcPr marL="36576" marR="36576" marT="0" marB="0" anchor="ctr">
+                    <a:lnL w="12700" cap="flat">
+                      <a:noFill/>
+                    </a:lnL>
+                    <a:lnR w="12700" cap="flat">
+                      <a:noFill/>
+                    </a:lnR>
+                    <a:lnT w="12700" cap="flat">
+                      <a:noFill/>
+                    </a:lnT>
+                    <a:lnB w="9525" cap="flat">
+                      <a:solidFill>
+                        <a:srgbClr val="D6D6D6"/>
+                      </a:solidFill>
+                    </a:lnB>
+                    <a:solidFill>
+                      <a:srgbClr val="FFFFFF"/>
+                    </a:solidFill>
+                  </a:tcPr>
+                </a:tc>
+              </a:tr>
+              <a:tr h="228600">
+                <a:tc>
+                  <a:txBody>
+                    <a:bodyPr wrap="square"/>
+                    <a:lstStyle/>
+                    <a:p>
+                      <a:pPr algn="l">
+                        <a:lnSpc>
+                          <a:spcPct val="100000"/>
+                        </a:lnSpc>
+                      </a:pPr>
+                      <a:r>
+                        <a:rPr sz="800" b="0">
+                          <a:solidFill>
+                            <a:srgbClr val="3D3C3A"/>
+                          </a:solidFill>
+                          <a:latin typeface="微软雅黑"/>
+                          <a:ea typeface="微软雅黑"/>
+                        </a:rPr>
+                        <a:t>2500–5000</a:t>
+                      </a:r>
+                    </a:p>
+                  </a:txBody>
+                  <a:tcPr marL="36576" marR="36576" marT="0" marB="0" anchor="ctr">
+                    <a:lnL w="12700" cap="flat">
+                      <a:noFill/>
+                    </a:lnL>
+                    <a:lnR w="12700" cap="flat">
+                      <a:noFill/>
+                    </a:lnR>
+                    <a:lnT w="12700" cap="flat">
+                      <a:noFill/>
+                    </a:lnT>
+                    <a:lnB w="9525" cap="flat">
+                      <a:solidFill>
+                        <a:srgbClr val="D6D6D6"/>
+                      </a:solidFill>
+                    </a:lnB>
+                    <a:solidFill>
+                      <a:srgbClr val="FFFFFF"/>
+                    </a:solidFill>
+                  </a:tcPr>
+                </a:tc>
+                <a:tc>
+                  <a:txBody>
+                    <a:bodyPr wrap="square"/>
+                    <a:lstStyle/>
+                    <a:p>
+                      <a:pPr algn="ctr">
+                        <a:lnSpc>
+                          <a:spcPct val="100000"/>
+                        </a:lnSpc>
+                      </a:pPr>
+                      <a:r>
+                        <a:rPr sz="800" b="0">
+                          <a:solidFill>
+                            <a:srgbClr val="3D3C3A"/>
+                          </a:solidFill>
+                          <a:latin typeface="微软雅黑"/>
+                          <a:ea typeface="微软雅黑"/>
+                        </a:rPr>
+                        <a:t>1,196</a:t>
+                      </a:r>
+                    </a:p>
+                  </a:txBody>
+                  <a:tcPr marL="36576" marR="36576" marT="0" marB="0" anchor="ctr">
+                    <a:lnL w="12700" cap="flat">
+                      <a:noFill/>
+                    </a:lnL>
+                    <a:lnR w="12700" cap="flat">
+                      <a:noFill/>
+                    </a:lnR>
+                    <a:lnT w="12700" cap="flat">
+                      <a:noFill/>
+                    </a:lnT>
+                    <a:lnB w="9525" cap="flat">
+                      <a:solidFill>
+                        <a:srgbClr val="D6D6D6"/>
+                      </a:solidFill>
+                    </a:lnB>
+                    <a:solidFill>
+                      <a:srgbClr val="FFFFFF"/>
+                    </a:solidFill>
+                  </a:tcPr>
+                </a:tc>
+                <a:tc>
+                  <a:txBody>
+                    <a:bodyPr wrap="square"/>
+                    <a:lstStyle/>
+                    <a:p>
+                      <a:pPr algn="ctr">
+                        <a:lnSpc>
+                          <a:spcPct val="100000"/>
+                        </a:lnSpc>
+                      </a:pPr>
+                      <a:r>
+                        <a:rPr sz="800" b="0">
+                          <a:solidFill>
+                            <a:srgbClr val="3D3C3A"/>
+                          </a:solidFill>
+                          <a:latin typeface="微软雅黑"/>
+                          <a:ea typeface="微软雅黑"/>
+                        </a:rPr>
+                        <a:t>583</a:t>
+                      </a:r>
+                    </a:p>
+                  </a:txBody>
+                  <a:tcPr marL="36576" marR="36576" marT="0" marB="0" anchor="ctr">
+                    <a:lnL w="12700" cap="flat">
+                      <a:noFill/>
+                    </a:lnL>
+                    <a:lnR w="12700" cap="flat">
+                      <a:noFill/>
+                    </a:lnR>
+                    <a:lnT w="12700" cap="flat">
+                      <a:noFill/>
+                    </a:lnT>
+                    <a:lnB w="9525" cap="flat">
+                      <a:solidFill>
+                        <a:srgbClr val="D6D6D6"/>
+                      </a:solidFill>
+                    </a:lnB>
+                    <a:solidFill>
+                      <a:srgbClr val="FFFFFF"/>
+                    </a:solidFill>
+                  </a:tcPr>
+                </a:tc>
+                <a:tc>
+                  <a:txBody>
+                    <a:bodyPr wrap="square"/>
+                    <a:lstStyle/>
+                    <a:p>
+                      <a:pPr algn="ctr">
+                        <a:lnSpc>
+                          <a:spcPct val="100000"/>
+                        </a:lnSpc>
+                      </a:pPr>
+                      <a:r>
+                        <a:rPr sz="800" b="0">
+                          <a:solidFill>
+                            <a:srgbClr val="3D3C3A"/>
+                          </a:solidFill>
+                          <a:latin typeface="微软雅黑"/>
+                          <a:ea typeface="微软雅黑"/>
+                        </a:rPr>
+                        <a:t>681</a:t>
+                      </a:r>
+                    </a:p>
+                  </a:txBody>
+                  <a:tcPr marL="36576" marR="36576" marT="0" marB="0" anchor="ctr">
+                    <a:lnL w="12700" cap="flat">
+                      <a:noFill/>
+                    </a:lnL>
+                    <a:lnR w="12700" cap="flat">
+                      <a:noFill/>
+                    </a:lnR>
+                    <a:lnT w="12700" cap="flat">
+                      <a:noFill/>
+                    </a:lnT>
+                    <a:lnB w="9525" cap="flat">
+                      <a:solidFill>
+                        <a:srgbClr val="D6D6D6"/>
+                      </a:solidFill>
+                    </a:lnB>
+                    <a:solidFill>
+                      <a:srgbClr val="FFFFFF"/>
+                    </a:solidFill>
+                  </a:tcPr>
+                </a:tc>
+                <a:tc>
+                  <a:txBody>
+                    <a:bodyPr wrap="square"/>
+                    <a:lstStyle/>
+                    <a:p>
+                      <a:pPr algn="ctr">
+                        <a:lnSpc>
+                          <a:spcPct val="100000"/>
+                        </a:lnSpc>
+                      </a:pPr>
+                      <a:r>
+                        <a:rPr sz="800" b="0">
+                          <a:solidFill>
+                            <a:srgbClr val="3D3C3A"/>
+                          </a:solidFill>
+                          <a:latin typeface="微软雅黑"/>
+                          <a:ea typeface="微软雅黑"/>
+                        </a:rPr>
+                        <a:t>569</a:t>
+                      </a:r>
+                    </a:p>
+                  </a:txBody>
+                  <a:tcPr marL="36576" marR="36576" marT="0" marB="0" anchor="ctr">
+                    <a:lnL w="12700" cap="flat">
+                      <a:noFill/>
+                    </a:lnL>
+                    <a:lnR w="12700" cap="flat">
+                      <a:noFill/>
+                    </a:lnR>
+                    <a:lnT w="12700" cap="flat">
+                      <a:noFill/>
+                    </a:lnT>
+                    <a:lnB w="9525" cap="flat">
+                      <a:solidFill>
+                        <a:srgbClr val="D6D6D6"/>
+                      </a:solidFill>
+                    </a:lnB>
+                    <a:solidFill>
+                      <a:srgbClr val="FFFFFF"/>
+                    </a:solidFill>
+                  </a:tcPr>
+                </a:tc>
+                <a:tc>
+                  <a:txBody>
+                    <a:bodyPr wrap="square"/>
+                    <a:lstStyle/>
+                    <a:p>
+                      <a:pPr algn="ctr">
+                        <a:lnSpc>
+                          <a:spcPct val="100000"/>
+                        </a:lnSpc>
+                      </a:pPr>
+                      <a:r>
+                        <a:rPr sz="800" b="0">
+                          <a:solidFill>
+                            <a:srgbClr val="3D3C3A"/>
+                          </a:solidFill>
+                          <a:latin typeface="微软雅黑"/>
+                          <a:ea typeface="微软雅黑"/>
+                        </a:rPr>
+                        <a:t>124</a:t>
+                      </a:r>
+                    </a:p>
+                  </a:txBody>
+                  <a:tcPr marL="36576" marR="36576" marT="0" marB="0" anchor="ctr">
+                    <a:lnL w="12700" cap="flat">
+                      <a:noFill/>
+                    </a:lnL>
+                    <a:lnR w="12700" cap="flat">
+                      <a:noFill/>
+                    </a:lnR>
+                    <a:lnT w="12700" cap="flat">
+                      <a:noFill/>
+                    </a:lnT>
+                    <a:lnB w="9525" cap="flat">
+                      <a:solidFill>
+                        <a:srgbClr val="D6D6D6"/>
+                      </a:solidFill>
+                    </a:lnB>
+                    <a:solidFill>
+                      <a:srgbClr val="FFFFFF"/>
+                    </a:solidFill>
+                  </a:tcPr>
+                </a:tc>
+              </a:tr>
+              <a:tr h="228600">
+                <a:tc>
+                  <a:txBody>
+                    <a:bodyPr wrap="square"/>
+                    <a:lstStyle/>
+                    <a:p>
+                      <a:pPr algn="l">
+                        <a:lnSpc>
+                          <a:spcPct val="100000"/>
+                        </a:lnSpc>
+                      </a:pPr>
+                      <a:r>
+                        <a:rPr sz="800" b="0">
+                          <a:solidFill>
+                            <a:srgbClr val="3D3C3A"/>
+                          </a:solidFill>
+                          <a:latin typeface="微软雅黑"/>
+                          <a:ea typeface="微软雅黑"/>
+                        </a:rPr>
+                        <a:t>5000+</a:t>
+                      </a:r>
+                    </a:p>
+                  </a:txBody>
+                  <a:tcPr marL="36576" marR="36576" marT="0" marB="0" anchor="ctr">
+                    <a:lnL w="12700" cap="flat">
+                      <a:noFill/>
+                    </a:lnL>
+                    <a:lnR w="12700" cap="flat">
+                      <a:noFill/>
+                    </a:lnR>
+                    <a:lnT w="12700" cap="flat">
+                      <a:noFill/>
+                    </a:lnT>
+                    <a:lnB w="9525" cap="flat">
+                      <a:solidFill>
+                        <a:srgbClr val="D6D6D6"/>
+                      </a:solidFill>
+                    </a:lnB>
+                    <a:solidFill>
+                      <a:srgbClr val="FFFFFF"/>
+                    </a:solidFill>
+                  </a:tcPr>
+                </a:tc>
+                <a:tc>
+                  <a:txBody>
+                    <a:bodyPr wrap="square"/>
+                    <a:lstStyle/>
+                    <a:p>
+                      <a:pPr algn="ctr">
+                        <a:lnSpc>
+                          <a:spcPct val="100000"/>
+                        </a:lnSpc>
+                      </a:pPr>
+                      <a:r>
+                        <a:rPr sz="800" b="0">
+                          <a:solidFill>
+                            <a:srgbClr val="3D3C3A"/>
+                          </a:solidFill>
+                          <a:latin typeface="微软雅黑"/>
+                          <a:ea typeface="微软雅黑"/>
+                        </a:rPr>
+                        <a:t>1,488</a:t>
+                      </a:r>
+                    </a:p>
+                  </a:txBody>
+                  <a:tcPr marL="36576" marR="36576" marT="0" marB="0" anchor="ctr">
+                    <a:lnL w="12700" cap="flat">
+                      <a:noFill/>
+                    </a:lnL>
+                    <a:lnR w="12700" cap="flat">
+                      <a:noFill/>
+                    </a:lnR>
+                    <a:lnT w="12700" cap="flat">
+                      <a:noFill/>
+                    </a:lnT>
+                    <a:lnB w="9525" cap="flat">
+                      <a:solidFill>
+                        <a:srgbClr val="D6D6D6"/>
+                      </a:solidFill>
+                    </a:lnB>
+                    <a:solidFill>
+                      <a:srgbClr val="FFFFFF"/>
+                    </a:solidFill>
+                  </a:tcPr>
+                </a:tc>
+                <a:tc>
+                  <a:txBody>
+                    <a:bodyPr wrap="square"/>
+                    <a:lstStyle/>
+                    <a:p>
+                      <a:pPr algn="ctr">
+                        <a:lnSpc>
+                          <a:spcPct val="100000"/>
+                        </a:lnSpc>
+                      </a:pPr>
+                      <a:r>
+                        <a:rPr sz="800" b="0">
+                          <a:solidFill>
+                            <a:srgbClr val="3D3C3A"/>
+                          </a:solidFill>
+                          <a:latin typeface="微软雅黑"/>
+                          <a:ea typeface="微软雅黑"/>
+                        </a:rPr>
+                        <a:t>931</a:t>
+                      </a:r>
+                    </a:p>
+                  </a:txBody>
+                  <a:tcPr marL="36576" marR="36576" marT="0" marB="0" anchor="ctr">
+                    <a:lnL w="12700" cap="flat">
+                      <a:noFill/>
+                    </a:lnL>
+                    <a:lnR w="12700" cap="flat">
+                      <a:noFill/>
+                    </a:lnR>
+                    <a:lnT w="12700" cap="flat">
+                      <a:noFill/>
+                    </a:lnT>
+                    <a:lnB w="9525" cap="flat">
+                      <a:solidFill>
+                        <a:srgbClr val="D6D6D6"/>
+                      </a:solidFill>
+                    </a:lnB>
+                    <a:solidFill>
+                      <a:srgbClr val="FFFFFF"/>
+                    </a:solidFill>
+                  </a:tcPr>
+                </a:tc>
+                <a:tc>
+                  <a:txBody>
+                    <a:bodyPr wrap="square"/>
+                    <a:lstStyle/>
+                    <a:p>
+                      <a:pPr algn="ctr">
+                        <a:lnSpc>
+                          <a:spcPct val="100000"/>
+                        </a:lnSpc>
+                      </a:pPr>
+                      <a:r>
+                        <a:rPr sz="800" b="0">
+                          <a:solidFill>
+                            <a:srgbClr val="3D3C3A"/>
+                          </a:solidFill>
+                          <a:latin typeface="微软雅黑"/>
+                          <a:ea typeface="微软雅黑"/>
+                        </a:rPr>
+                        <a:t>989</a:t>
+                      </a:r>
+                    </a:p>
+                  </a:txBody>
+                  <a:tcPr marL="36576" marR="36576" marT="0" marB="0" anchor="ctr">
+                    <a:lnL w="12700" cap="flat">
+                      <a:noFill/>
+                    </a:lnL>
+                    <a:lnR w="12700" cap="flat">
+                      <a:noFill/>
+                    </a:lnR>
+                    <a:lnT w="12700" cap="flat">
+                      <a:noFill/>
+                    </a:lnT>
+                    <a:lnB w="9525" cap="flat">
+                      <a:solidFill>
+                        <a:srgbClr val="D6D6D6"/>
+                      </a:solidFill>
+                    </a:lnB>
+                    <a:solidFill>
+                      <a:srgbClr val="FFFFFF"/>
+                    </a:solidFill>
+                  </a:tcPr>
+                </a:tc>
+                <a:tc>
+                  <a:txBody>
+                    <a:bodyPr wrap="square"/>
+                    <a:lstStyle/>
+                    <a:p>
+                      <a:pPr algn="ctr">
+                        <a:lnSpc>
+                          <a:spcPct val="100000"/>
+                        </a:lnSpc>
+                      </a:pPr>
+                      <a:r>
+                        <a:rPr sz="800" b="0">
+                          <a:solidFill>
+                            <a:srgbClr val="3D3C3A"/>
+                          </a:solidFill>
+                          <a:latin typeface="微软雅黑"/>
+                          <a:ea typeface="微软雅黑"/>
+                        </a:rPr>
+                        <a:t>1,010</a:t>
+                      </a:r>
+                    </a:p>
+                  </a:txBody>
+                  <a:tcPr marL="36576" marR="36576" marT="0" marB="0" anchor="ctr">
+                    <a:lnL w="12700" cap="flat">
+                      <a:noFill/>
+                    </a:lnL>
+                    <a:lnR w="12700" cap="flat">
+                      <a:noFill/>
+                    </a:lnR>
+                    <a:lnT w="12700" cap="flat">
+                      <a:noFill/>
+                    </a:lnT>
+                    <a:lnB w="9525" cap="flat">
+                      <a:solidFill>
+                        <a:srgbClr val="D6D6D6"/>
+                      </a:solidFill>
+                    </a:lnB>
+                    <a:solidFill>
+                      <a:srgbClr val="FFFFFF"/>
+                    </a:solidFill>
+                  </a:tcPr>
+                </a:tc>
+                <a:tc>
+                  <a:txBody>
+                    <a:bodyPr wrap="square"/>
+                    <a:lstStyle/>
+                    <a:p>
+                      <a:pPr algn="ctr">
+                        <a:lnSpc>
+                          <a:spcPct val="100000"/>
+                        </a:lnSpc>
+                      </a:pPr>
+                      <a:r>
+                        <a:rPr sz="800" b="0">
+                          <a:solidFill>
+                            <a:srgbClr val="3D3C3A"/>
+                          </a:solidFill>
+                          <a:latin typeface="微软雅黑"/>
+                          <a:ea typeface="微软雅黑"/>
+                        </a:rPr>
+                        <a:t>−353</a:t>
+                      </a:r>
+                    </a:p>
+                  </a:txBody>
+                  <a:tcPr marL="36576" marR="36576" marT="0" marB="0" anchor="ctr">
+                    <a:lnL w="12700" cap="flat">
+                      <a:noFill/>
+                    </a:lnL>
+                    <a:lnR w="12700" cap="flat">
+                      <a:noFill/>
+                    </a:lnR>
+                    <a:lnT w="12700" cap="flat">
+                      <a:noFill/>
+                    </a:lnT>
+                    <a:lnB w="9525" cap="flat">
+                      <a:solidFill>
+                        <a:srgbClr val="D6D6D6"/>
+                      </a:solidFill>
+                    </a:lnB>
+                    <a:solidFill>
+                      <a:srgbClr val="FFFFFF"/>
+                    </a:solidFill>
+                  </a:tcPr>
+                </a:tc>
+              </a:tr>
+              <a:tr h="228600">
+                <a:tc>
+                  <a:txBody>
+                    <a:bodyPr wrap="square"/>
+                    <a:lstStyle/>
+                    <a:p>
+                      <a:pPr algn="l">
+                        <a:lnSpc>
+                          <a:spcPct val="100000"/>
+                        </a:lnSpc>
+                      </a:pPr>
+                      <a:r>
+                        <a:rPr sz="800" b="0">
+                          <a:solidFill>
+                            <a:srgbClr val="3D3C3A"/>
+                          </a:solidFill>
+                          <a:latin typeface="微软雅黑"/>
+                          <a:ea typeface="微软雅黑"/>
+                        </a:rPr>
+                        <a:t>合计</a:t>
+                      </a:r>
+                    </a:p>
+                  </a:txBody>
+                  <a:tcPr marL="36576" marR="36576" marT="0" marB="0" anchor="ctr">
+                    <a:lnL w="12700" cap="flat">
+                      <a:noFill/>
+                    </a:lnL>
+                    <a:lnR w="12700" cap="flat">
+                      <a:noFill/>
+                    </a:lnR>
+                    <a:lnT w="12700" cap="flat">
+                      <a:noFill/>
+                    </a:lnT>
+                    <a:lnB w="9525" cap="flat">
+                      <a:solidFill>
+                        <a:srgbClr val="D6D6D6"/>
+                      </a:solidFill>
+                    </a:lnB>
+                    <a:solidFill>
+                      <a:srgbClr val="FFFFFF"/>
+                    </a:solidFill>
+                  </a:tcPr>
+                </a:tc>
+                <a:tc>
+                  <a:txBody>
+                    <a:bodyPr wrap="square"/>
+                    <a:lstStyle/>
+                    <a:p>
+                      <a:pPr algn="ctr">
+                        <a:lnSpc>
+                          <a:spcPct val="100000"/>
+                        </a:lnSpc>
+                      </a:pPr>
+                      <a:r>
+                        <a:rPr sz="800" b="0">
+                          <a:solidFill>
+                            <a:srgbClr val="3D3C3A"/>
+                          </a:solidFill>
+                          <a:latin typeface="微软雅黑"/>
+                          <a:ea typeface="微软雅黑"/>
+                        </a:rPr>
+                        <a:t>1,334</a:t>
+                      </a:r>
+                    </a:p>
+                  </a:txBody>
+                  <a:tcPr marL="36576" marR="36576" marT="0" marB="0" anchor="ctr">
+                    <a:lnL w="12700" cap="flat">
+                      <a:noFill/>
+                    </a:lnL>
+                    <a:lnR w="12700" cap="flat">
+                      <a:noFill/>
+                    </a:lnR>
+                    <a:lnT w="12700" cap="flat">
+                      <a:noFill/>
+                    </a:lnT>
+                    <a:lnB w="9525" cap="flat">
+                      <a:solidFill>
+                        <a:srgbClr val="D6D6D6"/>
+                      </a:solidFill>
+                    </a:lnB>
+                    <a:solidFill>
+                      <a:srgbClr val="FFFFFF"/>
+                    </a:solidFill>
+                  </a:tcPr>
+                </a:tc>
+                <a:tc>
+                  <a:txBody>
+                    <a:bodyPr wrap="square"/>
+                    <a:lstStyle/>
+                    <a:p>
+                      <a:pPr algn="ctr">
+                        <a:lnSpc>
+                          <a:spcPct val="100000"/>
+                        </a:lnSpc>
+                      </a:pPr>
+                      <a:r>
+                        <a:rPr sz="800" b="0">
+                          <a:solidFill>
+                            <a:srgbClr val="3D3C3A"/>
+                          </a:solidFill>
+                          <a:latin typeface="微软雅黑"/>
+                          <a:ea typeface="微软雅黑"/>
+                        </a:rPr>
+                        <a:t>745</a:t>
+                      </a:r>
+                    </a:p>
+                  </a:txBody>
+                  <a:tcPr marL="36576" marR="36576" marT="0" marB="0" anchor="ctr">
+                    <a:lnL w="12700" cap="flat">
+                      <a:noFill/>
+                    </a:lnL>
+                    <a:lnR w="12700" cap="flat">
+                      <a:noFill/>
+                    </a:lnR>
+                    <a:lnT w="12700" cap="flat">
+                      <a:noFill/>
+                    </a:lnT>
+                    <a:lnB w="9525" cap="flat">
+                      <a:solidFill>
+                        <a:srgbClr val="D6D6D6"/>
+                      </a:solidFill>
+                    </a:lnB>
+                    <a:solidFill>
+                      <a:srgbClr val="FFFFFF"/>
+                    </a:solidFill>
+                  </a:tcPr>
+                </a:tc>
+                <a:tc>
+                  <a:txBody>
+                    <a:bodyPr wrap="square"/>
+                    <a:lstStyle/>
+                    <a:p>
+                      <a:pPr algn="ctr">
+                        <a:lnSpc>
+                          <a:spcPct val="100000"/>
+                        </a:lnSpc>
+                      </a:pPr>
+                      <a:r>
+                        <a:rPr sz="800" b="0">
+                          <a:solidFill>
+                            <a:srgbClr val="3D3C3A"/>
+                          </a:solidFill>
+                          <a:latin typeface="微软雅黑"/>
+                          <a:ea typeface="微软雅黑"/>
+                        </a:rPr>
+                        <a:t>598</a:t>
+                      </a:r>
+                    </a:p>
+                  </a:txBody>
+                  <a:tcPr marL="36576" marR="36576" marT="0" marB="0" anchor="ctr">
+                    <a:lnL w="12700" cap="flat">
+                      <a:noFill/>
+                    </a:lnL>
+                    <a:lnR w="12700" cap="flat">
+                      <a:noFill/>
+                    </a:lnR>
+                    <a:lnT w="12700" cap="flat">
+                      <a:noFill/>
+                    </a:lnT>
+                    <a:lnB w="9525" cap="flat">
+                      <a:solidFill>
+                        <a:srgbClr val="D6D6D6"/>
+                      </a:solidFill>
+                    </a:lnB>
+                    <a:solidFill>
+                      <a:srgbClr val="FFFFFF"/>
+                    </a:solidFill>
+                  </a:tcPr>
+                </a:tc>
+                <a:tc>
+                  <a:txBody>
+                    <a:bodyPr wrap="square"/>
+                    <a:lstStyle/>
+                    <a:p>
+                      <a:pPr algn="ctr">
+                        <a:lnSpc>
+                          <a:spcPct val="100000"/>
+                        </a:lnSpc>
+                      </a:pPr>
+                      <a:r>
+                        <a:rPr sz="800" b="0">
+                          <a:solidFill>
+                            <a:srgbClr val="3D3C3A"/>
+                          </a:solidFill>
+                          <a:latin typeface="微软雅黑"/>
+                          <a:ea typeface="微软雅黑"/>
+                        </a:rPr>
+                        <a:t>761</a:t>
+                      </a:r>
+                    </a:p>
+                  </a:txBody>
+                  <a:tcPr marL="36576" marR="36576" marT="0" marB="0" anchor="ctr">
+                    <a:lnL w="12700" cap="flat">
+                      <a:noFill/>
+                    </a:lnL>
+                    <a:lnR w="12700" cap="flat">
+                      <a:noFill/>
+                    </a:lnR>
+                    <a:lnT w="12700" cap="flat">
+                      <a:noFill/>
+                    </a:lnT>
+                    <a:lnB w="9525" cap="flat">
+                      <a:solidFill>
+                        <a:srgbClr val="D6D6D6"/>
+                      </a:solidFill>
+                    </a:lnB>
+                    <a:solidFill>
+                      <a:srgbClr val="FFFFFF"/>
+                    </a:solidFill>
+                  </a:tcPr>
+                </a:tc>
+                <a:tc>
+                  <a:txBody>
+                    <a:bodyPr wrap="square"/>
+                    <a:lstStyle/>
+                    <a:p>
+                      <a:pPr algn="ctr">
+                        <a:lnSpc>
+                          <a:spcPct val="100000"/>
+                        </a:lnSpc>
+                      </a:pPr>
+                      <a:r>
+                        <a:rPr sz="800" b="0">
+                          <a:solidFill>
+                            <a:srgbClr val="3D3C3A"/>
+                          </a:solidFill>
+                          <a:latin typeface="微软雅黑"/>
+                          <a:ea typeface="微软雅黑"/>
+                        </a:rPr>
+                        <a:t>84</a:t>
+                      </a:r>
+                    </a:p>
+                  </a:txBody>
+                  <a:tcPr marL="36576" marR="36576" marT="0" marB="0" anchor="ctr">
+                    <a:lnL w="12700" cap="flat">
+                      <a:noFill/>
+                    </a:lnL>
+                    <a:lnR w="12700" cap="flat">
+                      <a:noFill/>
+                    </a:lnR>
+                    <a:lnT w="12700" cap="flat">
+                      <a:noFill/>
+                    </a:lnT>
+                    <a:lnB w="9525" cap="flat">
+                      <a:solidFill>
+                        <a:srgbClr val="D6D6D6"/>
+                      </a:solidFill>
+                    </a:lnB>
+                    <a:solidFill>
+                      <a:srgbClr val="FFFFFF"/>
+                    </a:solidFill>
+                  </a:tcPr>
+                </a:tc>
+              </a:tr>
+            </a:tbl>
+          </a:graphicData>
+        </a:graphic>
+      </p:graphicFrame>
+      <p:sp>
+        <p:nvSpPr>
+          <p:cNvPr id="16" name="TextBox 15"/>
+          <p:cNvSpPr txBox="1"/>
+          <p:nvPr/>
+        </p:nvSpPr>
+        <p:spPr>
+          <a:xfrm>
+            <a:off x="512064" y="5687568"/>
+            <a:ext cx="4425696" cy="365760"/>
+          </a:xfrm>
+          <a:prstGeom prst="rect">
+            <a:avLst/>
+          </a:prstGeom>
+          <a:noFill/>
+        </p:spPr>
+        <p:txBody>
+          <a:bodyPr wrap="square" anchor="t" lIns="0" rIns="0" tIns="0" bIns="0"/>
+          <a:lstStyle/>
+          <a:p>
+            <a:pPr algn="l">
+              <a:lnSpc>
+                <a:spcPct val="100000"/>
+              </a:lnSpc>
+              <a:spcAft>
+                <a:spcPts val="0"/>
+              </a:spcAft>
+            </a:pPr>
+            <a:r>
+              <a:rPr sz="750" b="0">
+                <a:solidFill>
+                  <a:srgbClr val="606060"/>
+                </a:solidFill>
+                <a:latin typeface="微软雅黑"/>
+                <a:ea typeface="微软雅黑"/>
+              </a:rPr>
+              <a:t>注：盈余＝收入−支出（可支配余量）；按「价值1最高、价值5最低」首尾判读，中间档并非严格单调；价值5在2000–2500与5000+两段转负（入不敷出）。</a:t>
+            </a:r>
           </a:p>
         </p:txBody>
       </p:sp>
@@ -11795,7 +14196,7 @@
                 <a:latin typeface="微软雅黑"/>
                 <a:ea typeface="微软雅黑"/>
               </a:rPr>
-              <a:t>表3：风险 × 价值 3M30 人数逾期率</a:t>
+              <a:t>表4：风险 × 价值 3M30 人数逾期率</a:t>
             </a:r>
           </a:p>
         </p:txBody>
@@ -16328,7 +18729,7 @@
                 <a:latin typeface="微软雅黑"/>
                 <a:ea typeface="微软雅黑"/>
               </a:rPr>
-              <a:t>表4：入模变量重要度 Top10</a:t>
+              <a:t>表5：入模变量重要度 Top10</a:t>
             </a:r>
           </a:p>
         </p:txBody>

--- a/Model MBR August.pptx
+++ b/Model MBR August.pptx
@@ -3644,15 +3644,32 @@
               </a:spcAft>
             </a:pPr>
             <a:r>
-              <a:rPr sz="2000" b="1">
+              <a:rPr lang="zh-CN" altLang="en-US" sz="2000" b="1" dirty="0">
                 <a:solidFill>
                   <a:srgbClr val="0A0A0A"/>
                 </a:solidFill>
                 <a:latin typeface="微软雅黑"/>
                 <a:ea typeface="微软雅黑"/>
               </a:rPr>
-              <a:t>体系规划:四项目标,四大领域</a:t>
-            </a:r>
+              <a:t>澳大利亚模型</a:t>
+            </a:r>
+            <a:r>
+              <a:rPr sz="2000" b="1" dirty="0" err="1">
+                <a:solidFill>
+                  <a:srgbClr val="0A0A0A"/>
+                </a:solidFill>
+                <a:latin typeface="微软雅黑"/>
+                <a:ea typeface="微软雅黑"/>
+              </a:rPr>
+              <a:t>规划</a:t>
+            </a:r>
+            <a:endParaRPr sz="2000" b="1" dirty="0">
+              <a:solidFill>
+                <a:srgbClr val="0A0A0A"/>
+              </a:solidFill>
+              <a:latin typeface="微软雅黑"/>
+              <a:ea typeface="微软雅黑"/>
+            </a:endParaRPr>
           </a:p>
         </p:txBody>
       </p:sp>
@@ -3685,60 +3702,22 @@
               </a:spcAft>
             </a:pPr>
             <a:r>
-              <a:rPr sz="1800" b="0">
+              <a:rPr lang="zh-CN" altLang="en-US" sz="1800" b="0" dirty="0">
                 <a:solidFill>
                   <a:srgbClr val="606060"/>
                 </a:solidFill>
                 <a:latin typeface="微软雅黑"/>
                 <a:ea typeface="微软雅黑"/>
               </a:rPr>
-              <a:t>规模、结构、质量、效率四项目标并重;数据基建、投放、运营、风险四大领域共享同一分层体系。</a:t>
-            </a:r>
-          </a:p>
-        </p:txBody>
-      </p:sp>
-      <p:sp>
-        <p:nvSpPr>
-          <p:cNvPr id="4" name="Rectangle 3"/>
-          <p:cNvSpPr/>
-          <p:nvPr/>
-        </p:nvSpPr>
-        <p:spPr>
-          <a:xfrm>
-            <a:off x="512064" y="1042415"/>
-            <a:ext cx="10899648" cy="10972"/>
-          </a:xfrm>
-          <a:prstGeom prst="rect">
-            <a:avLst/>
-          </a:prstGeom>
-          <a:solidFill>
-            <a:srgbClr val="D6D6D6"/>
-          </a:solidFill>
-          <a:ln>
-            <a:noFill/>
-          </a:ln>
-          <a:effectLst/>
-        </p:spPr>
-        <p:style>
-          <a:lnRef idx="1">
-            <a:schemeClr val="accent1"/>
-          </a:lnRef>
-          <a:fillRef idx="3">
-            <a:schemeClr val="accent1"/>
-          </a:fillRef>
-          <a:effectRef idx="2">
-            <a:schemeClr val="accent1"/>
-          </a:effectRef>
-          <a:fontRef idx="minor">
-            <a:schemeClr val="lt1"/>
-          </a:fontRef>
-        </p:style>
-        <p:txBody>
-          <a:bodyPr rtlCol="0" anchor="ctr"/>
-          <a:lstStyle/>
-          <a:p>
-            <a:pPr algn="ctr"/>
-            <a:endParaRPr/>
+              <a:t>规模是澳大利亚主要攻坚方向</a:t>
+            </a:r>
+            <a:endParaRPr sz="1800" b="0" dirty="0">
+              <a:solidFill>
+                <a:srgbClr val="606060"/>
+              </a:solidFill>
+              <a:latin typeface="微软雅黑"/>
+              <a:ea typeface="微软雅黑"/>
+            </a:endParaRPr>
           </a:p>
         </p:txBody>
       </p:sp>
@@ -3795,7 +3774,7 @@
         </p:nvSpPr>
         <p:spPr>
           <a:xfrm>
-            <a:off x="640080" y="1170432"/>
+            <a:off x="640080" y="1195656"/>
             <a:ext cx="8229600" cy="274320"/>
           </a:xfrm>
           <a:prstGeom prst="rect">
@@ -3816,15 +3795,82 @@
               </a:spcAft>
             </a:pPr>
             <a:r>
-              <a:rPr sz="1200" b="1">
+              <a:rPr sz="1200" b="1" dirty="0" err="1">
                 <a:solidFill>
                   <a:srgbClr val="0A0A0A"/>
                 </a:solidFill>
                 <a:latin typeface="微软雅黑"/>
                 <a:ea typeface="微软雅黑"/>
               </a:rPr>
-              <a:t>四项目标:规模 · 结构 · 质量 · 效率</a:t>
-            </a:r>
+              <a:t>四项目标:规模</a:t>
+            </a:r>
+            <a:r>
+              <a:rPr sz="1200" b="1" dirty="0">
+                <a:solidFill>
+                  <a:srgbClr val="0A0A0A"/>
+                </a:solidFill>
+                <a:latin typeface="微软雅黑"/>
+                <a:ea typeface="微软雅黑"/>
+              </a:rPr>
+              <a:t> · </a:t>
+            </a:r>
+            <a:r>
+              <a:rPr sz="1200" b="1" dirty="0" err="1">
+                <a:solidFill>
+                  <a:srgbClr val="0A0A0A"/>
+                </a:solidFill>
+                <a:latin typeface="微软雅黑"/>
+                <a:ea typeface="微软雅黑"/>
+              </a:rPr>
+              <a:t>结构</a:t>
+            </a:r>
+            <a:r>
+              <a:rPr sz="1200" b="1" dirty="0">
+                <a:solidFill>
+                  <a:srgbClr val="0A0A0A"/>
+                </a:solidFill>
+                <a:latin typeface="微软雅黑"/>
+                <a:ea typeface="微软雅黑"/>
+              </a:rPr>
+              <a:t> · </a:t>
+            </a:r>
+            <a:r>
+              <a:rPr sz="1200" b="1" dirty="0" err="1">
+                <a:solidFill>
+                  <a:srgbClr val="0A0A0A"/>
+                </a:solidFill>
+                <a:latin typeface="微软雅黑"/>
+                <a:ea typeface="微软雅黑"/>
+              </a:rPr>
+              <a:t>质量</a:t>
+            </a:r>
+            <a:r>
+              <a:rPr sz="1200" b="1" dirty="0">
+                <a:solidFill>
+                  <a:srgbClr val="0A0A0A"/>
+                </a:solidFill>
+                <a:latin typeface="微软雅黑"/>
+                <a:ea typeface="微软雅黑"/>
+              </a:rPr>
+              <a:t> · </a:t>
+            </a:r>
+            <a:r>
+              <a:rPr sz="1200" b="1" dirty="0" err="1">
+                <a:solidFill>
+                  <a:srgbClr val="0A0A0A"/>
+                </a:solidFill>
+                <a:latin typeface="微软雅黑"/>
+                <a:ea typeface="微软雅黑"/>
+              </a:rPr>
+              <a:t>效率</a:t>
+            </a:r>
+            <a:endParaRPr sz="1200" b="1" dirty="0">
+              <a:solidFill>
+                <a:srgbClr val="0A0A0A"/>
+              </a:solidFill>
+              <a:latin typeface="微软雅黑"/>
+              <a:ea typeface="微软雅黑"/>
+            </a:endParaRPr>
           </a:p>
         </p:txBody>
       </p:sp>
@@ -3837,7 +3883,7 @@
         <p:spPr>
           <a:xfrm>
             <a:off x="512064" y="1463040"/>
-            <a:ext cx="2606040" cy="987552"/>
+            <a:ext cx="2606040" cy="797355"/>
           </a:xfrm>
           <a:prstGeom prst="rect">
             <a:avLst/>
@@ -3877,7 +3923,7 @@
               </a:spcAft>
             </a:pPr>
             <a:r>
-              <a:rPr sz="1050" b="1">
+              <a:rPr sz="1050" b="1" dirty="0" err="1">
                 <a:solidFill>
                   <a:srgbClr val="0A0A0A"/>
                 </a:solidFill>
@@ -3886,6 +3932,13 @@
               </a:rPr>
               <a:t>规模</a:t>
             </a:r>
+            <a:endParaRPr sz="1050" b="1" dirty="0">
+              <a:solidFill>
+                <a:srgbClr val="0A0A0A"/>
+              </a:solidFill>
+              <a:latin typeface="微软雅黑"/>
+              <a:ea typeface="微软雅黑"/>
+            </a:endParaRPr>
           </a:p>
           <a:p>
             <a:pPr algn="l">
@@ -3897,7 +3950,7 @@
               </a:spcAft>
             </a:pPr>
             <a:r>
-              <a:rPr sz="1300" b="1">
+              <a:rPr sz="1300" b="1" dirty="0" err="1">
                 <a:solidFill>
                   <a:srgbClr val="1F4E79"/>
                 </a:solidFill>
@@ -3906,6 +3959,13 @@
               </a:rPr>
               <a:t>支撑放款增长</a:t>
             </a:r>
+            <a:endParaRPr sz="1300" b="1" dirty="0">
+              <a:solidFill>
+                <a:srgbClr val="1F4E79"/>
+              </a:solidFill>
+              <a:latin typeface="微软雅黑"/>
+              <a:ea typeface="微软雅黑"/>
+            </a:endParaRPr>
           </a:p>
           <a:p>
             <a:pPr algn="l">
@@ -3917,15 +3977,42 @@
               </a:spcAft>
             </a:pPr>
             <a:r>
-              <a:rPr sz="850" b="0">
+              <a:rPr sz="850" b="0" dirty="0" err="1">
                 <a:solidFill>
                   <a:srgbClr val="3D3C3A"/>
                 </a:solidFill>
                 <a:latin typeface="微软雅黑"/>
                 <a:ea typeface="微软雅黑"/>
               </a:rPr>
-              <a:t>拓展 APP、新渠道与复贷</a:t>
-            </a:r>
+              <a:t>拓展</a:t>
+            </a:r>
+            <a:r>
+              <a:rPr sz="850" b="0" dirty="0">
+                <a:solidFill>
+                  <a:srgbClr val="3D3C3A"/>
+                </a:solidFill>
+                <a:latin typeface="微软雅黑"/>
+                <a:ea typeface="微软雅黑"/>
+              </a:rPr>
+              <a:t> </a:t>
+            </a:r>
+            <a:r>
+              <a:rPr sz="850" b="0" dirty="0" err="1">
+                <a:solidFill>
+                  <a:srgbClr val="3D3C3A"/>
+                </a:solidFill>
+                <a:latin typeface="微软雅黑"/>
+                <a:ea typeface="微软雅黑"/>
+              </a:rPr>
+              <a:t>APP、新渠道与复贷</a:t>
+            </a:r>
+            <a:endParaRPr sz="850" b="0" dirty="0">
+              <a:solidFill>
+                <a:srgbClr val="3D3C3A"/>
+              </a:solidFill>
+              <a:latin typeface="微软雅黑"/>
+              <a:ea typeface="微软雅黑"/>
+            </a:endParaRPr>
           </a:p>
         </p:txBody>
       </p:sp>
@@ -3983,7 +4070,7 @@
         <p:spPr>
           <a:xfrm>
             <a:off x="3291840" y="1463040"/>
-            <a:ext cx="2606040" cy="987552"/>
+            <a:ext cx="2606040" cy="797355"/>
           </a:xfrm>
           <a:prstGeom prst="rect">
             <a:avLst/>
@@ -4129,7 +4216,7 @@
         <p:spPr>
           <a:xfrm>
             <a:off x="6071616" y="1463040"/>
-            <a:ext cx="2606040" cy="987552"/>
+            <a:ext cx="2606040" cy="797355"/>
           </a:xfrm>
           <a:prstGeom prst="rect">
             <a:avLst/>
@@ -4230,152 +4317,6 @@
         <p:spPr>
           <a:xfrm>
             <a:off x="6071616" y="1463040"/>
-            <a:ext cx="2606040" cy="54864"/>
-          </a:xfrm>
-          <a:prstGeom prst="rect">
-            <a:avLst/>
-          </a:prstGeom>
-          <a:solidFill>
-            <a:srgbClr val="1F4E79"/>
-          </a:solidFill>
-          <a:ln>
-            <a:noFill/>
-          </a:ln>
-          <a:effectLst/>
-        </p:spPr>
-        <p:style>
-          <a:lnRef idx="1">
-            <a:schemeClr val="accent1"/>
-          </a:lnRef>
-          <a:fillRef idx="3">
-            <a:schemeClr val="accent1"/>
-          </a:fillRef>
-          <a:effectRef idx="2">
-            <a:schemeClr val="accent1"/>
-          </a:effectRef>
-          <a:fontRef idx="minor">
-            <a:schemeClr val="lt1"/>
-          </a:fontRef>
-        </p:style>
-        <p:txBody>
-          <a:bodyPr rtlCol="0" anchor="ctr"/>
-          <a:lstStyle/>
-          <a:p>
-            <a:pPr algn="ctr"/>
-            <a:endParaRPr/>
-          </a:p>
-        </p:txBody>
-      </p:sp>
-      <p:sp>
-        <p:nvSpPr>
-          <p:cNvPr id="13" name="Rectangle 12"/>
-          <p:cNvSpPr/>
-          <p:nvPr/>
-        </p:nvSpPr>
-        <p:spPr>
-          <a:xfrm>
-            <a:off x="8851392" y="1463040"/>
-            <a:ext cx="2606040" cy="987552"/>
-          </a:xfrm>
-          <a:prstGeom prst="rect">
-            <a:avLst/>
-          </a:prstGeom>
-          <a:solidFill>
-            <a:srgbClr val="E3EBF4"/>
-          </a:solidFill>
-          <a:ln>
-            <a:noFill/>
-          </a:ln>
-          <a:effectLst/>
-        </p:spPr>
-        <p:style>
-          <a:lnRef idx="1">
-            <a:schemeClr val="accent1"/>
-          </a:lnRef>
-          <a:fillRef idx="3">
-            <a:schemeClr val="accent1"/>
-          </a:fillRef>
-          <a:effectRef idx="2">
-            <a:schemeClr val="accent1"/>
-          </a:effectRef>
-          <a:fontRef idx="minor">
-            <a:schemeClr val="lt1"/>
-          </a:fontRef>
-        </p:style>
-        <p:txBody>
-          <a:bodyPr wrap="square" lIns="164592" tIns="146304" rIns="128016" bIns="73152" rtlCol="0" anchor="t"/>
-          <a:lstStyle/>
-          <a:p>
-            <a:pPr algn="l">
-              <a:lnSpc>
-                <a:spcPct val="100000"/>
-              </a:lnSpc>
-              <a:spcAft>
-                <a:spcPts val="400"/>
-              </a:spcAft>
-            </a:pPr>
-            <a:r>
-              <a:rPr sz="1050" b="1">
-                <a:solidFill>
-                  <a:srgbClr val="0A0A0A"/>
-                </a:solidFill>
-                <a:latin typeface="微软雅黑"/>
-                <a:ea typeface="微软雅黑"/>
-              </a:rPr>
-              <a:t>效率</a:t>
-            </a:r>
-          </a:p>
-          <a:p>
-            <a:pPr algn="l">
-              <a:lnSpc>
-                <a:spcPct val="100000"/>
-              </a:lnSpc>
-              <a:spcAft>
-                <a:spcPts val="400"/>
-              </a:spcAft>
-            </a:pPr>
-            <a:r>
-              <a:rPr sz="1300" b="1">
-                <a:solidFill>
-                  <a:srgbClr val="1F4E79"/>
-                </a:solidFill>
-                <a:latin typeface="微软雅黑"/>
-                <a:ea typeface="微软雅黑"/>
-              </a:rPr>
-              <a:t>提升转化率与投放 ROI</a:t>
-            </a:r>
-          </a:p>
-          <a:p>
-            <a:pPr algn="l">
-              <a:lnSpc>
-                <a:spcPct val="100000"/>
-              </a:lnSpc>
-              <a:spcAft>
-                <a:spcPts val="0"/>
-              </a:spcAft>
-            </a:pPr>
-            <a:r>
-              <a:rPr sz="850" b="0">
-                <a:solidFill>
-                  <a:srgbClr val="3D3C3A"/>
-                </a:solidFill>
-                <a:latin typeface="微软雅黑"/>
-                <a:ea typeface="微软雅黑"/>
-              </a:rPr>
-              <a:t>以 LTV 统筹获客、额度、定价、权益</a:t>
-            </a:r>
-          </a:p>
-        </p:txBody>
-      </p:sp>
-      <p:sp>
-        <p:nvSpPr>
-          <p:cNvPr id="14" name="Rectangle 13"/>
-          <p:cNvSpPr/>
-          <p:nvPr/>
-        </p:nvSpPr>
-        <p:spPr>
-          <a:xfrm>
-            <a:off x="8851392" y="1463040"/>
             <a:ext cx="2606040" cy="54864"/>
           </a:xfrm>
           <a:prstGeom prst="rect">
@@ -5125,7 +5066,7 @@
               </a:spcAft>
             </a:pPr>
             <a:r>
-              <a:rPr sz="1200" b="1">
+              <a:rPr sz="1200" b="1" dirty="0" err="1">
                 <a:solidFill>
                   <a:srgbClr val="0A0A0A"/>
                 </a:solidFill>
@@ -5134,6 +5075,13 @@
               </a:rPr>
               <a:t>用户运营</a:t>
             </a:r>
+            <a:endParaRPr sz="1200" b="1" dirty="0">
+              <a:solidFill>
+                <a:srgbClr val="0A0A0A"/>
+              </a:solidFill>
+              <a:latin typeface="微软雅黑"/>
+              <a:ea typeface="微软雅黑"/>
+            </a:endParaRPr>
           </a:p>
           <a:p>
             <a:pPr algn="l">
@@ -5145,7 +5093,7 @@
               </a:spcAft>
             </a:pPr>
             <a:r>
-              <a:rPr sz="950" b="1">
+              <a:rPr sz="950" b="1" dirty="0" err="1">
                 <a:solidFill>
                   <a:srgbClr val="1F4E79"/>
                 </a:solidFill>
@@ -5154,6 +5102,13 @@
               </a:rPr>
               <a:t>客户价值与定价</a:t>
             </a:r>
+            <a:endParaRPr sz="950" b="1" dirty="0">
+              <a:solidFill>
+                <a:srgbClr val="1F4E79"/>
+              </a:solidFill>
+              <a:latin typeface="微软雅黑"/>
+              <a:ea typeface="微软雅黑"/>
+            </a:endParaRPr>
           </a:p>
           <a:p>
             <a:pPr algn="l">
@@ -5165,7 +5120,7 @@
               </a:spcAft>
             </a:pPr>
             <a:r>
-              <a:rPr sz="850" b="0">
+              <a:rPr sz="850" b="0" dirty="0" err="1">
                 <a:solidFill>
                   <a:srgbClr val="3D3C3A"/>
                 </a:solidFill>
@@ -5174,6 +5129,13 @@
               </a:rPr>
               <a:t>盈利性评估</a:t>
             </a:r>
+            <a:endParaRPr sz="850" b="0" dirty="0">
+              <a:solidFill>
+                <a:srgbClr val="3D3C3A"/>
+              </a:solidFill>
+              <a:latin typeface="微软雅黑"/>
+              <a:ea typeface="微软雅黑"/>
+            </a:endParaRPr>
           </a:p>
           <a:p>
             <a:pPr algn="l">
@@ -5185,7 +5147,7 @@
               </a:spcAft>
             </a:pPr>
             <a:r>
-              <a:rPr sz="850" b="0">
+              <a:rPr sz="850" b="0" dirty="0" err="1">
                 <a:solidFill>
                   <a:srgbClr val="3D3C3A"/>
                 </a:solidFill>
@@ -5194,6 +5156,13 @@
               </a:rPr>
               <a:t>自动寻优定价</a:t>
             </a:r>
+            <a:endParaRPr sz="850" b="0" dirty="0">
+              <a:solidFill>
+                <a:srgbClr val="3D3C3A"/>
+              </a:solidFill>
+              <a:latin typeface="微软雅黑"/>
+              <a:ea typeface="微软雅黑"/>
+            </a:endParaRPr>
           </a:p>
           <a:p>
             <a:pPr algn="l">
@@ -5205,7 +5174,7 @@
               </a:spcAft>
             </a:pPr>
             <a:r>
-              <a:rPr sz="850" b="0">
+              <a:rPr sz="850" b="0" dirty="0">
                 <a:solidFill>
                   <a:srgbClr val="3D3C3A"/>
                 </a:solidFill>
@@ -5225,7 +5194,7 @@
               </a:spcAft>
             </a:pPr>
             <a:r>
-              <a:rPr sz="950" b="1">
+              <a:rPr sz="950" b="1" dirty="0" err="1">
                 <a:solidFill>
                   <a:srgbClr val="1F4E79"/>
                 </a:solidFill>
@@ -5234,6 +5203,13 @@
               </a:rPr>
               <a:t>触达与智能经营</a:t>
             </a:r>
+            <a:endParaRPr sz="950" b="1" dirty="0">
+              <a:solidFill>
+                <a:srgbClr val="1F4E79"/>
+              </a:solidFill>
+              <a:latin typeface="微软雅黑"/>
+              <a:ea typeface="微软雅黑"/>
+            </a:endParaRPr>
           </a:p>
           <a:p>
             <a:pPr algn="l">
@@ -5245,7 +5221,7 @@
               </a:spcAft>
             </a:pPr>
             <a:r>
-              <a:rPr sz="850" b="1">
+              <a:rPr sz="850" b="1" dirty="0">
                 <a:solidFill>
                   <a:srgbClr val="D6A000"/>
                 </a:solidFill>
@@ -5255,7 +5231,7 @@
               <a:t>★ </a:t>
             </a:r>
             <a:r>
-              <a:rPr sz="850" b="1">
+              <a:rPr sz="850" b="1" dirty="0" err="1">
                 <a:solidFill>
                   <a:srgbClr val="1F4E79"/>
                 </a:solidFill>
@@ -5264,6 +5240,13 @@
               </a:rPr>
               <a:t>触达策略与人群编排</a:t>
             </a:r>
+            <a:endParaRPr sz="850" b="1" dirty="0">
+              <a:solidFill>
+                <a:srgbClr val="1F4E79"/>
+              </a:solidFill>
+              <a:latin typeface="微软雅黑"/>
+              <a:ea typeface="微软雅黑"/>
+            </a:endParaRPr>
           </a:p>
           <a:p>
             <a:pPr algn="l">
@@ -5275,15 +5258,42 @@
               </a:spcAft>
             </a:pPr>
             <a:r>
-              <a:rPr sz="850" b="0">
+              <a:rPr sz="850" b="0" dirty="0" err="1">
                 <a:solidFill>
                   <a:srgbClr val="3D3C3A"/>
                 </a:solidFill>
                 <a:latin typeface="微软雅黑"/>
                 <a:ea typeface="微软雅黑"/>
               </a:rPr>
-              <a:t>运营监控 AI 智能体</a:t>
-            </a:r>
+              <a:t>运营监控</a:t>
+            </a:r>
+            <a:r>
+              <a:rPr sz="850" b="0" dirty="0">
+                <a:solidFill>
+                  <a:srgbClr val="3D3C3A"/>
+                </a:solidFill>
+                <a:latin typeface="微软雅黑"/>
+                <a:ea typeface="微软雅黑"/>
+              </a:rPr>
+              <a:t> AI </a:t>
+            </a:r>
+            <a:r>
+              <a:rPr sz="850" b="0" dirty="0" err="1">
+                <a:solidFill>
+                  <a:srgbClr val="3D3C3A"/>
+                </a:solidFill>
+                <a:latin typeface="微软雅黑"/>
+                <a:ea typeface="微软雅黑"/>
+              </a:rPr>
+              <a:t>智能体</a:t>
+            </a:r>
+            <a:endParaRPr sz="850" b="0" dirty="0">
+              <a:solidFill>
+                <a:srgbClr val="3D3C3A"/>
+              </a:solidFill>
+              <a:latin typeface="微软雅黑"/>
+              <a:ea typeface="微软雅黑"/>
+            </a:endParaRPr>
           </a:p>
           <a:p>
             <a:pPr algn="l">
@@ -5295,7 +5305,7 @@
               </a:spcAft>
             </a:pPr>
             <a:r>
-              <a:rPr sz="850" b="1">
+              <a:rPr sz="850" b="1" dirty="0">
                 <a:solidFill>
                   <a:srgbClr val="D6A000"/>
                 </a:solidFill>
@@ -5305,7 +5315,7 @@
               <a:t>★ </a:t>
             </a:r>
             <a:r>
-              <a:rPr sz="850" b="1">
+              <a:rPr sz="850" b="1" dirty="0" err="1">
                 <a:solidFill>
                   <a:srgbClr val="1F4E79"/>
                 </a:solidFill>
@@ -5314,6 +5324,13 @@
               </a:rPr>
               <a:t>结清客户复贷召回</a:t>
             </a:r>
+            <a:endParaRPr sz="850" b="1" dirty="0">
+              <a:solidFill>
+                <a:srgbClr val="1F4E79"/>
+              </a:solidFill>
+              <a:latin typeface="微软雅黑"/>
+              <a:ea typeface="微软雅黑"/>
+            </a:endParaRPr>
           </a:p>
           <a:p>
             <a:pPr algn="l">
@@ -5325,7 +5342,7 @@
               </a:spcAft>
             </a:pPr>
             <a:r>
-              <a:rPr sz="850" b="0">
+              <a:rPr sz="850" b="0" dirty="0" err="1">
                 <a:solidFill>
                   <a:srgbClr val="3D3C3A"/>
                 </a:solidFill>
@@ -5334,6 +5351,13 @@
               </a:rPr>
               <a:t>沉睡客户识别唤醒</a:t>
             </a:r>
+            <a:endParaRPr sz="850" b="0" dirty="0">
+              <a:solidFill>
+                <a:srgbClr val="3D3C3A"/>
+              </a:solidFill>
+              <a:latin typeface="微软雅黑"/>
+              <a:ea typeface="微软雅黑"/>
+            </a:endParaRPr>
           </a:p>
           <a:p>
             <a:pPr algn="l">
@@ -5345,15 +5369,42 @@
               </a:spcAft>
             </a:pPr>
             <a:r>
-              <a:rPr sz="850" b="0">
+              <a:rPr sz="850" b="0" dirty="0" err="1">
                 <a:solidFill>
                   <a:srgbClr val="3D3C3A"/>
                 </a:solidFill>
                 <a:latin typeface="微软雅黑"/>
                 <a:ea typeface="微软雅黑"/>
               </a:rPr>
-              <a:t>竞品经营洞察 AI 智能体</a:t>
-            </a:r>
+              <a:t>竞品经营洞察</a:t>
+            </a:r>
+            <a:r>
+              <a:rPr sz="850" b="0" dirty="0">
+                <a:solidFill>
+                  <a:srgbClr val="3D3C3A"/>
+                </a:solidFill>
+                <a:latin typeface="微软雅黑"/>
+                <a:ea typeface="微软雅黑"/>
+              </a:rPr>
+              <a:t> AI </a:t>
+            </a:r>
+            <a:r>
+              <a:rPr sz="850" b="0" dirty="0" err="1">
+                <a:solidFill>
+                  <a:srgbClr val="3D3C3A"/>
+                </a:solidFill>
+                <a:latin typeface="微软雅黑"/>
+                <a:ea typeface="微软雅黑"/>
+              </a:rPr>
+              <a:t>智能体</a:t>
+            </a:r>
+            <a:endParaRPr sz="850" b="0" dirty="0">
+              <a:solidFill>
+                <a:srgbClr val="3D3C3A"/>
+              </a:solidFill>
+              <a:latin typeface="微软雅黑"/>
+              <a:ea typeface="微软雅黑"/>
+            </a:endParaRPr>
           </a:p>
         </p:txBody>
       </p:sp>
@@ -5625,112 +5676,6 @@
           <a:xfrm>
             <a:off x="6172200" y="4773168"/>
             <a:ext cx="54864" cy="182880"/>
-          </a:xfrm>
-          <a:prstGeom prst="rect">
-            <a:avLst/>
-          </a:prstGeom>
-          <a:solidFill>
-            <a:srgbClr val="D6A000"/>
-          </a:solidFill>
-          <a:ln>
-            <a:noFill/>
-          </a:ln>
-          <a:effectLst/>
-        </p:spPr>
-        <p:style>
-          <a:lnRef idx="1">
-            <a:schemeClr val="accent1"/>
-          </a:lnRef>
-          <a:fillRef idx="3">
-            <a:schemeClr val="accent1"/>
-          </a:fillRef>
-          <a:effectRef idx="2">
-            <a:schemeClr val="accent1"/>
-          </a:effectRef>
-          <a:fontRef idx="minor">
-            <a:schemeClr val="lt1"/>
-          </a:fontRef>
-        </p:style>
-        <p:txBody>
-          <a:bodyPr rtlCol="0" anchor="ctr"/>
-          <a:lstStyle/>
-          <a:p>
-            <a:pPr algn="ctr"/>
-            <a:endParaRPr/>
-          </a:p>
-        </p:txBody>
-      </p:sp>
-      <p:sp>
-        <p:nvSpPr>
-          <p:cNvPr id="29" name="Rectangle 28"/>
-          <p:cNvSpPr/>
-          <p:nvPr/>
-        </p:nvSpPr>
-        <p:spPr>
-          <a:xfrm>
-            <a:off x="512064" y="6236208"/>
-            <a:ext cx="10899648" cy="384048"/>
-          </a:xfrm>
-          <a:prstGeom prst="rect">
-            <a:avLst/>
-          </a:prstGeom>
-          <a:solidFill>
-            <a:srgbClr val="FAF3E0"/>
-          </a:solidFill>
-          <a:ln>
-            <a:noFill/>
-          </a:ln>
-          <a:effectLst/>
-        </p:spPr>
-        <p:style>
-          <a:lnRef idx="1">
-            <a:schemeClr val="accent1"/>
-          </a:lnRef>
-          <a:fillRef idx="3">
-            <a:schemeClr val="accent1"/>
-          </a:fillRef>
-          <a:effectRef idx="2">
-            <a:schemeClr val="accent1"/>
-          </a:effectRef>
-          <a:fontRef idx="minor">
-            <a:schemeClr val="lt1"/>
-          </a:fontRef>
-        </p:style>
-        <p:txBody>
-          <a:bodyPr wrap="square" lIns="219456" tIns="18288" rIns="128016" bIns="18288" rtlCol="0" anchor="ctr"/>
-          <a:lstStyle/>
-          <a:p>
-            <a:pPr algn="l">
-              <a:lnSpc>
-                <a:spcPct val="110000"/>
-              </a:lnSpc>
-              <a:spcAft>
-                <a:spcPts val="0"/>
-              </a:spcAft>
-            </a:pPr>
-            <a:r>
-              <a:rPr sz="900" b="1">
-                <a:solidFill>
-                  <a:srgbClr val="0A0A0A"/>
-                </a:solidFill>
-                <a:latin typeface="微软雅黑"/>
-                <a:ea typeface="微软雅黑"/>
-              </a:rPr>
-              <a:t>四项目标统领全局——数据基建打底,投放、运营、风险四大领域在统一数据与分层体系上协同建设。</a:t>
-            </a:r>
-          </a:p>
-        </p:txBody>
-      </p:sp>
-      <p:sp>
-        <p:nvSpPr>
-          <p:cNvPr id="30" name="Rectangle 29"/>
-          <p:cNvSpPr/>
-          <p:nvPr/>
-        </p:nvSpPr>
-        <p:spPr>
-          <a:xfrm>
-            <a:off x="512064" y="6236208"/>
-            <a:ext cx="64008" cy="384048"/>
           </a:xfrm>
           <a:prstGeom prst="rect">
             <a:avLst/>
@@ -11158,7 +11103,7 @@
           <a:noFill/>
         </p:spPr>
         <p:txBody>
-          <a:bodyPr wrap="square" anchor="t" lIns="0" rIns="0" tIns="0" bIns="0"/>
+          <a:bodyPr wrap="square" lIns="0" tIns="0" rIns="0" bIns="0" anchor="t"/>
           <a:lstStyle/>
           <a:p>
             <a:pPr algn="l">
@@ -11197,19 +11142,55 @@
         <a:graphic>
           <a:graphicData uri="http://schemas.openxmlformats.org/drawingml/2006/table">
             <a:tbl>
-              <a:tblPr firstRow="0" bandRow="0"/>
+              <a:tblPr/>
               <a:tblGrid>
-                <a:gridCol w="1188720"/>
-                <a:gridCol w="647395"/>
-                <a:gridCol w="647395"/>
-                <a:gridCol w="647395"/>
-                <a:gridCol w="647395"/>
-                <a:gridCol w="647395"/>
+                <a:gridCol w="1188720">
+                  <a:extLst>
+                    <a:ext uri="{9D8B030D-6E8A-4147-A177-3AD203B41FA5}">
+                      <a16:colId xmlns:a16="http://schemas.microsoft.com/office/drawing/2014/main" val="20000"/>
+                    </a:ext>
+                  </a:extLst>
+                </a:gridCol>
+                <a:gridCol w="647395">
+                  <a:extLst>
+                    <a:ext uri="{9D8B030D-6E8A-4147-A177-3AD203B41FA5}">
+                      <a16:colId xmlns:a16="http://schemas.microsoft.com/office/drawing/2014/main" val="20001"/>
+                    </a:ext>
+                  </a:extLst>
+                </a:gridCol>
+                <a:gridCol w="647395">
+                  <a:extLst>
+                    <a:ext uri="{9D8B030D-6E8A-4147-A177-3AD203B41FA5}">
+                      <a16:colId xmlns:a16="http://schemas.microsoft.com/office/drawing/2014/main" val="20002"/>
+                    </a:ext>
+                  </a:extLst>
+                </a:gridCol>
+                <a:gridCol w="647395">
+                  <a:extLst>
+                    <a:ext uri="{9D8B030D-6E8A-4147-A177-3AD203B41FA5}">
+                      <a16:colId xmlns:a16="http://schemas.microsoft.com/office/drawing/2014/main" val="20003"/>
+                    </a:ext>
+                  </a:extLst>
+                </a:gridCol>
+                <a:gridCol w="647395">
+                  <a:extLst>
+                    <a:ext uri="{9D8B030D-6E8A-4147-A177-3AD203B41FA5}">
+                      <a16:colId xmlns:a16="http://schemas.microsoft.com/office/drawing/2014/main" val="20004"/>
+                    </a:ext>
+                  </a:extLst>
+                </a:gridCol>
+                <a:gridCol w="647395">
+                  <a:extLst>
+                    <a:ext uri="{9D8B030D-6E8A-4147-A177-3AD203B41FA5}">
+                      <a16:colId xmlns:a16="http://schemas.microsoft.com/office/drawing/2014/main" val="20005"/>
+                    </a:ext>
+                  </a:extLst>
+                </a:gridCol>
               </a:tblGrid>
               <a:tr h="228600">
                 <a:tc>
                   <a:txBody>
-                    <a:bodyPr wrap="square"/>
+                    <a:bodyPr/>
                     <a:lstStyle/>
                     <a:p>
                       <a:pPr algn="l">
@@ -11251,7 +11232,7 @@
                 </a:tc>
                 <a:tc>
                   <a:txBody>
-                    <a:bodyPr wrap="square"/>
+                    <a:bodyPr/>
                     <a:lstStyle/>
                     <a:p>
                       <a:pPr algn="ctr">
@@ -11293,7 +11274,7 @@
                 </a:tc>
                 <a:tc>
                   <a:txBody>
-                    <a:bodyPr wrap="square"/>
+                    <a:bodyPr/>
                     <a:lstStyle/>
                     <a:p>
                       <a:pPr algn="ctr">
@@ -11335,7 +11316,7 @@
                 </a:tc>
                 <a:tc>
                   <a:txBody>
-                    <a:bodyPr wrap="square"/>
+                    <a:bodyPr/>
                     <a:lstStyle/>
                     <a:p>
                       <a:pPr algn="ctr">
@@ -11377,7 +11358,7 @@
                 </a:tc>
                 <a:tc>
                   <a:txBody>
-                    <a:bodyPr wrap="square"/>
+                    <a:bodyPr/>
                     <a:lstStyle/>
                     <a:p>
                       <a:pPr algn="ctr">
@@ -11419,7 +11400,7 @@
                 </a:tc>
                 <a:tc>
                   <a:txBody>
-                    <a:bodyPr wrap="square"/>
+                    <a:bodyPr/>
                     <a:lstStyle/>
                     <a:p>
                       <a:pPr algn="ctr">
@@ -11459,11 +11440,16 @@
                     </a:solidFill>
                   </a:tcPr>
                 </a:tc>
+                <a:extLst>
+                  <a:ext uri="{0D108BD9-81ED-4DB2-BD59-A6C34878D82A}">
+                    <a16:rowId xmlns:a16="http://schemas.microsoft.com/office/drawing/2014/main" val="10000"/>
+                  </a:ext>
+                </a:extLst>
               </a:tr>
               <a:tr h="228600">
                 <a:tc>
                   <a:txBody>
-                    <a:bodyPr wrap="square"/>
+                    <a:bodyPr/>
                     <a:lstStyle/>
                     <a:p>
                       <a:pPr algn="l">
@@ -11490,8 +11476,14 @@
                     <a:lnR w="12700" cap="flat">
                       <a:noFill/>
                     </a:lnR>
-                    <a:lnT w="12700" cap="flat">
-                      <a:noFill/>
+                    <a:lnT w="19050" cap="flat" cmpd="sng" algn="ctr">
+                      <a:solidFill>
+                        <a:srgbClr val="0A0A0A"/>
+                      </a:solidFill>
+                      <a:prstDash val="solid"/>
+                      <a:round/>
+                      <a:headEnd type="none" w="med" len="med"/>
+                      <a:tailEnd type="none" w="med" len="med"/>
                     </a:lnT>
                     <a:lnB w="9525" cap="flat">
                       <a:solidFill>
@@ -11505,7 +11497,7 @@
                 </a:tc>
                 <a:tc>
                   <a:txBody>
-                    <a:bodyPr wrap="square"/>
+                    <a:bodyPr/>
                     <a:lstStyle/>
                     <a:p>
                       <a:pPr algn="ctr">
@@ -11532,8 +11524,14 @@
                     <a:lnR w="12700" cap="flat">
                       <a:noFill/>
                     </a:lnR>
-                    <a:lnT w="12700" cap="flat">
-                      <a:noFill/>
+                    <a:lnT w="19050" cap="flat" cmpd="sng" algn="ctr">
+                      <a:solidFill>
+                        <a:srgbClr val="0A0A0A"/>
+                      </a:solidFill>
+                      <a:prstDash val="solid"/>
+                      <a:round/>
+                      <a:headEnd type="none" w="med" len="med"/>
+                      <a:tailEnd type="none" w="med" len="med"/>
                     </a:lnT>
                     <a:lnB w="9525" cap="flat">
                       <a:solidFill>
@@ -11547,7 +11545,7 @@
                 </a:tc>
                 <a:tc>
                   <a:txBody>
-                    <a:bodyPr wrap="square"/>
+                    <a:bodyPr/>
                     <a:lstStyle/>
                     <a:p>
                       <a:pPr algn="ctr">
@@ -11574,8 +11572,14 @@
                     <a:lnR w="12700" cap="flat">
                       <a:noFill/>
                     </a:lnR>
-                    <a:lnT w="12700" cap="flat">
-                      <a:noFill/>
+                    <a:lnT w="19050" cap="flat" cmpd="sng" algn="ctr">
+                      <a:solidFill>
+                        <a:srgbClr val="0A0A0A"/>
+                      </a:solidFill>
+                      <a:prstDash val="solid"/>
+                      <a:round/>
+                      <a:headEnd type="none" w="med" len="med"/>
+                      <a:tailEnd type="none" w="med" len="med"/>
                     </a:lnT>
                     <a:lnB w="9525" cap="flat">
                       <a:solidFill>
@@ -11589,7 +11593,7 @@
                 </a:tc>
                 <a:tc>
                   <a:txBody>
-                    <a:bodyPr wrap="square"/>
+                    <a:bodyPr/>
                     <a:lstStyle/>
                     <a:p>
                       <a:pPr algn="ctr">
@@ -11616,8 +11620,14 @@
                     <a:lnR w="12700" cap="flat">
                       <a:noFill/>
                     </a:lnR>
-                    <a:lnT w="12700" cap="flat">
-                      <a:noFill/>
+                    <a:lnT w="19050" cap="flat" cmpd="sng" algn="ctr">
+                      <a:solidFill>
+                        <a:srgbClr val="0A0A0A"/>
+                      </a:solidFill>
+                      <a:prstDash val="solid"/>
+                      <a:round/>
+                      <a:headEnd type="none" w="med" len="med"/>
+                      <a:tailEnd type="none" w="med" len="med"/>
                     </a:lnT>
                     <a:lnB w="9525" cap="flat">
                       <a:solidFill>
@@ -11631,7 +11641,7 @@
                 </a:tc>
                 <a:tc>
                   <a:txBody>
-                    <a:bodyPr wrap="square"/>
+                    <a:bodyPr/>
                     <a:lstStyle/>
                     <a:p>
                       <a:pPr algn="ctr">
@@ -11658,8 +11668,14 @@
                     <a:lnR w="12700" cap="flat">
                       <a:noFill/>
                     </a:lnR>
-                    <a:lnT w="12700" cap="flat">
-                      <a:noFill/>
+                    <a:lnT w="19050" cap="flat" cmpd="sng" algn="ctr">
+                      <a:solidFill>
+                        <a:srgbClr val="0A0A0A"/>
+                      </a:solidFill>
+                      <a:prstDash val="solid"/>
+                      <a:round/>
+                      <a:headEnd type="none" w="med" len="med"/>
+                      <a:tailEnd type="none" w="med" len="med"/>
                     </a:lnT>
                     <a:lnB w="9525" cap="flat">
                       <a:solidFill>
@@ -11673,7 +11689,7 @@
                 </a:tc>
                 <a:tc>
                   <a:txBody>
-                    <a:bodyPr wrap="square"/>
+                    <a:bodyPr/>
                     <a:lstStyle/>
                     <a:p>
                       <a:pPr algn="ctr">
@@ -11700,8 +11716,14 @@
                     <a:lnR w="12700" cap="flat">
                       <a:noFill/>
                     </a:lnR>
-                    <a:lnT w="12700" cap="flat">
-                      <a:noFill/>
+                    <a:lnT w="19050" cap="flat" cmpd="sng" algn="ctr">
+                      <a:solidFill>
+                        <a:srgbClr val="0A0A0A"/>
+                      </a:solidFill>
+                      <a:prstDash val="solid"/>
+                      <a:round/>
+                      <a:headEnd type="none" w="med" len="med"/>
+                      <a:tailEnd type="none" w="med" len="med"/>
                     </a:lnT>
                     <a:lnB w="9525" cap="flat">
                       <a:solidFill>
@@ -11713,11 +11735,16 @@
                     </a:solidFill>
                   </a:tcPr>
                 </a:tc>
+                <a:extLst>
+                  <a:ext uri="{0D108BD9-81ED-4DB2-BD59-A6C34878D82A}">
+                    <a16:rowId xmlns:a16="http://schemas.microsoft.com/office/drawing/2014/main" val="10001"/>
+                  </a:ext>
+                </a:extLst>
               </a:tr>
               <a:tr h="228600">
                 <a:tc>
                   <a:txBody>
-                    <a:bodyPr wrap="square"/>
+                    <a:bodyPr/>
                     <a:lstStyle/>
                     <a:p>
                       <a:pPr algn="l">
@@ -11744,8 +11771,14 @@
                     <a:lnR w="12700" cap="flat">
                       <a:noFill/>
                     </a:lnR>
-                    <a:lnT w="12700" cap="flat">
-                      <a:noFill/>
+                    <a:lnT w="9525" cap="flat" cmpd="sng" algn="ctr">
+                      <a:solidFill>
+                        <a:srgbClr val="D6D6D6"/>
+                      </a:solidFill>
+                      <a:prstDash val="solid"/>
+                      <a:round/>
+                      <a:headEnd type="none" w="med" len="med"/>
+                      <a:tailEnd type="none" w="med" len="med"/>
                     </a:lnT>
                     <a:lnB w="9525" cap="flat">
                       <a:solidFill>
@@ -11759,7 +11792,7 @@
                 </a:tc>
                 <a:tc>
                   <a:txBody>
-                    <a:bodyPr wrap="square"/>
+                    <a:bodyPr/>
                     <a:lstStyle/>
                     <a:p>
                       <a:pPr algn="ctr">
@@ -11786,8 +11819,14 @@
                     <a:lnR w="12700" cap="flat">
                       <a:noFill/>
                     </a:lnR>
-                    <a:lnT w="12700" cap="flat">
-                      <a:noFill/>
+                    <a:lnT w="9525" cap="flat" cmpd="sng" algn="ctr">
+                      <a:solidFill>
+                        <a:srgbClr val="D6D6D6"/>
+                      </a:solidFill>
+                      <a:prstDash val="solid"/>
+                      <a:round/>
+                      <a:headEnd type="none" w="med" len="med"/>
+                      <a:tailEnd type="none" w="med" len="med"/>
                     </a:lnT>
                     <a:lnB w="9525" cap="flat">
                       <a:solidFill>
@@ -11801,7 +11840,7 @@
                 </a:tc>
                 <a:tc>
                   <a:txBody>
-                    <a:bodyPr wrap="square"/>
+                    <a:bodyPr/>
                     <a:lstStyle/>
                     <a:p>
                       <a:pPr algn="ctr">
@@ -11828,8 +11867,14 @@
                     <a:lnR w="12700" cap="flat">
                       <a:noFill/>
                     </a:lnR>
-                    <a:lnT w="12700" cap="flat">
-                      <a:noFill/>
+                    <a:lnT w="9525" cap="flat" cmpd="sng" algn="ctr">
+                      <a:solidFill>
+                        <a:srgbClr val="D6D6D6"/>
+                      </a:solidFill>
+                      <a:prstDash val="solid"/>
+                      <a:round/>
+                      <a:headEnd type="none" w="med" len="med"/>
+                      <a:tailEnd type="none" w="med" len="med"/>
                     </a:lnT>
                     <a:lnB w="9525" cap="flat">
                       <a:solidFill>
@@ -11843,7 +11888,7 @@
                 </a:tc>
                 <a:tc>
                   <a:txBody>
-                    <a:bodyPr wrap="square"/>
+                    <a:bodyPr/>
                     <a:lstStyle/>
                     <a:p>
                       <a:pPr algn="ctr">
@@ -11870,8 +11915,14 @@
                     <a:lnR w="12700" cap="flat">
                       <a:noFill/>
                     </a:lnR>
-                    <a:lnT w="12700" cap="flat">
-                      <a:noFill/>
+                    <a:lnT w="9525" cap="flat" cmpd="sng" algn="ctr">
+                      <a:solidFill>
+                        <a:srgbClr val="D6D6D6"/>
+                      </a:solidFill>
+                      <a:prstDash val="solid"/>
+                      <a:round/>
+                      <a:headEnd type="none" w="med" len="med"/>
+                      <a:tailEnd type="none" w="med" len="med"/>
                     </a:lnT>
                     <a:lnB w="9525" cap="flat">
                       <a:solidFill>
@@ -11885,7 +11936,7 @@
                 </a:tc>
                 <a:tc>
                   <a:txBody>
-                    <a:bodyPr wrap="square"/>
+                    <a:bodyPr/>
                     <a:lstStyle/>
                     <a:p>
                       <a:pPr algn="ctr">
@@ -11912,8 +11963,14 @@
                     <a:lnR w="12700" cap="flat">
                       <a:noFill/>
                     </a:lnR>
-                    <a:lnT w="12700" cap="flat">
-                      <a:noFill/>
+                    <a:lnT w="9525" cap="flat" cmpd="sng" algn="ctr">
+                      <a:solidFill>
+                        <a:srgbClr val="D6D6D6"/>
+                      </a:solidFill>
+                      <a:prstDash val="solid"/>
+                      <a:round/>
+                      <a:headEnd type="none" w="med" len="med"/>
+                      <a:tailEnd type="none" w="med" len="med"/>
                     </a:lnT>
                     <a:lnB w="9525" cap="flat">
                       <a:solidFill>
@@ -11927,7 +11984,7 @@
                 </a:tc>
                 <a:tc>
                   <a:txBody>
-                    <a:bodyPr wrap="square"/>
+                    <a:bodyPr/>
                     <a:lstStyle/>
                     <a:p>
                       <a:pPr algn="ctr">
@@ -11954,8 +12011,14 @@
                     <a:lnR w="12700" cap="flat">
                       <a:noFill/>
                     </a:lnR>
-                    <a:lnT w="12700" cap="flat">
-                      <a:noFill/>
+                    <a:lnT w="9525" cap="flat" cmpd="sng" algn="ctr">
+                      <a:solidFill>
+                        <a:srgbClr val="D6D6D6"/>
+                      </a:solidFill>
+                      <a:prstDash val="solid"/>
+                      <a:round/>
+                      <a:headEnd type="none" w="med" len="med"/>
+                      <a:tailEnd type="none" w="med" len="med"/>
                     </a:lnT>
                     <a:lnB w="9525" cap="flat">
                       <a:solidFill>
@@ -11967,11 +12030,16 @@
                     </a:solidFill>
                   </a:tcPr>
                 </a:tc>
+                <a:extLst>
+                  <a:ext uri="{0D108BD9-81ED-4DB2-BD59-A6C34878D82A}">
+                    <a16:rowId xmlns:a16="http://schemas.microsoft.com/office/drawing/2014/main" val="10002"/>
+                  </a:ext>
+                </a:extLst>
               </a:tr>
               <a:tr h="228600">
                 <a:tc>
                   <a:txBody>
-                    <a:bodyPr wrap="square"/>
+                    <a:bodyPr/>
                     <a:lstStyle/>
                     <a:p>
                       <a:pPr algn="l">
@@ -11998,8 +12066,14 @@
                     <a:lnR w="12700" cap="flat">
                       <a:noFill/>
                     </a:lnR>
-                    <a:lnT w="12700" cap="flat">
-                      <a:noFill/>
+                    <a:lnT w="9525" cap="flat" cmpd="sng" algn="ctr">
+                      <a:solidFill>
+                        <a:srgbClr val="D6D6D6"/>
+                      </a:solidFill>
+                      <a:prstDash val="solid"/>
+                      <a:round/>
+                      <a:headEnd type="none" w="med" len="med"/>
+                      <a:tailEnd type="none" w="med" len="med"/>
                     </a:lnT>
                     <a:lnB w="9525" cap="flat">
                       <a:solidFill>
@@ -12013,7 +12087,7 @@
                 </a:tc>
                 <a:tc>
                   <a:txBody>
-                    <a:bodyPr wrap="square"/>
+                    <a:bodyPr/>
                     <a:lstStyle/>
                     <a:p>
                       <a:pPr algn="ctr">
@@ -12040,8 +12114,14 @@
                     <a:lnR w="12700" cap="flat">
                       <a:noFill/>
                     </a:lnR>
-                    <a:lnT w="12700" cap="flat">
-                      <a:noFill/>
+                    <a:lnT w="9525" cap="flat" cmpd="sng" algn="ctr">
+                      <a:solidFill>
+                        <a:srgbClr val="D6D6D6"/>
+                      </a:solidFill>
+                      <a:prstDash val="solid"/>
+                      <a:round/>
+                      <a:headEnd type="none" w="med" len="med"/>
+                      <a:tailEnd type="none" w="med" len="med"/>
                     </a:lnT>
                     <a:lnB w="9525" cap="flat">
                       <a:solidFill>
@@ -12055,7 +12135,7 @@
                 </a:tc>
                 <a:tc>
                   <a:txBody>
-                    <a:bodyPr wrap="square"/>
+                    <a:bodyPr/>
                     <a:lstStyle/>
                     <a:p>
                       <a:pPr algn="ctr">
@@ -12082,8 +12162,14 @@
                     <a:lnR w="12700" cap="flat">
                       <a:noFill/>
                     </a:lnR>
-                    <a:lnT w="12700" cap="flat">
-                      <a:noFill/>
+                    <a:lnT w="9525" cap="flat" cmpd="sng" algn="ctr">
+                      <a:solidFill>
+                        <a:srgbClr val="D6D6D6"/>
+                      </a:solidFill>
+                      <a:prstDash val="solid"/>
+                      <a:round/>
+                      <a:headEnd type="none" w="med" len="med"/>
+                      <a:tailEnd type="none" w="med" len="med"/>
                     </a:lnT>
                     <a:lnB w="9525" cap="flat">
                       <a:solidFill>
@@ -12097,7 +12183,7 @@
                 </a:tc>
                 <a:tc>
                   <a:txBody>
-                    <a:bodyPr wrap="square"/>
+                    <a:bodyPr/>
                     <a:lstStyle/>
                     <a:p>
                       <a:pPr algn="ctr">
@@ -12124,8 +12210,14 @@
                     <a:lnR w="12700" cap="flat">
                       <a:noFill/>
                     </a:lnR>
-                    <a:lnT w="12700" cap="flat">
-                      <a:noFill/>
+                    <a:lnT w="9525" cap="flat" cmpd="sng" algn="ctr">
+                      <a:solidFill>
+                        <a:srgbClr val="D6D6D6"/>
+                      </a:solidFill>
+                      <a:prstDash val="solid"/>
+                      <a:round/>
+                      <a:headEnd type="none" w="med" len="med"/>
+                      <a:tailEnd type="none" w="med" len="med"/>
                     </a:lnT>
                     <a:lnB w="9525" cap="flat">
                       <a:solidFill>
@@ -12139,7 +12231,7 @@
                 </a:tc>
                 <a:tc>
                   <a:txBody>
-                    <a:bodyPr wrap="square"/>
+                    <a:bodyPr/>
                     <a:lstStyle/>
                     <a:p>
                       <a:pPr algn="ctr">
@@ -12166,8 +12258,14 @@
                     <a:lnR w="12700" cap="flat">
                       <a:noFill/>
                     </a:lnR>
-                    <a:lnT w="12700" cap="flat">
-                      <a:noFill/>
+                    <a:lnT w="9525" cap="flat" cmpd="sng" algn="ctr">
+                      <a:solidFill>
+                        <a:srgbClr val="D6D6D6"/>
+                      </a:solidFill>
+                      <a:prstDash val="solid"/>
+                      <a:round/>
+                      <a:headEnd type="none" w="med" len="med"/>
+                      <a:tailEnd type="none" w="med" len="med"/>
                     </a:lnT>
                     <a:lnB w="9525" cap="flat">
                       <a:solidFill>
@@ -12181,7 +12279,7 @@
                 </a:tc>
                 <a:tc>
                   <a:txBody>
-                    <a:bodyPr wrap="square"/>
+                    <a:bodyPr/>
                     <a:lstStyle/>
                     <a:p>
                       <a:pPr algn="ctr">
@@ -12208,8 +12306,14 @@
                     <a:lnR w="12700" cap="flat">
                       <a:noFill/>
                     </a:lnR>
-                    <a:lnT w="12700" cap="flat">
-                      <a:noFill/>
+                    <a:lnT w="9525" cap="flat" cmpd="sng" algn="ctr">
+                      <a:solidFill>
+                        <a:srgbClr val="D6D6D6"/>
+                      </a:solidFill>
+                      <a:prstDash val="solid"/>
+                      <a:round/>
+                      <a:headEnd type="none" w="med" len="med"/>
+                      <a:tailEnd type="none" w="med" len="med"/>
                     </a:lnT>
                     <a:lnB w="9525" cap="flat">
                       <a:solidFill>
@@ -12221,11 +12325,16 @@
                     </a:solidFill>
                   </a:tcPr>
                 </a:tc>
+                <a:extLst>
+                  <a:ext uri="{0D108BD9-81ED-4DB2-BD59-A6C34878D82A}">
+                    <a16:rowId xmlns:a16="http://schemas.microsoft.com/office/drawing/2014/main" val="10003"/>
+                  </a:ext>
+                </a:extLst>
               </a:tr>
               <a:tr h="228600">
                 <a:tc>
                   <a:txBody>
-                    <a:bodyPr wrap="square"/>
+                    <a:bodyPr/>
                     <a:lstStyle/>
                     <a:p>
                       <a:pPr algn="l">
@@ -12252,8 +12361,14 @@
                     <a:lnR w="12700" cap="flat">
                       <a:noFill/>
                     </a:lnR>
-                    <a:lnT w="12700" cap="flat">
-                      <a:noFill/>
+                    <a:lnT w="9525" cap="flat" cmpd="sng" algn="ctr">
+                      <a:solidFill>
+                        <a:srgbClr val="D6D6D6"/>
+                      </a:solidFill>
+                      <a:prstDash val="solid"/>
+                      <a:round/>
+                      <a:headEnd type="none" w="med" len="med"/>
+                      <a:tailEnd type="none" w="med" len="med"/>
                     </a:lnT>
                     <a:lnB w="9525" cap="flat">
                       <a:solidFill>
@@ -12267,7 +12382,7 @@
                 </a:tc>
                 <a:tc>
                   <a:txBody>
-                    <a:bodyPr wrap="square"/>
+                    <a:bodyPr/>
                     <a:lstStyle/>
                     <a:p>
                       <a:pPr algn="ctr">
@@ -12294,8 +12409,14 @@
                     <a:lnR w="12700" cap="flat">
                       <a:noFill/>
                     </a:lnR>
-                    <a:lnT w="12700" cap="flat">
-                      <a:noFill/>
+                    <a:lnT w="9525" cap="flat" cmpd="sng" algn="ctr">
+                      <a:solidFill>
+                        <a:srgbClr val="D6D6D6"/>
+                      </a:solidFill>
+                      <a:prstDash val="solid"/>
+                      <a:round/>
+                      <a:headEnd type="none" w="med" len="med"/>
+                      <a:tailEnd type="none" w="med" len="med"/>
                     </a:lnT>
                     <a:lnB w="9525" cap="flat">
                       <a:solidFill>
@@ -12309,7 +12430,7 @@
                 </a:tc>
                 <a:tc>
                   <a:txBody>
-                    <a:bodyPr wrap="square"/>
+                    <a:bodyPr/>
                     <a:lstStyle/>
                     <a:p>
                       <a:pPr algn="ctr">
@@ -12336,8 +12457,14 @@
                     <a:lnR w="12700" cap="flat">
                       <a:noFill/>
                     </a:lnR>
-                    <a:lnT w="12700" cap="flat">
-                      <a:noFill/>
+                    <a:lnT w="9525" cap="flat" cmpd="sng" algn="ctr">
+                      <a:solidFill>
+                        <a:srgbClr val="D6D6D6"/>
+                      </a:solidFill>
+                      <a:prstDash val="solid"/>
+                      <a:round/>
+                      <a:headEnd type="none" w="med" len="med"/>
+                      <a:tailEnd type="none" w="med" len="med"/>
                     </a:lnT>
                     <a:lnB w="9525" cap="flat">
                       <a:solidFill>
@@ -12351,7 +12478,7 @@
                 </a:tc>
                 <a:tc>
                   <a:txBody>
-                    <a:bodyPr wrap="square"/>
+                    <a:bodyPr/>
                     <a:lstStyle/>
                     <a:p>
                       <a:pPr algn="ctr">
@@ -12378,8 +12505,14 @@
                     <a:lnR w="12700" cap="flat">
                       <a:noFill/>
                     </a:lnR>
-                    <a:lnT w="12700" cap="flat">
-                      <a:noFill/>
+                    <a:lnT w="9525" cap="flat" cmpd="sng" algn="ctr">
+                      <a:solidFill>
+                        <a:srgbClr val="D6D6D6"/>
+                      </a:solidFill>
+                      <a:prstDash val="solid"/>
+                      <a:round/>
+                      <a:headEnd type="none" w="med" len="med"/>
+                      <a:tailEnd type="none" w="med" len="med"/>
                     </a:lnT>
                     <a:lnB w="9525" cap="flat">
                       <a:solidFill>
@@ -12393,7 +12526,7 @@
                 </a:tc>
                 <a:tc>
                   <a:txBody>
-                    <a:bodyPr wrap="square"/>
+                    <a:bodyPr/>
                     <a:lstStyle/>
                     <a:p>
                       <a:pPr algn="ctr">
@@ -12420,8 +12553,14 @@
                     <a:lnR w="12700" cap="flat">
                       <a:noFill/>
                     </a:lnR>
-                    <a:lnT w="12700" cap="flat">
-                      <a:noFill/>
+                    <a:lnT w="9525" cap="flat" cmpd="sng" algn="ctr">
+                      <a:solidFill>
+                        <a:srgbClr val="D6D6D6"/>
+                      </a:solidFill>
+                      <a:prstDash val="solid"/>
+                      <a:round/>
+                      <a:headEnd type="none" w="med" len="med"/>
+                      <a:tailEnd type="none" w="med" len="med"/>
                     </a:lnT>
                     <a:lnB w="9525" cap="flat">
                       <a:solidFill>
@@ -12435,7 +12574,7 @@
                 </a:tc>
                 <a:tc>
                   <a:txBody>
-                    <a:bodyPr wrap="square"/>
+                    <a:bodyPr/>
                     <a:lstStyle/>
                     <a:p>
                       <a:pPr algn="ctr">
@@ -12462,8 +12601,14 @@
                     <a:lnR w="12700" cap="flat">
                       <a:noFill/>
                     </a:lnR>
-                    <a:lnT w="12700" cap="flat">
-                      <a:noFill/>
+                    <a:lnT w="9525" cap="flat" cmpd="sng" algn="ctr">
+                      <a:solidFill>
+                        <a:srgbClr val="D6D6D6"/>
+                      </a:solidFill>
+                      <a:prstDash val="solid"/>
+                      <a:round/>
+                      <a:headEnd type="none" w="med" len="med"/>
+                      <a:tailEnd type="none" w="med" len="med"/>
                     </a:lnT>
                     <a:lnB w="9525" cap="flat">
                       <a:solidFill>
@@ -12475,11 +12620,16 @@
                     </a:solidFill>
                   </a:tcPr>
                 </a:tc>
+                <a:extLst>
+                  <a:ext uri="{0D108BD9-81ED-4DB2-BD59-A6C34878D82A}">
+                    <a16:rowId xmlns:a16="http://schemas.microsoft.com/office/drawing/2014/main" val="10004"/>
+                  </a:ext>
+                </a:extLst>
               </a:tr>
               <a:tr h="228600">
                 <a:tc>
                   <a:txBody>
-                    <a:bodyPr wrap="square"/>
+                    <a:bodyPr/>
                     <a:lstStyle/>
                     <a:p>
                       <a:pPr algn="l">
@@ -12506,8 +12656,14 @@
                     <a:lnR w="12700" cap="flat">
                       <a:noFill/>
                     </a:lnR>
-                    <a:lnT w="12700" cap="flat">
-                      <a:noFill/>
+                    <a:lnT w="9525" cap="flat" cmpd="sng" algn="ctr">
+                      <a:solidFill>
+                        <a:srgbClr val="D6D6D6"/>
+                      </a:solidFill>
+                      <a:prstDash val="solid"/>
+                      <a:round/>
+                      <a:headEnd type="none" w="med" len="med"/>
+                      <a:tailEnd type="none" w="med" len="med"/>
                     </a:lnT>
                     <a:lnB w="9525" cap="flat">
                       <a:solidFill>
@@ -12521,7 +12677,7 @@
                 </a:tc>
                 <a:tc>
                   <a:txBody>
-                    <a:bodyPr wrap="square"/>
+                    <a:bodyPr/>
                     <a:lstStyle/>
                     <a:p>
                       <a:pPr algn="ctr">
@@ -12548,8 +12704,14 @@
                     <a:lnR w="12700" cap="flat">
                       <a:noFill/>
                     </a:lnR>
-                    <a:lnT w="12700" cap="flat">
-                      <a:noFill/>
+                    <a:lnT w="9525" cap="flat" cmpd="sng" algn="ctr">
+                      <a:solidFill>
+                        <a:srgbClr val="D6D6D6"/>
+                      </a:solidFill>
+                      <a:prstDash val="solid"/>
+                      <a:round/>
+                      <a:headEnd type="none" w="med" len="med"/>
+                      <a:tailEnd type="none" w="med" len="med"/>
                     </a:lnT>
                     <a:lnB w="9525" cap="flat">
                       <a:solidFill>
@@ -12563,7 +12725,7 @@
                 </a:tc>
                 <a:tc>
                   <a:txBody>
-                    <a:bodyPr wrap="square"/>
+                    <a:bodyPr/>
                     <a:lstStyle/>
                     <a:p>
                       <a:pPr algn="ctr">
@@ -12590,8 +12752,14 @@
                     <a:lnR w="12700" cap="flat">
                       <a:noFill/>
                     </a:lnR>
-                    <a:lnT w="12700" cap="flat">
-                      <a:noFill/>
+                    <a:lnT w="9525" cap="flat" cmpd="sng" algn="ctr">
+                      <a:solidFill>
+                        <a:srgbClr val="D6D6D6"/>
+                      </a:solidFill>
+                      <a:prstDash val="solid"/>
+                      <a:round/>
+                      <a:headEnd type="none" w="med" len="med"/>
+                      <a:tailEnd type="none" w="med" len="med"/>
                     </a:lnT>
                     <a:lnB w="9525" cap="flat">
                       <a:solidFill>
@@ -12605,7 +12773,7 @@
                 </a:tc>
                 <a:tc>
                   <a:txBody>
-                    <a:bodyPr wrap="square"/>
+                    <a:bodyPr/>
                     <a:lstStyle/>
                     <a:p>
                       <a:pPr algn="ctr">
@@ -12632,8 +12800,14 @@
                     <a:lnR w="12700" cap="flat">
                       <a:noFill/>
                     </a:lnR>
-                    <a:lnT w="12700" cap="flat">
-                      <a:noFill/>
+                    <a:lnT w="9525" cap="flat" cmpd="sng" algn="ctr">
+                      <a:solidFill>
+                        <a:srgbClr val="D6D6D6"/>
+                      </a:solidFill>
+                      <a:prstDash val="solid"/>
+                      <a:round/>
+                      <a:headEnd type="none" w="med" len="med"/>
+                      <a:tailEnd type="none" w="med" len="med"/>
                     </a:lnT>
                     <a:lnB w="9525" cap="flat">
                       <a:solidFill>
@@ -12647,7 +12821,7 @@
                 </a:tc>
                 <a:tc>
                   <a:txBody>
-                    <a:bodyPr wrap="square"/>
+                    <a:bodyPr/>
                     <a:lstStyle/>
                     <a:p>
                       <a:pPr algn="ctr">
@@ -12674,8 +12848,14 @@
                     <a:lnR w="12700" cap="flat">
                       <a:noFill/>
                     </a:lnR>
-                    <a:lnT w="12700" cap="flat">
-                      <a:noFill/>
+                    <a:lnT w="9525" cap="flat" cmpd="sng" algn="ctr">
+                      <a:solidFill>
+                        <a:srgbClr val="D6D6D6"/>
+                      </a:solidFill>
+                      <a:prstDash val="solid"/>
+                      <a:round/>
+                      <a:headEnd type="none" w="med" len="med"/>
+                      <a:tailEnd type="none" w="med" len="med"/>
                     </a:lnT>
                     <a:lnB w="9525" cap="flat">
                       <a:solidFill>
@@ -12689,7 +12869,7 @@
                 </a:tc>
                 <a:tc>
                   <a:txBody>
-                    <a:bodyPr wrap="square"/>
+                    <a:bodyPr/>
                     <a:lstStyle/>
                     <a:p>
                       <a:pPr algn="ctr">
@@ -12716,8 +12896,14 @@
                     <a:lnR w="12700" cap="flat">
                       <a:noFill/>
                     </a:lnR>
-                    <a:lnT w="12700" cap="flat">
-                      <a:noFill/>
+                    <a:lnT w="9525" cap="flat" cmpd="sng" algn="ctr">
+                      <a:solidFill>
+                        <a:srgbClr val="D6D6D6"/>
+                      </a:solidFill>
+                      <a:prstDash val="solid"/>
+                      <a:round/>
+                      <a:headEnd type="none" w="med" len="med"/>
+                      <a:tailEnd type="none" w="med" len="med"/>
                     </a:lnT>
                     <a:lnB w="9525" cap="flat">
                       <a:solidFill>
@@ -12729,11 +12915,16 @@
                     </a:solidFill>
                   </a:tcPr>
                 </a:tc>
+                <a:extLst>
+                  <a:ext uri="{0D108BD9-81ED-4DB2-BD59-A6C34878D82A}">
+                    <a16:rowId xmlns:a16="http://schemas.microsoft.com/office/drawing/2014/main" val="10005"/>
+                  </a:ext>
+                </a:extLst>
               </a:tr>
               <a:tr h="228600">
                 <a:tc>
                   <a:txBody>
-                    <a:bodyPr wrap="square"/>
+                    <a:bodyPr/>
                     <a:lstStyle/>
                     <a:p>
                       <a:pPr algn="l">
@@ -12760,8 +12951,14 @@
                     <a:lnR w="12700" cap="flat">
                       <a:noFill/>
                     </a:lnR>
-                    <a:lnT w="12700" cap="flat">
-                      <a:noFill/>
+                    <a:lnT w="9525" cap="flat" cmpd="sng" algn="ctr">
+                      <a:solidFill>
+                        <a:srgbClr val="D6D6D6"/>
+                      </a:solidFill>
+                      <a:prstDash val="solid"/>
+                      <a:round/>
+                      <a:headEnd type="none" w="med" len="med"/>
+                      <a:tailEnd type="none" w="med" len="med"/>
                     </a:lnT>
                     <a:lnB w="9525" cap="flat">
                       <a:solidFill>
@@ -12775,7 +12972,7 @@
                 </a:tc>
                 <a:tc>
                   <a:txBody>
-                    <a:bodyPr wrap="square"/>
+                    <a:bodyPr/>
                     <a:lstStyle/>
                     <a:p>
                       <a:pPr algn="ctr">
@@ -12802,8 +12999,14 @@
                     <a:lnR w="12700" cap="flat">
                       <a:noFill/>
                     </a:lnR>
-                    <a:lnT w="12700" cap="flat">
-                      <a:noFill/>
+                    <a:lnT w="9525" cap="flat" cmpd="sng" algn="ctr">
+                      <a:solidFill>
+                        <a:srgbClr val="D6D6D6"/>
+                      </a:solidFill>
+                      <a:prstDash val="solid"/>
+                      <a:round/>
+                      <a:headEnd type="none" w="med" len="med"/>
+                      <a:tailEnd type="none" w="med" len="med"/>
                     </a:lnT>
                     <a:lnB w="9525" cap="flat">
                       <a:solidFill>
@@ -12817,7 +13020,7 @@
                 </a:tc>
                 <a:tc>
                   <a:txBody>
-                    <a:bodyPr wrap="square"/>
+                    <a:bodyPr/>
                     <a:lstStyle/>
                     <a:p>
                       <a:pPr algn="ctr">
@@ -12844,8 +13047,14 @@
                     <a:lnR w="12700" cap="flat">
                       <a:noFill/>
                     </a:lnR>
-                    <a:lnT w="12700" cap="flat">
-                      <a:noFill/>
+                    <a:lnT w="9525" cap="flat" cmpd="sng" algn="ctr">
+                      <a:solidFill>
+                        <a:srgbClr val="D6D6D6"/>
+                      </a:solidFill>
+                      <a:prstDash val="solid"/>
+                      <a:round/>
+                      <a:headEnd type="none" w="med" len="med"/>
+                      <a:tailEnd type="none" w="med" len="med"/>
                     </a:lnT>
                     <a:lnB w="9525" cap="flat">
                       <a:solidFill>
@@ -12859,7 +13068,7 @@
                 </a:tc>
                 <a:tc>
                   <a:txBody>
-                    <a:bodyPr wrap="square"/>
+                    <a:bodyPr/>
                     <a:lstStyle/>
                     <a:p>
                       <a:pPr algn="ctr">
@@ -12886,8 +13095,14 @@
                     <a:lnR w="12700" cap="flat">
                       <a:noFill/>
                     </a:lnR>
-                    <a:lnT w="12700" cap="flat">
-                      <a:noFill/>
+                    <a:lnT w="9525" cap="flat" cmpd="sng" algn="ctr">
+                      <a:solidFill>
+                        <a:srgbClr val="D6D6D6"/>
+                      </a:solidFill>
+                      <a:prstDash val="solid"/>
+                      <a:round/>
+                      <a:headEnd type="none" w="med" len="med"/>
+                      <a:tailEnd type="none" w="med" len="med"/>
                     </a:lnT>
                     <a:lnB w="9525" cap="flat">
                       <a:solidFill>
@@ -12901,7 +13116,7 @@
                 </a:tc>
                 <a:tc>
                   <a:txBody>
-                    <a:bodyPr wrap="square"/>
+                    <a:bodyPr/>
                     <a:lstStyle/>
                     <a:p>
                       <a:pPr algn="ctr">
@@ -12928,8 +13143,14 @@
                     <a:lnR w="12700" cap="flat">
                       <a:noFill/>
                     </a:lnR>
-                    <a:lnT w="12700" cap="flat">
-                      <a:noFill/>
+                    <a:lnT w="9525" cap="flat" cmpd="sng" algn="ctr">
+                      <a:solidFill>
+                        <a:srgbClr val="D6D6D6"/>
+                      </a:solidFill>
+                      <a:prstDash val="solid"/>
+                      <a:round/>
+                      <a:headEnd type="none" w="med" len="med"/>
+                      <a:tailEnd type="none" w="med" len="med"/>
                     </a:lnT>
                     <a:lnB w="9525" cap="flat">
                       <a:solidFill>
@@ -12943,7 +13164,7 @@
                 </a:tc>
                 <a:tc>
                   <a:txBody>
-                    <a:bodyPr wrap="square"/>
+                    <a:bodyPr/>
                     <a:lstStyle/>
                     <a:p>
                       <a:pPr algn="ctr">
@@ -12970,8 +13191,14 @@
                     <a:lnR w="12700" cap="flat">
                       <a:noFill/>
                     </a:lnR>
-                    <a:lnT w="12700" cap="flat">
-                      <a:noFill/>
+                    <a:lnT w="9525" cap="flat" cmpd="sng" algn="ctr">
+                      <a:solidFill>
+                        <a:srgbClr val="D6D6D6"/>
+                      </a:solidFill>
+                      <a:prstDash val="solid"/>
+                      <a:round/>
+                      <a:headEnd type="none" w="med" len="med"/>
+                      <a:tailEnd type="none" w="med" len="med"/>
                     </a:lnT>
                     <a:lnB w="9525" cap="flat">
                       <a:solidFill>
@@ -12983,11 +13210,16 @@
                     </a:solidFill>
                   </a:tcPr>
                 </a:tc>
+                <a:extLst>
+                  <a:ext uri="{0D108BD9-81ED-4DB2-BD59-A6C34878D82A}">
+                    <a16:rowId xmlns:a16="http://schemas.microsoft.com/office/drawing/2014/main" val="10006"/>
+                  </a:ext>
+                </a:extLst>
               </a:tr>
               <a:tr h="228600">
                 <a:tc>
                   <a:txBody>
-                    <a:bodyPr wrap="square"/>
+                    <a:bodyPr/>
                     <a:lstStyle/>
                     <a:p>
                       <a:pPr algn="l">
@@ -13014,8 +13246,14 @@
                     <a:lnR w="12700" cap="flat">
                       <a:noFill/>
                     </a:lnR>
-                    <a:lnT w="12700" cap="flat">
-                      <a:noFill/>
+                    <a:lnT w="9525" cap="flat" cmpd="sng" algn="ctr">
+                      <a:solidFill>
+                        <a:srgbClr val="D6D6D6"/>
+                      </a:solidFill>
+                      <a:prstDash val="solid"/>
+                      <a:round/>
+                      <a:headEnd type="none" w="med" len="med"/>
+                      <a:tailEnd type="none" w="med" len="med"/>
                     </a:lnT>
                     <a:lnB w="9525" cap="flat">
                       <a:solidFill>
@@ -13029,7 +13267,7 @@
                 </a:tc>
                 <a:tc>
                   <a:txBody>
-                    <a:bodyPr wrap="square"/>
+                    <a:bodyPr/>
                     <a:lstStyle/>
                     <a:p>
                       <a:pPr algn="ctr">
@@ -13056,8 +13294,14 @@
                     <a:lnR w="12700" cap="flat">
                       <a:noFill/>
                     </a:lnR>
-                    <a:lnT w="12700" cap="flat">
-                      <a:noFill/>
+                    <a:lnT w="9525" cap="flat" cmpd="sng" algn="ctr">
+                      <a:solidFill>
+                        <a:srgbClr val="D6D6D6"/>
+                      </a:solidFill>
+                      <a:prstDash val="solid"/>
+                      <a:round/>
+                      <a:headEnd type="none" w="med" len="med"/>
+                      <a:tailEnd type="none" w="med" len="med"/>
                     </a:lnT>
                     <a:lnB w="9525" cap="flat">
                       <a:solidFill>
@@ -13071,7 +13315,7 @@
                 </a:tc>
                 <a:tc>
                   <a:txBody>
-                    <a:bodyPr wrap="square"/>
+                    <a:bodyPr/>
                     <a:lstStyle/>
                     <a:p>
                       <a:pPr algn="ctr">
@@ -13098,8 +13342,14 @@
                     <a:lnR w="12700" cap="flat">
                       <a:noFill/>
                     </a:lnR>
-                    <a:lnT w="12700" cap="flat">
-                      <a:noFill/>
+                    <a:lnT w="9525" cap="flat" cmpd="sng" algn="ctr">
+                      <a:solidFill>
+                        <a:srgbClr val="D6D6D6"/>
+                      </a:solidFill>
+                      <a:prstDash val="solid"/>
+                      <a:round/>
+                      <a:headEnd type="none" w="med" len="med"/>
+                      <a:tailEnd type="none" w="med" len="med"/>
                     </a:lnT>
                     <a:lnB w="9525" cap="flat">
                       <a:solidFill>
@@ -13113,7 +13363,7 @@
                 </a:tc>
                 <a:tc>
                   <a:txBody>
-                    <a:bodyPr wrap="square"/>
+                    <a:bodyPr/>
                     <a:lstStyle/>
                     <a:p>
                       <a:pPr algn="ctr">
@@ -13140,8 +13390,14 @@
                     <a:lnR w="12700" cap="flat">
                       <a:noFill/>
                     </a:lnR>
-                    <a:lnT w="12700" cap="flat">
-                      <a:noFill/>
+                    <a:lnT w="9525" cap="flat" cmpd="sng" algn="ctr">
+                      <a:solidFill>
+                        <a:srgbClr val="D6D6D6"/>
+                      </a:solidFill>
+                      <a:prstDash val="solid"/>
+                      <a:round/>
+                      <a:headEnd type="none" w="med" len="med"/>
+                      <a:tailEnd type="none" w="med" len="med"/>
                     </a:lnT>
                     <a:lnB w="9525" cap="flat">
                       <a:solidFill>
@@ -13155,7 +13411,7 @@
                 </a:tc>
                 <a:tc>
                   <a:txBody>
-                    <a:bodyPr wrap="square"/>
+                    <a:bodyPr/>
                     <a:lstStyle/>
                     <a:p>
                       <a:pPr algn="ctr">
@@ -13182,8 +13438,14 @@
                     <a:lnR w="12700" cap="flat">
                       <a:noFill/>
                     </a:lnR>
-                    <a:lnT w="12700" cap="flat">
-                      <a:noFill/>
+                    <a:lnT w="9525" cap="flat" cmpd="sng" algn="ctr">
+                      <a:solidFill>
+                        <a:srgbClr val="D6D6D6"/>
+                      </a:solidFill>
+                      <a:prstDash val="solid"/>
+                      <a:round/>
+                      <a:headEnd type="none" w="med" len="med"/>
+                      <a:tailEnd type="none" w="med" len="med"/>
                     </a:lnT>
                     <a:lnB w="9525" cap="flat">
                       <a:solidFill>
@@ -13197,7 +13459,7 @@
                 </a:tc>
                 <a:tc>
                   <a:txBody>
-                    <a:bodyPr wrap="square"/>
+                    <a:bodyPr/>
                     <a:lstStyle/>
                     <a:p>
                       <a:pPr algn="ctr">
@@ -13224,8 +13486,14 @@
                     <a:lnR w="12700" cap="flat">
                       <a:noFill/>
                     </a:lnR>
-                    <a:lnT w="12700" cap="flat">
-                      <a:noFill/>
+                    <a:lnT w="9525" cap="flat" cmpd="sng" algn="ctr">
+                      <a:solidFill>
+                        <a:srgbClr val="D6D6D6"/>
+                      </a:solidFill>
+                      <a:prstDash val="solid"/>
+                      <a:round/>
+                      <a:headEnd type="none" w="med" len="med"/>
+                      <a:tailEnd type="none" w="med" len="med"/>
                     </a:lnT>
                     <a:lnB w="9525" cap="flat">
                       <a:solidFill>
@@ -13237,6 +13505,11 @@
                     </a:solidFill>
                   </a:tcPr>
                 </a:tc>
+                <a:extLst>
+                  <a:ext uri="{0D108BD9-81ED-4DB2-BD59-A6C34878D82A}">
+                    <a16:rowId xmlns:a16="http://schemas.microsoft.com/office/drawing/2014/main" val="10007"/>
+                  </a:ext>
+                </a:extLst>
               </a:tr>
             </a:tbl>
           </a:graphicData>
@@ -13259,7 +13532,7 @@
           <a:noFill/>
         </p:spPr>
         <p:txBody>
-          <a:bodyPr wrap="square" anchor="t" lIns="0" rIns="0" tIns="0" bIns="0"/>
+          <a:bodyPr wrap="square" lIns="0" tIns="0" rIns="0" bIns="0" anchor="t"/>
           <a:lstStyle/>
           <a:p>
             <a:pPr algn="l">
